--- a/Presntations/ARIA_Technical_Presentation_Ghazi_Mabrouki_FINAL.pptx
+++ b/Presntations/ARIA_Technical_Presentation_Ghazi_Mabrouki_FINAL.pptx
@@ -26,6 +26,8 @@
     <p:sldId id="274" r:id="rId26"/>
     <p:sldId id="275" r:id="rId27"/>
     <p:sldId id="287" r:id="rId40"/>
+    <p:sldId id="288" r:id="rId41"/>
+    <p:sldId id="289" r:id="rId42"/>
     <p:sldId id="276" r:id="rId28"/>
     <p:sldId id="277" r:id="rId29"/>
     <p:sldId id="278" r:id="rId30"/>
@@ -2265,6 +2267,146 @@
           <a:p>
             <a:r>
               <a:t>&lt;!--pageType:final--&gt;</a:t>
+            </a:r>
+          </a:p>
+        </p:txBody>
+      </p:sp>
+      <p:sp>
+        <p:nvSpPr>
+          <p:cNvPr id="4" name="Slide Number Placeholder 3"/>
+          <p:cNvSpPr>
+            <a:spLocks noGrp="1"/>
+          </p:cNvSpPr>
+          <p:nvPr>
+            <p:ph type="sldNum" idx="5" sz="quarter"/>
+          </p:nvPr>
+        </p:nvSpPr>
+        <p:spPr/>
+      </p:sp>
+    </p:spTree>
+  </p:cSld>
+  <p:clrMapOvr>
+    <a:masterClrMapping/>
+  </p:clrMapOvr>
+</p:notes>
+</file>
+
+<file path=ppt/notesSlides/notesSlide32.xml><?xml version="1.0" encoding="utf-8"?>
+<p:notes xmlns:a="http://schemas.openxmlformats.org/drawingml/2006/main" xmlns:p="http://schemas.openxmlformats.org/presentationml/2006/main" xmlns:r="http://schemas.openxmlformats.org/officeDocument/2006/relationships">
+  <p:cSld>
+    <p:spTree>
+      <p:nvGrpSpPr>
+        <p:cNvPr id="1" name=""/>
+        <p:cNvGrpSpPr/>
+        <p:nvPr/>
+      </p:nvGrpSpPr>
+      <p:grpSpPr>
+        <a:xfrm>
+          <a:off x="0" y="0"/>
+          <a:ext cx="0" cy="0"/>
+          <a:chOff x="0" y="0"/>
+          <a:chExt cx="0" cy="0"/>
+        </a:xfrm>
+      </p:grpSpPr>
+      <p:sp>
+        <p:nvSpPr>
+          <p:cNvPr id="2" name="Slide Image Placeholder 1"/>
+          <p:cNvSpPr>
+            <a:spLocks noGrp="1"/>
+          </p:cNvSpPr>
+          <p:nvPr>
+            <p:ph type="sldImg" idx="2"/>
+          </p:nvPr>
+        </p:nvSpPr>
+        <p:spPr/>
+      </p:sp>
+      <p:sp>
+        <p:nvSpPr>
+          <p:cNvPr id="3" name="Notes Placeholder 2"/>
+          <p:cNvSpPr>
+            <a:spLocks noGrp="1"/>
+          </p:cNvSpPr>
+          <p:nvPr>
+            <p:ph type="body" idx="3" sz="quarter"/>
+          </p:nvPr>
+        </p:nvSpPr>
+        <p:spPr/>
+        <p:txBody>
+          <a:bodyPr/>
+          <a:lstStyle/>
+          <a:p>
+            <a:r>
+              <a:t>&lt;!--pageType:content--&gt;</a:t>
+            </a:r>
+          </a:p>
+        </p:txBody>
+      </p:sp>
+      <p:sp>
+        <p:nvSpPr>
+          <p:cNvPr id="4" name="Slide Number Placeholder 3"/>
+          <p:cNvSpPr>
+            <a:spLocks noGrp="1"/>
+          </p:cNvSpPr>
+          <p:nvPr>
+            <p:ph type="sldNum" idx="5" sz="quarter"/>
+          </p:nvPr>
+        </p:nvSpPr>
+        <p:spPr/>
+      </p:sp>
+    </p:spTree>
+  </p:cSld>
+  <p:clrMapOvr>
+    <a:masterClrMapping/>
+  </p:clrMapOvr>
+</p:notes>
+</file>
+
+<file path=ppt/notesSlides/notesSlide33.xml><?xml version="1.0" encoding="utf-8"?>
+<p:notes xmlns:a="http://schemas.openxmlformats.org/drawingml/2006/main" xmlns:p="http://schemas.openxmlformats.org/presentationml/2006/main" xmlns:r="http://schemas.openxmlformats.org/officeDocument/2006/relationships">
+  <p:cSld>
+    <p:spTree>
+      <p:nvGrpSpPr>
+        <p:cNvPr id="1" name=""/>
+        <p:cNvGrpSpPr/>
+        <p:nvPr/>
+      </p:nvGrpSpPr>
+      <p:grpSpPr>
+        <a:xfrm>
+          <a:off x="0" y="0"/>
+          <a:ext cx="0" cy="0"/>
+          <a:chOff x="0" y="0"/>
+          <a:chExt cx="0" cy="0"/>
+        </a:xfrm>
+      </p:grpSpPr>
+      <p:sp>
+        <p:nvSpPr>
+          <p:cNvPr id="2" name="Slide Image Placeholder 1"/>
+          <p:cNvSpPr>
+            <a:spLocks noGrp="1"/>
+          </p:cNvSpPr>
+          <p:nvPr>
+            <p:ph type="sldImg" idx="2"/>
+          </p:nvPr>
+        </p:nvSpPr>
+        <p:spPr/>
+      </p:sp>
+      <p:sp>
+        <p:nvSpPr>
+          <p:cNvPr id="3" name="Notes Placeholder 2"/>
+          <p:cNvSpPr>
+            <a:spLocks noGrp="1"/>
+          </p:cNvSpPr>
+          <p:nvPr>
+            <p:ph type="body" idx="3" sz="quarter"/>
+          </p:nvPr>
+        </p:nvSpPr>
+        <p:spPr/>
+        <p:txBody>
+          <a:bodyPr/>
+          <a:lstStyle/>
+          <a:p>
+            <a:r>
+              <a:t>&lt;!--pageType:content--&gt;</a:t>
             </a:r>
           </a:p>
         </p:txBody>
@@ -25421,14 +25563,6 @@
 <file path=ppt/slides/slide22.xml><?xml version="1.0" encoding="utf-8"?>
 <p:sld xmlns:a="http://schemas.openxmlformats.org/drawingml/2006/main" xmlns:p="http://schemas.openxmlformats.org/presentationml/2006/main" xmlns:r="http://schemas.openxmlformats.org/officeDocument/2006/relationships">
   <p:cSld>
-    <p:bg>
-      <p:bgPr>
-        <a:solidFill>
-          <a:srgbClr val="FAFAF8"/>
-        </a:solidFill>
-        <a:effectLst/>
-      </p:bgPr>
-    </p:bg>
     <p:spTree>
       <p:nvGrpSpPr>
         <p:cNvPr id="1" name=""/>
@@ -25438,14 +25572,14 @@
       <p:grpSpPr/>
       <p:sp>
         <p:nvSpPr>
-          <p:cNvPr id="2" name="dsl:ch6-number-decorative"/>
+          <p:cNvPr id="2" name="TextBox 1"/>
           <p:cNvSpPr txBox="1"/>
           <p:nvPr/>
         </p:nvSpPr>
         <p:spPr>
           <a:xfrm>
-            <a:off x="381000" y="571500"/>
-            <a:ext cx="4381500" cy="2476500"/>
+            <a:off x="566928" y="457200"/>
+            <a:ext cx="11064240" cy="640080"/>
           </a:xfrm>
           <a:prstGeom prst="rect">
             <a:avLst/>
@@ -25453,35 +25587,34 @@
           <a:noFill/>
         </p:spPr>
         <p:txBody>
-          <a:bodyPr wrap="none" anchor="t">
-            <a:noAutofit/>
+          <a:bodyPr wrap="square" lIns="0" rIns="0" tIns="0" bIns="0">
+            <a:spAutoFit/>
           </a:bodyPr>
           <a:lstStyle/>
           <a:p>
             <a:pPr algn="l"/>
             <a:r>
-              <a:rPr sz="15000" noProof="1">
+              <a:rPr sz="2850" b="0">
                 <a:solidFill>
                   <a:srgbClr val="2D6A6A"/>
                 </a:solidFill>
                 <a:latin typeface="Liter"/>
-                <a:ea typeface="Liter"/>
-              </a:rPr>
-              <a:t>06</a:t>
-            </a:r>
-          </a:p>
-        </p:txBody>
-      </p:sp>
-      <p:sp>
-        <p:nvSpPr>
-          <p:cNvPr id="3" name="dsl:ch6-accent-bar"/>
+              </a:rPr>
+              <a:t>Platform Tour — Detection &amp; Investigation</a:t>
+            </a:r>
+          </a:p>
+        </p:txBody>
+      </p:sp>
+      <p:sp>
+        <p:nvSpPr>
+          <p:cNvPr id="3" name="Rectangle 2"/>
           <p:cNvSpPr/>
           <p:nvPr/>
         </p:nvSpPr>
         <p:spPr>
           <a:xfrm>
-            <a:off x="571500" y="3238500"/>
-            <a:ext cx="762000" cy="38100"/>
+            <a:off x="566928" y="1078992"/>
+            <a:ext cx="758952" cy="36576"/>
           </a:xfrm>
           <a:prstGeom prst="rect">
             <a:avLst/>
@@ -25492,7 +25625,6 @@
           <a:ln>
             <a:noFill/>
           </a:ln>
-          <a:effectLst/>
         </p:spPr>
         <p:style>
           <a:lnRef idx="1">
@@ -25518,14 +25650,14 @@
       </p:sp>
       <p:sp>
         <p:nvSpPr>
-          <p:cNvPr id="4" name="dsl:ch6-title"/>
+          <p:cNvPr id="4" name="TextBox 3"/>
           <p:cNvSpPr txBox="1"/>
           <p:nvPr/>
         </p:nvSpPr>
         <p:spPr>
           <a:xfrm>
-            <a:off x="571500" y="3429000"/>
-            <a:ext cx="8572500" cy="523875"/>
+            <a:off x="566928" y="1152144"/>
+            <a:ext cx="11064240" cy="365760"/>
           </a:xfrm>
           <a:prstGeom prst="rect">
             <a:avLst/>
@@ -25533,35 +25665,93 @@
           <a:noFill/>
         </p:spPr>
         <p:txBody>
-          <a:bodyPr wrap="none" anchor="ctr">
-            <a:noAutofit/>
+          <a:bodyPr wrap="square" lIns="0" rIns="0" tIns="0" bIns="0">
+            <a:spAutoFit/>
           </a:bodyPr>
           <a:lstStyle/>
           <a:p>
             <a:pPr algn="l"/>
             <a:r>
-              <a:rPr sz="2850" noProof="1">
-                <a:solidFill>
-                  <a:srgbClr val="2D6A6A"/>
+              <a:rPr sz="1500" b="0">
+                <a:solidFill>
+                  <a:srgbClr val="5C6B73"/>
+                </a:solidFill>
+                <a:latin typeface="QuattrocentoSans"/>
+              </a:rPr>
+              <a:t>Captured from the running system — investigation, runtime &amp; traffic views.</a:t>
+            </a:r>
+          </a:p>
+        </p:txBody>
+      </p:sp>
+      <p:pic>
+        <p:nvPicPr>
+          <p:cNvPr id="5" name="Picture 4" descr="board_tech_a.png"/>
+          <p:cNvPicPr>
+            <a:picLocks noChangeAspect="1"/>
+          </p:cNvPicPr>
+          <p:nvPr/>
+        </p:nvPicPr>
+        <p:blipFill>
+          <a:blip r:embed="rId2"/>
+          <a:stretch>
+            <a:fillRect/>
+          </a:stretch>
+        </p:blipFill>
+        <p:spPr>
+          <a:xfrm>
+            <a:off x="566928" y="1572768"/>
+            <a:ext cx="11064240" cy="4517898"/>
+          </a:xfrm>
+          <a:prstGeom prst="rect">
+            <a:avLst/>
+          </a:prstGeom>
+        </p:spPr>
+      </p:pic>
+      <p:sp>
+        <p:nvSpPr>
+          <p:cNvPr id="6" name="TextBox 5"/>
+          <p:cNvSpPr txBox="1"/>
+          <p:nvPr/>
+        </p:nvSpPr>
+        <p:spPr>
+          <a:xfrm>
+            <a:off x="571500" y="6629400"/>
+            <a:ext cx="1904695" cy="152704"/>
+          </a:xfrm>
+          <a:prstGeom prst="rect">
+            <a:avLst/>
+          </a:prstGeom>
+          <a:noFill/>
+        </p:spPr>
+        <p:txBody>
+          <a:bodyPr wrap="square" lIns="0" rIns="0" tIns="0" bIns="0">
+            <a:spAutoFit/>
+          </a:bodyPr>
+          <a:lstStyle/>
+          <a:p>
+            <a:pPr algn="l"/>
+            <a:r>
+              <a:rPr sz="825" b="0">
+                <a:solidFill>
+                  <a:srgbClr val="5C6B73"/>
                 </a:solidFill>
                 <a:latin typeface="Liter"/>
-                <a:ea typeface="Liter"/>
-              </a:rPr>
-              <a:t>06 — Architecture &amp; Deployment</a:t>
-            </a:r>
-          </a:p>
-        </p:txBody>
-      </p:sp>
-      <p:sp>
-        <p:nvSpPr>
-          <p:cNvPr id="5" name="dsl:ch6-subtitle"/>
+              </a:rPr>
+              <a:t>GHAZI MABROUKI</a:t>
+            </a:r>
+          </a:p>
+        </p:txBody>
+      </p:sp>
+      <p:sp>
+        <p:nvSpPr>
+          <p:cNvPr id="7" name="dsl:footer-page"/>
           <p:cNvSpPr txBox="1"/>
           <p:nvPr/>
         </p:nvSpPr>
         <p:spPr>
           <a:xfrm>
-            <a:off x="571500" y="4095750"/>
-            <a:ext cx="8572500" cy="333375"/>
+            <a:off x="11334902" y="6629400"/>
+            <a:ext cx="381304" cy="152704"/>
           </a:xfrm>
           <a:prstGeom prst="rect">
             <a:avLst/>
@@ -25569,21 +25759,20 @@
           <a:noFill/>
         </p:spPr>
         <p:txBody>
-          <a:bodyPr wrap="none" anchor="ctr">
-            <a:noAutofit/>
+          <a:bodyPr wrap="square" lIns="0" rIns="0" tIns="0" bIns="0">
+            <a:spAutoFit/>
           </a:bodyPr>
           <a:lstStyle/>
           <a:p>
-            <a:pPr algn="l"/>
-            <a:r>
-              <a:rPr sz="1500" noProof="1">
+            <a:pPr algn="r"/>
+            <a:r>
+              <a:rPr sz="900" b="0">
                 <a:solidFill>
                   <a:srgbClr val="5C6B73"/>
                 </a:solidFill>
-                <a:latin typeface="QuattrocentoSans"/>
-                <a:ea typeface="QuattrocentoSans"/>
-              </a:rPr>
-              <a:t>Four-tier stack deployed on Huawei Cloud</a:t>
+                <a:latin typeface="Liter"/>
+              </a:rPr>
+              <a:t>22</a:t>
             </a:r>
           </a:p>
         </p:txBody>
@@ -25599,14 +25788,6 @@
 <file path=ppt/slides/slide23.xml><?xml version="1.0" encoding="utf-8"?>
 <p:sld xmlns:a="http://schemas.openxmlformats.org/drawingml/2006/main" xmlns:p="http://schemas.openxmlformats.org/presentationml/2006/main" xmlns:r="http://schemas.openxmlformats.org/officeDocument/2006/relationships">
   <p:cSld>
-    <p:bg>
-      <p:bgPr>
-        <a:solidFill>
-          <a:srgbClr val="FAFAF8"/>
-        </a:solidFill>
-        <a:effectLst/>
-      </p:bgPr>
-    </p:bg>
     <p:spTree>
       <p:nvGrpSpPr>
         <p:cNvPr id="1" name=""/>
@@ -25616,58 +25797,49 @@
       <p:grpSpPr/>
       <p:sp>
         <p:nvSpPr>
-          <p:cNvPr id="2" name="dsl:nav-bg"/>
+          <p:cNvPr id="2" name="TextBox 1"/>
+          <p:cNvSpPr txBox="1"/>
+          <p:nvPr/>
+        </p:nvSpPr>
+        <p:spPr>
+          <a:xfrm>
+            <a:off x="566928" y="457200"/>
+            <a:ext cx="11064240" cy="640080"/>
+          </a:xfrm>
+          <a:prstGeom prst="rect">
+            <a:avLst/>
+          </a:prstGeom>
+          <a:noFill/>
+        </p:spPr>
+        <p:txBody>
+          <a:bodyPr wrap="square" lIns="0" rIns="0" tIns="0" bIns="0">
+            <a:spAutoFit/>
+          </a:bodyPr>
+          <a:lstStyle/>
+          <a:p>
+            <a:pPr algn="l"/>
+            <a:r>
+              <a:rPr sz="2850" b="0">
+                <a:solidFill>
+                  <a:srgbClr val="2D6A6A"/>
+                </a:solidFill>
+                <a:latin typeface="Liter"/>
+              </a:rPr>
+              <a:t>Platform Tour — AI &amp; Operations</a:t>
+            </a:r>
+          </a:p>
+        </p:txBody>
+      </p:sp>
+      <p:sp>
+        <p:nvSpPr>
+          <p:cNvPr id="3" name="Rectangle 2"/>
           <p:cNvSpPr/>
           <p:nvPr/>
         </p:nvSpPr>
         <p:spPr>
           <a:xfrm>
-            <a:off x="0" y="0"/>
-            <a:ext cx="12192000" cy="304800"/>
-          </a:xfrm>
-          <a:prstGeom prst="rect">
-            <a:avLst/>
-          </a:prstGeom>
-          <a:solidFill>
-            <a:srgbClr val="2D6A6A"/>
-          </a:solidFill>
-          <a:ln>
-            <a:noFill/>
-          </a:ln>
-          <a:effectLst/>
-        </p:spPr>
-        <p:style>
-          <a:lnRef idx="1">
-            <a:schemeClr val="accent1"/>
-          </a:lnRef>
-          <a:fillRef idx="3">
-            <a:schemeClr val="accent1"/>
-          </a:fillRef>
-          <a:effectRef idx="2">
-            <a:schemeClr val="accent1"/>
-          </a:effectRef>
-          <a:fontRef idx="minor">
-            <a:schemeClr val="lt1"/>
-          </a:fontRef>
-        </p:style>
-        <p:txBody>
-          <a:bodyPr rtlCol="0" anchor="ctr"/>
-          <a:lstStyle/>
-          <a:p>
-            <a:pPr algn="ctr"/>
-          </a:p>
-        </p:txBody>
-      </p:sp>
-      <p:sp>
-        <p:nvSpPr>
-          <p:cNvPr id="3" name="dsl:nav-active-underline"/>
-          <p:cNvSpPr/>
-          <p:nvPr/>
-        </p:nvSpPr>
-        <p:spPr>
-          <a:xfrm>
-            <a:off x="8001000" y="276225"/>
-            <a:ext cx="762000" cy="28575"/>
+            <a:off x="566928" y="1078992"/>
+            <a:ext cx="758952" cy="36576"/>
           </a:xfrm>
           <a:prstGeom prst="rect">
             <a:avLst/>
@@ -25678,7 +25850,6 @@
           <a:ln>
             <a:noFill/>
           </a:ln>
-          <a:effectLst/>
         </p:spPr>
         <p:style>
           <a:lnRef idx="1">
@@ -25704,14 +25875,14 @@
       </p:sp>
       <p:sp>
         <p:nvSpPr>
-          <p:cNvPr id="4" name="dsl:nav-1"/>
+          <p:cNvPr id="4" name="TextBox 3"/>
           <p:cNvSpPr txBox="1"/>
           <p:nvPr/>
         </p:nvSpPr>
         <p:spPr>
           <a:xfrm>
-            <a:off x="0" y="0"/>
-            <a:ext cx="1524000" cy="304800"/>
+            <a:off x="566928" y="1152144"/>
+            <a:ext cx="11064240" cy="365760"/>
           </a:xfrm>
           <a:prstGeom prst="rect">
             <a:avLst/>
@@ -25719,35 +25890,93 @@
           <a:noFill/>
         </p:spPr>
         <p:txBody>
-          <a:bodyPr wrap="none" anchor="ctr">
-            <a:noAutofit/>
+          <a:bodyPr wrap="square" lIns="0" rIns="0" tIns="0" bIns="0">
+            <a:spAutoFit/>
           </a:bodyPr>
           <a:lstStyle/>
           <a:p>
-            <a:pPr algn="ctr"/>
-            <a:r>
-              <a:rPr sz="825" noProof="1" spc="150">
-                <a:solidFill>
-                  <a:srgbClr val="8FB3B3"/>
+            <a:pPr algn="l"/>
+            <a:r>
+              <a:rPr sz="1500" b="0">
+                <a:solidFill>
+                  <a:srgbClr val="5C6B73"/>
+                </a:solidFill>
+                <a:latin typeface="QuattrocentoSans"/>
+              </a:rPr>
+              <a:t>Estate-wide assistant, natural-language operator, live metrics &amp; settings.</a:t>
+            </a:r>
+          </a:p>
+        </p:txBody>
+      </p:sp>
+      <p:pic>
+        <p:nvPicPr>
+          <p:cNvPr id="5" name="Picture 4" descr="board_tech_b.png"/>
+          <p:cNvPicPr>
+            <a:picLocks noChangeAspect="1"/>
+          </p:cNvPicPr>
+          <p:nvPr/>
+        </p:nvPicPr>
+        <p:blipFill>
+          <a:blip r:embed="rId2"/>
+          <a:stretch>
+            <a:fillRect/>
+          </a:stretch>
+        </p:blipFill>
+        <p:spPr>
+          <a:xfrm>
+            <a:off x="566928" y="1572768"/>
+            <a:ext cx="11064240" cy="4517898"/>
+          </a:xfrm>
+          <a:prstGeom prst="rect">
+            <a:avLst/>
+          </a:prstGeom>
+        </p:spPr>
+      </p:pic>
+      <p:sp>
+        <p:nvSpPr>
+          <p:cNvPr id="6" name="TextBox 5"/>
+          <p:cNvSpPr txBox="1"/>
+          <p:nvPr/>
+        </p:nvSpPr>
+        <p:spPr>
+          <a:xfrm>
+            <a:off x="571500" y="6629400"/>
+            <a:ext cx="1904695" cy="152704"/>
+          </a:xfrm>
+          <a:prstGeom prst="rect">
+            <a:avLst/>
+          </a:prstGeom>
+          <a:noFill/>
+        </p:spPr>
+        <p:txBody>
+          <a:bodyPr wrap="square" lIns="0" rIns="0" tIns="0" bIns="0">
+            <a:spAutoFit/>
+          </a:bodyPr>
+          <a:lstStyle/>
+          <a:p>
+            <a:pPr algn="l"/>
+            <a:r>
+              <a:rPr sz="825" b="0">
+                <a:solidFill>
+                  <a:srgbClr val="5C6B73"/>
                 </a:solidFill>
                 <a:latin typeface="Liter"/>
-                <a:ea typeface="Liter"/>
-              </a:rPr>
-              <a:t>SOC CHALLENGE</a:t>
-            </a:r>
-          </a:p>
-        </p:txBody>
-      </p:sp>
-      <p:sp>
-        <p:nvSpPr>
-          <p:cNvPr id="5" name="dsl:nav-2"/>
+              </a:rPr>
+              <a:t>GHAZI MABROUKI</a:t>
+            </a:r>
+          </a:p>
+        </p:txBody>
+      </p:sp>
+      <p:sp>
+        <p:nvSpPr>
+          <p:cNvPr id="7" name="dsl:footer-page"/>
           <p:cNvSpPr txBox="1"/>
           <p:nvPr/>
         </p:nvSpPr>
         <p:spPr>
           <a:xfrm>
-            <a:off x="1524000" y="0"/>
-            <a:ext cx="1524000" cy="304800"/>
+            <a:off x="11334902" y="6629400"/>
+            <a:ext cx="381304" cy="152704"/>
           </a:xfrm>
           <a:prstGeom prst="rect">
             <a:avLst/>
@@ -25755,1385 +25984,18 @@
           <a:noFill/>
         </p:spPr>
         <p:txBody>
-          <a:bodyPr wrap="none" anchor="ctr">
-            <a:noAutofit/>
+          <a:bodyPr wrap="square" lIns="0" rIns="0" tIns="0" bIns="0">
+            <a:spAutoFit/>
           </a:bodyPr>
           <a:lstStyle/>
           <a:p>
-            <a:pPr algn="ctr"/>
-            <a:r>
-              <a:rPr sz="825" noProof="1" spc="150">
-                <a:solidFill>
-                  <a:srgbClr val="8FB3B3"/>
+            <a:pPr algn="r"/>
+            <a:r>
+              <a:rPr sz="900" b="0">
+                <a:solidFill>
+                  <a:srgbClr val="5C6B73"/>
                 </a:solidFill>
                 <a:latin typeface="Liter"/>
-                <a:ea typeface="Liter"/>
-              </a:rPr>
-              <a:t>OVERVIEW</a:t>
-            </a:r>
-          </a:p>
-        </p:txBody>
-      </p:sp>
-      <p:sp>
-        <p:nvSpPr>
-          <p:cNvPr id="6" name="dsl:nav-3"/>
-          <p:cNvSpPr txBox="1"/>
-          <p:nvPr/>
-        </p:nvSpPr>
-        <p:spPr>
-          <a:xfrm>
-            <a:off x="3048000" y="0"/>
-            <a:ext cx="1524000" cy="304800"/>
-          </a:xfrm>
-          <a:prstGeom prst="rect">
-            <a:avLst/>
-          </a:prstGeom>
-          <a:noFill/>
-        </p:spPr>
-        <p:txBody>
-          <a:bodyPr wrap="none" anchor="ctr">
-            <a:noAutofit/>
-          </a:bodyPr>
-          <a:lstStyle/>
-          <a:p>
-            <a:pPr algn="ctr"/>
-            <a:r>
-              <a:rPr sz="825" noProof="1" spc="150">
-                <a:solidFill>
-                  <a:srgbClr val="8FB3B3"/>
-                </a:solidFill>
-                <a:latin typeface="Liter"/>
-                <a:ea typeface="Liter"/>
-              </a:rPr>
-              <a:t>DATA</a:t>
-            </a:r>
-          </a:p>
-        </p:txBody>
-      </p:sp>
-      <p:sp>
-        <p:nvSpPr>
-          <p:cNvPr id="7" name="dsl:nav-4"/>
-          <p:cNvSpPr txBox="1"/>
-          <p:nvPr/>
-        </p:nvSpPr>
-        <p:spPr>
-          <a:xfrm>
-            <a:off x="4572000" y="0"/>
-            <a:ext cx="1524000" cy="304800"/>
-          </a:xfrm>
-          <a:prstGeom prst="rect">
-            <a:avLst/>
-          </a:prstGeom>
-          <a:noFill/>
-        </p:spPr>
-        <p:txBody>
-          <a:bodyPr wrap="none" anchor="ctr">
-            <a:noAutofit/>
-          </a:bodyPr>
-          <a:lstStyle/>
-          <a:p>
-            <a:pPr algn="ctr"/>
-            <a:r>
-              <a:rPr sz="825" noProof="1" spc="150">
-                <a:solidFill>
-                  <a:srgbClr val="8FB3B3"/>
-                </a:solidFill>
-                <a:latin typeface="Liter"/>
-                <a:ea typeface="Liter"/>
-              </a:rPr>
-              <a:t>PIPELINE</a:t>
-            </a:r>
-          </a:p>
-        </p:txBody>
-      </p:sp>
-      <p:sp>
-        <p:nvSpPr>
-          <p:cNvPr id="8" name="dsl:nav-5"/>
-          <p:cNvSpPr txBox="1"/>
-          <p:nvPr/>
-        </p:nvSpPr>
-        <p:spPr>
-          <a:xfrm>
-            <a:off x="6096000" y="0"/>
-            <a:ext cx="1524000" cy="304800"/>
-          </a:xfrm>
-          <a:prstGeom prst="rect">
-            <a:avLst/>
-          </a:prstGeom>
-          <a:noFill/>
-        </p:spPr>
-        <p:txBody>
-          <a:bodyPr wrap="none" anchor="ctr">
-            <a:noAutofit/>
-          </a:bodyPr>
-          <a:lstStyle/>
-          <a:p>
-            <a:pPr algn="ctr"/>
-            <a:r>
-              <a:rPr sz="825" noProof="1" spc="150">
-                <a:solidFill>
-                  <a:srgbClr val="8FB3B3"/>
-                </a:solidFill>
-                <a:latin typeface="Liter"/>
-                <a:ea typeface="Liter"/>
-              </a:rPr>
-              <a:t>AI OPERATIONS</a:t>
-            </a:r>
-          </a:p>
-        </p:txBody>
-      </p:sp>
-      <p:sp>
-        <p:nvSpPr>
-          <p:cNvPr id="9" name="dsl:nav-6"/>
-          <p:cNvSpPr txBox="1"/>
-          <p:nvPr/>
-        </p:nvSpPr>
-        <p:spPr>
-          <a:xfrm>
-            <a:off x="7620000" y="0"/>
-            <a:ext cx="1524000" cy="304800"/>
-          </a:xfrm>
-          <a:prstGeom prst="rect">
-            <a:avLst/>
-          </a:prstGeom>
-          <a:noFill/>
-        </p:spPr>
-        <p:txBody>
-          <a:bodyPr wrap="none" anchor="ctr">
-            <a:noAutofit/>
-          </a:bodyPr>
-          <a:lstStyle/>
-          <a:p>
-            <a:pPr algn="ctr"/>
-            <a:r>
-              <a:rPr sz="825" noProof="1" spc="150">
-                <a:solidFill>
-                  <a:srgbClr val="FFFFFF"/>
-                </a:solidFill>
-                <a:latin typeface="Liter"/>
-                <a:ea typeface="Liter"/>
-              </a:rPr>
-              <a:t>ARCHITECTURE</a:t>
-            </a:r>
-          </a:p>
-        </p:txBody>
-      </p:sp>
-      <p:sp>
-        <p:nvSpPr>
-          <p:cNvPr id="10" name="dsl:nav-7"/>
-          <p:cNvSpPr txBox="1"/>
-          <p:nvPr/>
-        </p:nvSpPr>
-        <p:spPr>
-          <a:xfrm>
-            <a:off x="9144000" y="0"/>
-            <a:ext cx="1524000" cy="304800"/>
-          </a:xfrm>
-          <a:prstGeom prst="rect">
-            <a:avLst/>
-          </a:prstGeom>
-          <a:noFill/>
-        </p:spPr>
-        <p:txBody>
-          <a:bodyPr wrap="none" anchor="ctr">
-            <a:noAutofit/>
-          </a:bodyPr>
-          <a:lstStyle/>
-          <a:p>
-            <a:pPr algn="ctr"/>
-            <a:r>
-              <a:rPr sz="825" noProof="1" spc="150">
-                <a:solidFill>
-                  <a:srgbClr val="8FB3B3"/>
-                </a:solidFill>
-                <a:latin typeface="Liter"/>
-                <a:ea typeface="Liter"/>
-              </a:rPr>
-              <a:t>SECURITY</a:t>
-            </a:r>
-          </a:p>
-        </p:txBody>
-      </p:sp>
-      <p:sp>
-        <p:nvSpPr>
-          <p:cNvPr id="11" name="dsl:nav-8"/>
-          <p:cNvSpPr txBox="1"/>
-          <p:nvPr/>
-        </p:nvSpPr>
-        <p:spPr>
-          <a:xfrm>
-            <a:off x="10668000" y="0"/>
-            <a:ext cx="1524000" cy="304800"/>
-          </a:xfrm>
-          <a:prstGeom prst="rect">
-            <a:avLst/>
-          </a:prstGeom>
-          <a:noFill/>
-        </p:spPr>
-        <p:txBody>
-          <a:bodyPr wrap="none" anchor="ctr">
-            <a:noAutofit/>
-          </a:bodyPr>
-          <a:lstStyle/>
-          <a:p>
-            <a:pPr algn="ctr"/>
-            <a:r>
-              <a:rPr sz="825" noProof="1" spc="150">
-                <a:solidFill>
-                  <a:srgbClr val="8FB3B3"/>
-                </a:solidFill>
-                <a:latin typeface="Liter"/>
-                <a:ea typeface="Liter"/>
-              </a:rPr>
-              <a:t>VALUE</a:t>
-            </a:r>
-          </a:p>
-        </p:txBody>
-      </p:sp>
-      <p:sp>
-        <p:nvSpPr>
-          <p:cNvPr id="12" name="dsl:title-accent"/>
-          <p:cNvSpPr/>
-          <p:nvPr/>
-        </p:nvSpPr>
-        <p:spPr>
-          <a:xfrm>
-            <a:off x="571500" y="438150"/>
-            <a:ext cx="571500" cy="38100"/>
-          </a:xfrm>
-          <a:prstGeom prst="rect">
-            <a:avLst/>
-          </a:prstGeom>
-          <a:solidFill>
-            <a:srgbClr val="D4A373"/>
-          </a:solidFill>
-          <a:ln>
-            <a:noFill/>
-          </a:ln>
-          <a:effectLst/>
-        </p:spPr>
-        <p:style>
-          <a:lnRef idx="1">
-            <a:schemeClr val="accent1"/>
-          </a:lnRef>
-          <a:fillRef idx="3">
-            <a:schemeClr val="accent1"/>
-          </a:fillRef>
-          <a:effectRef idx="2">
-            <a:schemeClr val="accent1"/>
-          </a:effectRef>
-          <a:fontRef idx="minor">
-            <a:schemeClr val="lt1"/>
-          </a:fontRef>
-        </p:style>
-        <p:txBody>
-          <a:bodyPr rtlCol="0" anchor="ctr"/>
-          <a:lstStyle/>
-          <a:p>
-            <a:pPr algn="ctr"/>
-          </a:p>
-        </p:txBody>
-      </p:sp>
-      <p:sp>
-        <p:nvSpPr>
-          <p:cNvPr id="13" name="dsl:title"/>
-          <p:cNvSpPr txBox="1"/>
-          <p:nvPr/>
-        </p:nvSpPr>
-        <p:spPr>
-          <a:xfrm>
-            <a:off x="571500" y="552450"/>
-            <a:ext cx="6667500" cy="400050"/>
-          </a:xfrm>
-          <a:prstGeom prst="rect">
-            <a:avLst/>
-          </a:prstGeom>
-          <a:noFill/>
-        </p:spPr>
-        <p:txBody>
-          <a:bodyPr wrap="none" anchor="ctr">
-            <a:noAutofit/>
-          </a:bodyPr>
-          <a:lstStyle/>
-          <a:p>
-            <a:pPr algn="l"/>
-            <a:r>
-              <a:rPr sz="2100" noProof="1">
-                <a:solidFill>
-                  <a:srgbClr val="2D6A6A"/>
-                </a:solidFill>
-                <a:latin typeface="Liter"/>
-                <a:ea typeface="Liter"/>
-              </a:rPr>
-              <a:t>Logical Architecture</a:t>
-            </a:r>
-          </a:p>
-        </p:txBody>
-      </p:sp>
-      <p:sp>
-        <p:nvSpPr>
-          <p:cNvPr id="14" name="dsl:ref-note"/>
-          <p:cNvSpPr txBox="1"/>
-          <p:nvPr/>
-        </p:nvSpPr>
-        <p:spPr>
-          <a:xfrm>
-            <a:off x="8572500" y="552450"/>
-            <a:ext cx="3048000" cy="400050"/>
-          </a:xfrm>
-          <a:prstGeom prst="rect">
-            <a:avLst/>
-          </a:prstGeom>
-          <a:noFill/>
-        </p:spPr>
-        <p:txBody>
-          <a:bodyPr wrap="none" anchor="ctr">
-            <a:noAutofit/>
-          </a:bodyPr>
-          <a:lstStyle/>
-          <a:p>
-            <a:pPr algn="r"/>
-            <a:r>
-              <a:rPr sz="975" noProof="1">
-                <a:solidFill>
-                  <a:srgbClr val="5C6B73"/>
-                </a:solidFill>
-                <a:latin typeface="QuattrocentoSans"/>
-                <a:ea typeface="QuattrocentoSans"/>
-              </a:rPr>
-              <a:t>Reference: main.pdf Sections 3.3-3.5</a:t>
-            </a:r>
-          </a:p>
-        </p:txBody>
-      </p:sp>
-      <p:sp>
-        <p:nvSpPr>
-          <p:cNvPr id="15" name="dsl:layer1-bg"/>
-          <p:cNvSpPr/>
-          <p:nvPr/>
-        </p:nvSpPr>
-        <p:spPr>
-          <a:xfrm>
-            <a:off x="571500" y="1143000"/>
-            <a:ext cx="11049000" cy="952500"/>
-          </a:xfrm>
-          <a:prstGeom prst="rect">
-            <a:avLst/>
-          </a:prstGeom>
-          <a:solidFill>
-            <a:srgbClr val="E8F2F2"/>
-          </a:solidFill>
-          <a:ln w="12700">
-            <a:solidFill>
-              <a:srgbClr val="2D6A6A"/>
-            </a:solidFill>
-            <a:prstDash val="solid"/>
-          </a:ln>
-          <a:effectLst/>
-        </p:spPr>
-        <p:style>
-          <a:lnRef idx="1">
-            <a:schemeClr val="accent1"/>
-          </a:lnRef>
-          <a:fillRef idx="3">
-            <a:schemeClr val="accent1"/>
-          </a:fillRef>
-          <a:effectRef idx="2">
-            <a:schemeClr val="accent1"/>
-          </a:effectRef>
-          <a:fontRef idx="minor">
-            <a:schemeClr val="lt1"/>
-          </a:fontRef>
-        </p:style>
-        <p:txBody>
-          <a:bodyPr rtlCol="0" anchor="ctr"/>
-          <a:lstStyle/>
-          <a:p>
-            <a:pPr algn="ctr"/>
-          </a:p>
-        </p:txBody>
-      </p:sp>
-      <p:sp>
-        <p:nvSpPr>
-          <p:cNvPr id="16" name="dsl:layer1-label-bg"/>
-          <p:cNvSpPr/>
-          <p:nvPr/>
-        </p:nvSpPr>
-        <p:spPr>
-          <a:xfrm>
-            <a:off x="571500" y="1143000"/>
-            <a:ext cx="1524000" cy="952500"/>
-          </a:xfrm>
-          <a:prstGeom prst="rect">
-            <a:avLst/>
-          </a:prstGeom>
-          <a:solidFill>
-            <a:srgbClr val="2D6A6A"/>
-          </a:solidFill>
-          <a:ln>
-            <a:noFill/>
-          </a:ln>
-          <a:effectLst/>
-        </p:spPr>
-        <p:style>
-          <a:lnRef idx="1">
-            <a:schemeClr val="accent1"/>
-          </a:lnRef>
-          <a:fillRef idx="3">
-            <a:schemeClr val="accent1"/>
-          </a:fillRef>
-          <a:effectRef idx="2">
-            <a:schemeClr val="accent1"/>
-          </a:effectRef>
-          <a:fontRef idx="minor">
-            <a:schemeClr val="lt1"/>
-          </a:fontRef>
-        </p:style>
-        <p:txBody>
-          <a:bodyPr rtlCol="0" anchor="ctr"/>
-          <a:lstStyle/>
-          <a:p>
-            <a:pPr algn="ctr"/>
-          </a:p>
-        </p:txBody>
-      </p:sp>
-      <p:sp>
-        <p:nvSpPr>
-          <p:cNvPr id="17" name="dsl:layer1-label"/>
-          <p:cNvSpPr txBox="1"/>
-          <p:nvPr/>
-        </p:nvSpPr>
-        <p:spPr>
-          <a:xfrm>
-            <a:off x="571500" y="1143000"/>
-            <a:ext cx="1524000" cy="952500"/>
-          </a:xfrm>
-          <a:prstGeom prst="rect">
-            <a:avLst/>
-          </a:prstGeom>
-          <a:noFill/>
-        </p:spPr>
-        <p:txBody>
-          <a:bodyPr wrap="none" anchor="ctr">
-            <a:noAutofit/>
-          </a:bodyPr>
-          <a:lstStyle/>
-          <a:p>
-            <a:pPr algn="ctr"/>
-            <a:r>
-              <a:rPr b="1" sz="1200" noProof="1">
-                <a:solidFill>
-                  <a:srgbClr val="FFFFFF"/>
-                </a:solidFill>
-                <a:latin typeface="Liter"/>
-                <a:ea typeface="Liter"/>
-              </a:rPr>
-              <a:t>FRONTEND</a:t>
-            </a:r>
-          </a:p>
-        </p:txBody>
-      </p:sp>
-      <p:sp>
-        <p:nvSpPr>
-          <p:cNvPr id="18" name="dsl:layer1-content"/>
-          <p:cNvSpPr txBox="1"/>
-          <p:nvPr/>
-        </p:nvSpPr>
-        <p:spPr>
-          <a:xfrm>
-            <a:off x="2286000" y="1238250"/>
-            <a:ext cx="9144000" cy="762000"/>
-          </a:xfrm>
-          <a:prstGeom prst="rect">
-            <a:avLst/>
-          </a:prstGeom>
-          <a:noFill/>
-        </p:spPr>
-        <p:txBody>
-          <a:bodyPr wrap="none" anchor="ctr">
-            <a:noAutofit/>
-          </a:bodyPr>
-          <a:lstStyle/>
-          <a:p>
-            <a:pPr algn="l"/>
-            <a:r>
-              <a:rPr b="1" sz="1350" noProof="1">
-                <a:solidFill>
-                  <a:srgbClr val="2B2D2F"/>
-                </a:solidFill>
-                <a:latin typeface="QuattrocentoSans"/>
-                <a:ea typeface="QuattrocentoSans"/>
-              </a:rPr>
-              <a:t>Next.js Dashboard</a:t>
-            </a:r>
-            <a:r>
-              <a:rPr sz="1350" noProof="1">
-                <a:solidFill>
-                  <a:srgbClr val="2B2D2F"/>
-                </a:solidFill>
-                <a:latin typeface="QuattrocentoSans"/>
-                <a:ea typeface="QuattrocentoSans"/>
-              </a:rPr>
-              <a:t> — SWR API client, WebSocket real-time updates, responsive UI</a:t>
-            </a:r>
-          </a:p>
-        </p:txBody>
-      </p:sp>
-      <p:cxnSp>
-        <p:nvCxnSpPr>
-          <p:cNvPr id="19" name="dsl:arrow-1-2"/>
-          <p:cNvCxnSpPr/>
-          <p:nvPr/>
-        </p:nvCxnSpPr>
-        <p:spPr>
-          <a:xfrm>
-            <a:off x="6000750" y="2095500"/>
-            <a:ext cx="0" cy="190500"/>
-          </a:xfrm>
-          <a:prstGeom prst="straightConnector1">
-            <a:avLst/>
-          </a:prstGeom>
-          <a:ln w="25400">
-            <a:solidFill>
-              <a:srgbClr val="D4A373"/>
-            </a:solidFill>
-            <a:prstDash val="solid"/>
-            <a:tailEnd type="arrow"/>
-          </a:ln>
-          <a:effectLst/>
-        </p:spPr>
-        <p:style>
-          <a:lnRef idx="2">
-            <a:schemeClr val="accent1"/>
-          </a:lnRef>
-          <a:fillRef idx="0">
-            <a:schemeClr val="accent1"/>
-          </a:fillRef>
-          <a:effectRef idx="1">
-            <a:schemeClr val="accent1"/>
-          </a:effectRef>
-          <a:fontRef idx="minor">
-            <a:schemeClr val="tx1"/>
-          </a:fontRef>
-        </p:style>
-      </p:cxnSp>
-      <p:sp>
-        <p:nvSpPr>
-          <p:cNvPr id="20" name="dsl:layer2-bg"/>
-          <p:cNvSpPr/>
-          <p:nvPr/>
-        </p:nvSpPr>
-        <p:spPr>
-          <a:xfrm>
-            <a:off x="571500" y="2286000"/>
-            <a:ext cx="11049000" cy="952500"/>
-          </a:xfrm>
-          <a:prstGeom prst="rect">
-            <a:avLst/>
-          </a:prstGeom>
-          <a:solidFill>
-            <a:srgbClr val="E8F2F2"/>
-          </a:solidFill>
-          <a:ln w="12700">
-            <a:solidFill>
-              <a:srgbClr val="2D6A6A"/>
-            </a:solidFill>
-            <a:prstDash val="solid"/>
-          </a:ln>
-          <a:effectLst/>
-        </p:spPr>
-        <p:style>
-          <a:lnRef idx="1">
-            <a:schemeClr val="accent1"/>
-          </a:lnRef>
-          <a:fillRef idx="3">
-            <a:schemeClr val="accent1"/>
-          </a:fillRef>
-          <a:effectRef idx="2">
-            <a:schemeClr val="accent1"/>
-          </a:effectRef>
-          <a:fontRef idx="minor">
-            <a:schemeClr val="lt1"/>
-          </a:fontRef>
-        </p:style>
-        <p:txBody>
-          <a:bodyPr rtlCol="0" anchor="ctr"/>
-          <a:lstStyle/>
-          <a:p>
-            <a:pPr algn="ctr"/>
-          </a:p>
-        </p:txBody>
-      </p:sp>
-      <p:sp>
-        <p:nvSpPr>
-          <p:cNvPr id="21" name="dsl:layer2-label-bg"/>
-          <p:cNvSpPr/>
-          <p:nvPr/>
-        </p:nvSpPr>
-        <p:spPr>
-          <a:xfrm>
-            <a:off x="571500" y="2286000"/>
-            <a:ext cx="1524000" cy="952500"/>
-          </a:xfrm>
-          <a:prstGeom prst="rect">
-            <a:avLst/>
-          </a:prstGeom>
-          <a:solidFill>
-            <a:srgbClr val="2D6A6A"/>
-          </a:solidFill>
-          <a:ln>
-            <a:noFill/>
-          </a:ln>
-          <a:effectLst/>
-        </p:spPr>
-        <p:style>
-          <a:lnRef idx="1">
-            <a:schemeClr val="accent1"/>
-          </a:lnRef>
-          <a:fillRef idx="3">
-            <a:schemeClr val="accent1"/>
-          </a:fillRef>
-          <a:effectRef idx="2">
-            <a:schemeClr val="accent1"/>
-          </a:effectRef>
-          <a:fontRef idx="minor">
-            <a:schemeClr val="lt1"/>
-          </a:fontRef>
-        </p:style>
-        <p:txBody>
-          <a:bodyPr rtlCol="0" anchor="ctr"/>
-          <a:lstStyle/>
-          <a:p>
-            <a:pPr algn="ctr"/>
-          </a:p>
-        </p:txBody>
-      </p:sp>
-      <p:sp>
-        <p:nvSpPr>
-          <p:cNvPr id="22" name="dsl:layer2-label"/>
-          <p:cNvSpPr txBox="1"/>
-          <p:nvPr/>
-        </p:nvSpPr>
-        <p:spPr>
-          <a:xfrm>
-            <a:off x="571500" y="2286000"/>
-            <a:ext cx="1524000" cy="952500"/>
-          </a:xfrm>
-          <a:prstGeom prst="rect">
-            <a:avLst/>
-          </a:prstGeom>
-          <a:noFill/>
-        </p:spPr>
-        <p:txBody>
-          <a:bodyPr wrap="none" anchor="ctr">
-            <a:noAutofit/>
-          </a:bodyPr>
-          <a:lstStyle/>
-          <a:p>
-            <a:pPr algn="ctr"/>
-            <a:r>
-              <a:rPr b="1" sz="1200" noProof="1">
-                <a:solidFill>
-                  <a:srgbClr val="FFFFFF"/>
-                </a:solidFill>
-                <a:latin typeface="Liter"/>
-                <a:ea typeface="Liter"/>
-              </a:rPr>
-              <a:t>API LAYER</a:t>
-            </a:r>
-          </a:p>
-        </p:txBody>
-      </p:sp>
-      <p:sp>
-        <p:nvSpPr>
-          <p:cNvPr id="23" name="dsl:layer2-content"/>
-          <p:cNvSpPr txBox="1"/>
-          <p:nvPr/>
-        </p:nvSpPr>
-        <p:spPr>
-          <a:xfrm>
-            <a:off x="2286000" y="2381250"/>
-            <a:ext cx="9144000" cy="762000"/>
-          </a:xfrm>
-          <a:prstGeom prst="rect">
-            <a:avLst/>
-          </a:prstGeom>
-          <a:noFill/>
-        </p:spPr>
-        <p:txBody>
-          <a:bodyPr wrap="none" anchor="ctr">
-            <a:noAutofit/>
-          </a:bodyPr>
-          <a:lstStyle/>
-          <a:p>
-            <a:pPr algn="l"/>
-            <a:r>
-              <a:rPr b="1" sz="1350" noProof="1">
-                <a:solidFill>
-                  <a:srgbClr val="2B2D2F"/>
-                </a:solidFill>
-                <a:latin typeface="QuattrocentoSans"/>
-                <a:ea typeface="QuattrocentoSans"/>
-              </a:rPr>
-              <a:t>FastAPI</a:t>
-            </a:r>
-            <a:r>
-              <a:rPr sz="1350" noProof="1">
-                <a:solidFill>
-                  <a:srgbClr val="2B2D2F"/>
-                </a:solidFill>
-                <a:latin typeface="QuattrocentoSans"/>
-                <a:ea typeface="QuattrocentoSans"/>
-              </a:rPr>
-              <a:t> — REST endpoints, CORS, rate limiting, WebSocket for live updates</a:t>
-            </a:r>
-          </a:p>
-        </p:txBody>
-      </p:sp>
-      <p:cxnSp>
-        <p:nvCxnSpPr>
-          <p:cNvPr id="24" name="dsl:arrow-2-3"/>
-          <p:cNvCxnSpPr/>
-          <p:nvPr/>
-        </p:nvCxnSpPr>
-        <p:spPr>
-          <a:xfrm>
-            <a:off x="6000750" y="3238500"/>
-            <a:ext cx="0" cy="190500"/>
-          </a:xfrm>
-          <a:prstGeom prst="straightConnector1">
-            <a:avLst/>
-          </a:prstGeom>
-          <a:ln w="25400">
-            <a:solidFill>
-              <a:srgbClr val="D4A373"/>
-            </a:solidFill>
-            <a:prstDash val="solid"/>
-            <a:tailEnd type="arrow"/>
-          </a:ln>
-          <a:effectLst/>
-        </p:spPr>
-        <p:style>
-          <a:lnRef idx="2">
-            <a:schemeClr val="accent1"/>
-          </a:lnRef>
-          <a:fillRef idx="0">
-            <a:schemeClr val="accent1"/>
-          </a:fillRef>
-          <a:effectRef idx="1">
-            <a:schemeClr val="accent1"/>
-          </a:effectRef>
-          <a:fontRef idx="minor">
-            <a:schemeClr val="tx1"/>
-          </a:fontRef>
-        </p:style>
-      </p:cxnSp>
-      <p:sp>
-        <p:nvSpPr>
-          <p:cNvPr id="25" name="dsl:layer3-bg"/>
-          <p:cNvSpPr/>
-          <p:nvPr/>
-        </p:nvSpPr>
-        <p:spPr>
-          <a:xfrm>
-            <a:off x="571500" y="3429000"/>
-            <a:ext cx="11049000" cy="1143000"/>
-          </a:xfrm>
-          <a:prstGeom prst="rect">
-            <a:avLst/>
-          </a:prstGeom>
-          <a:solidFill>
-            <a:srgbClr val="F5EDE3"/>
-          </a:solidFill>
-          <a:ln w="12700">
-            <a:solidFill>
-              <a:srgbClr val="D4A373"/>
-            </a:solidFill>
-            <a:prstDash val="solid"/>
-          </a:ln>
-          <a:effectLst/>
-        </p:spPr>
-        <p:style>
-          <a:lnRef idx="1">
-            <a:schemeClr val="accent1"/>
-          </a:lnRef>
-          <a:fillRef idx="3">
-            <a:schemeClr val="accent1"/>
-          </a:fillRef>
-          <a:effectRef idx="2">
-            <a:schemeClr val="accent1"/>
-          </a:effectRef>
-          <a:fontRef idx="minor">
-            <a:schemeClr val="lt1"/>
-          </a:fontRef>
-        </p:style>
-        <p:txBody>
-          <a:bodyPr rtlCol="0" anchor="ctr"/>
-          <a:lstStyle/>
-          <a:p>
-            <a:pPr algn="ctr"/>
-          </a:p>
-        </p:txBody>
-      </p:sp>
-      <p:sp>
-        <p:nvSpPr>
-          <p:cNvPr id="26" name="dsl:layer3-label-bg"/>
-          <p:cNvSpPr/>
-          <p:nvPr/>
-        </p:nvSpPr>
-        <p:spPr>
-          <a:xfrm>
-            <a:off x="571500" y="3429000"/>
-            <a:ext cx="1524000" cy="1143000"/>
-          </a:xfrm>
-          <a:prstGeom prst="rect">
-            <a:avLst/>
-          </a:prstGeom>
-          <a:solidFill>
-            <a:srgbClr val="D4A373"/>
-          </a:solidFill>
-          <a:ln>
-            <a:noFill/>
-          </a:ln>
-          <a:effectLst/>
-        </p:spPr>
-        <p:style>
-          <a:lnRef idx="1">
-            <a:schemeClr val="accent1"/>
-          </a:lnRef>
-          <a:fillRef idx="3">
-            <a:schemeClr val="accent1"/>
-          </a:fillRef>
-          <a:effectRef idx="2">
-            <a:schemeClr val="accent1"/>
-          </a:effectRef>
-          <a:fontRef idx="minor">
-            <a:schemeClr val="lt1"/>
-          </a:fontRef>
-        </p:style>
-        <p:txBody>
-          <a:bodyPr rtlCol="0" anchor="ctr"/>
-          <a:lstStyle/>
-          <a:p>
-            <a:pPr algn="ctr"/>
-          </a:p>
-        </p:txBody>
-      </p:sp>
-      <p:sp>
-        <p:nvSpPr>
-          <p:cNvPr id="27" name="dsl:layer3-label"/>
-          <p:cNvSpPr txBox="1"/>
-          <p:nvPr/>
-        </p:nvSpPr>
-        <p:spPr>
-          <a:xfrm>
-            <a:off x="571500" y="3429000"/>
-            <a:ext cx="1524000" cy="1143000"/>
-          </a:xfrm>
-          <a:prstGeom prst="rect">
-            <a:avLst/>
-          </a:prstGeom>
-          <a:noFill/>
-        </p:spPr>
-        <p:txBody>
-          <a:bodyPr wrap="none" anchor="ctr">
-            <a:noAutofit/>
-          </a:bodyPr>
-          <a:lstStyle/>
-          <a:p>
-            <a:pPr algn="ctr"/>
-            <a:r>
-              <a:rPr b="1" sz="1200" noProof="1">
-                <a:solidFill>
-                  <a:srgbClr val="FFFFFF"/>
-                </a:solidFill>
-                <a:latin typeface="Liter"/>
-                <a:ea typeface="Liter"/>
-              </a:rPr>
-              <a:t>WORKFLOW</a:t>
-            </a:r>
-          </a:p>
-        </p:txBody>
-      </p:sp>
-      <p:sp>
-        <p:nvSpPr>
-          <p:cNvPr id="28" name="dsl:layer3-content"/>
-          <p:cNvSpPr txBox="1"/>
-          <p:nvPr/>
-        </p:nvSpPr>
-        <p:spPr>
-          <a:xfrm>
-            <a:off x="2286000" y="3524250"/>
-            <a:ext cx="9144000" cy="952500"/>
-          </a:xfrm>
-          <a:prstGeom prst="rect">
-            <a:avLst/>
-          </a:prstGeom>
-          <a:noFill/>
-        </p:spPr>
-        <p:txBody>
-          <a:bodyPr wrap="none" anchor="ctr">
-            <a:noAutofit/>
-          </a:bodyPr>
-          <a:lstStyle/>
-          <a:p>
-            <a:pPr algn="l"/>
-            <a:r>
-              <a:rPr b="1" sz="1350" noProof="1">
-                <a:solidFill>
-                  <a:srgbClr val="2B2D2F"/>
-                </a:solidFill>
-                <a:latin typeface="QuattrocentoSans"/>
-                <a:ea typeface="QuattrocentoSans"/>
-              </a:rPr>
-              <a:t>Pipeline</a:t>
-            </a:r>
-            <a:r>
-              <a:rPr sz="1350" noProof="1">
-                <a:solidFill>
-                  <a:srgbClr val="2B2D2F"/>
-                </a:solidFill>
-                <a:latin typeface="QuattrocentoSans"/>
-                <a:ea typeface="QuattrocentoSans"/>
-              </a:rPr>
-              <a:t> (poll, map, enrich, dedup, correlate)  •  </a:t>
-            </a:r>
-            <a:r>
-              <a:rPr b="1" sz="1350" noProof="1">
-                <a:solidFill>
-                  <a:srgbClr val="2B2D2F"/>
-                </a:solidFill>
-                <a:latin typeface="QuattrocentoSans"/>
-                <a:ea typeface="QuattrocentoSans"/>
-              </a:rPr>
-              <a:t>Incident Manager</a:t>
-            </a:r>
-            <a:r>
-              <a:rPr sz="1350" noProof="1">
-                <a:solidFill>
-                  <a:srgbClr val="2B2D2F"/>
-                </a:solidFill>
-                <a:latin typeface="QuattrocentoSans"/>
-                <a:ea typeface="QuattrocentoSans"/>
-              </a:rPr>
-              <a:t>  •  </a:t>
-            </a:r>
-            <a:r>
-              <a:rPr b="1" sz="1350" noProof="1">
-                <a:solidFill>
-                  <a:srgbClr val="2B2D2F"/>
-                </a:solidFill>
-                <a:latin typeface="QuattrocentoSans"/>
-                <a:ea typeface="QuattrocentoSans"/>
-              </a:rPr>
-              <a:t>AI Response</a:t>
-            </a:r>
-            <a:r>
-              <a:rPr sz="1350" noProof="1">
-                <a:solidFill>
-                  <a:srgbClr val="2B2D2F"/>
-                </a:solidFill>
-                <a:latin typeface="QuattrocentoSans"/>
-                <a:ea typeface="QuattrocentoSans"/>
-              </a:rPr>
-              <a:t>  •  </a:t>
-            </a:r>
-            <a:r>
-              <a:rPr b="1" sz="1350" noProof="1">
-                <a:solidFill>
-                  <a:srgbClr val="2B2D2F"/>
-                </a:solidFill>
-                <a:latin typeface="QuattrocentoSans"/>
-                <a:ea typeface="QuattrocentoSans"/>
-              </a:rPr>
-              <a:t>Operator</a:t>
-            </a:r>
-          </a:p>
-        </p:txBody>
-      </p:sp>
-      <p:cxnSp>
-        <p:nvCxnSpPr>
-          <p:cNvPr id="29" name="dsl:arrow-3-4"/>
-          <p:cNvCxnSpPr/>
-          <p:nvPr/>
-        </p:nvCxnSpPr>
-        <p:spPr>
-          <a:xfrm>
-            <a:off x="6000750" y="4572000"/>
-            <a:ext cx="0" cy="190500"/>
-          </a:xfrm>
-          <a:prstGeom prst="straightConnector1">
-            <a:avLst/>
-          </a:prstGeom>
-          <a:ln w="25400">
-            <a:solidFill>
-              <a:srgbClr val="D4A373"/>
-            </a:solidFill>
-            <a:prstDash val="solid"/>
-            <a:tailEnd type="arrow"/>
-          </a:ln>
-          <a:effectLst/>
-        </p:spPr>
-        <p:style>
-          <a:lnRef idx="2">
-            <a:schemeClr val="accent1"/>
-          </a:lnRef>
-          <a:fillRef idx="0">
-            <a:schemeClr val="accent1"/>
-          </a:fillRef>
-          <a:effectRef idx="1">
-            <a:schemeClr val="accent1"/>
-          </a:effectRef>
-          <a:fontRef idx="minor">
-            <a:schemeClr val="tx1"/>
-          </a:fontRef>
-        </p:style>
-      </p:cxnSp>
-      <p:sp>
-        <p:nvSpPr>
-          <p:cNvPr id="30" name="dsl:layer4-bg"/>
-          <p:cNvSpPr/>
-          <p:nvPr/>
-        </p:nvSpPr>
-        <p:spPr>
-          <a:xfrm>
-            <a:off x="571500" y="4762500"/>
-            <a:ext cx="11049000" cy="1143000"/>
-          </a:xfrm>
-          <a:prstGeom prst="rect">
-            <a:avLst/>
-          </a:prstGeom>
-          <a:solidFill>
-            <a:srgbClr val="EDEAE5"/>
-          </a:solidFill>
-          <a:ln w="12700">
-            <a:solidFill>
-              <a:srgbClr val="5C6B73"/>
-            </a:solidFill>
-            <a:prstDash val="solid"/>
-          </a:ln>
-          <a:effectLst/>
-        </p:spPr>
-        <p:style>
-          <a:lnRef idx="1">
-            <a:schemeClr val="accent1"/>
-          </a:lnRef>
-          <a:fillRef idx="3">
-            <a:schemeClr val="accent1"/>
-          </a:fillRef>
-          <a:effectRef idx="2">
-            <a:schemeClr val="accent1"/>
-          </a:effectRef>
-          <a:fontRef idx="minor">
-            <a:schemeClr val="lt1"/>
-          </a:fontRef>
-        </p:style>
-        <p:txBody>
-          <a:bodyPr rtlCol="0" anchor="ctr"/>
-          <a:lstStyle/>
-          <a:p>
-            <a:pPr algn="ctr"/>
-          </a:p>
-        </p:txBody>
-      </p:sp>
-      <p:sp>
-        <p:nvSpPr>
-          <p:cNvPr id="31" name="dsl:layer4-label-bg"/>
-          <p:cNvSpPr/>
-          <p:nvPr/>
-        </p:nvSpPr>
-        <p:spPr>
-          <a:xfrm>
-            <a:off x="571500" y="4762500"/>
-            <a:ext cx="1524000" cy="1143000"/>
-          </a:xfrm>
-          <a:prstGeom prst="rect">
-            <a:avLst/>
-          </a:prstGeom>
-          <a:solidFill>
-            <a:srgbClr val="5C6B73"/>
-          </a:solidFill>
-          <a:ln>
-            <a:noFill/>
-          </a:ln>
-          <a:effectLst/>
-        </p:spPr>
-        <p:style>
-          <a:lnRef idx="1">
-            <a:schemeClr val="accent1"/>
-          </a:lnRef>
-          <a:fillRef idx="3">
-            <a:schemeClr val="accent1"/>
-          </a:fillRef>
-          <a:effectRef idx="2">
-            <a:schemeClr val="accent1"/>
-          </a:effectRef>
-          <a:fontRef idx="minor">
-            <a:schemeClr val="lt1"/>
-          </a:fontRef>
-        </p:style>
-        <p:txBody>
-          <a:bodyPr rtlCol="0" anchor="ctr"/>
-          <a:lstStyle/>
-          <a:p>
-            <a:pPr algn="ctr"/>
-          </a:p>
-        </p:txBody>
-      </p:sp>
-      <p:sp>
-        <p:nvSpPr>
-          <p:cNvPr id="32" name="dsl:layer4-label"/>
-          <p:cNvSpPr txBox="1"/>
-          <p:nvPr/>
-        </p:nvSpPr>
-        <p:spPr>
-          <a:xfrm>
-            <a:off x="571500" y="4762500"/>
-            <a:ext cx="1524000" cy="1143000"/>
-          </a:xfrm>
-          <a:prstGeom prst="rect">
-            <a:avLst/>
-          </a:prstGeom>
-          <a:noFill/>
-        </p:spPr>
-        <p:txBody>
-          <a:bodyPr wrap="none" anchor="ctr">
-            <a:noAutofit/>
-          </a:bodyPr>
-          <a:lstStyle/>
-          <a:p>
-            <a:pPr algn="ctr"/>
-            <a:r>
-              <a:rPr b="1" sz="1200" noProof="1">
-                <a:solidFill>
-                  <a:srgbClr val="FFFFFF"/>
-                </a:solidFill>
-                <a:latin typeface="Liter"/>
-                <a:ea typeface="Liter"/>
-              </a:rPr>
-              <a:t>INFRA</a:t>
-            </a:r>
-          </a:p>
-        </p:txBody>
-      </p:sp>
-      <p:sp>
-        <p:nvSpPr>
-          <p:cNvPr id="33" name="dsl:layer4-content"/>
-          <p:cNvSpPr txBox="1"/>
-          <p:nvPr/>
-        </p:nvSpPr>
-        <p:spPr>
-          <a:xfrm>
-            <a:off x="2286000" y="4857750"/>
-            <a:ext cx="9144000" cy="952500"/>
-          </a:xfrm>
-          <a:prstGeom prst="rect">
-            <a:avLst/>
-          </a:prstGeom>
-          <a:noFill/>
-        </p:spPr>
-        <p:txBody>
-          <a:bodyPr wrap="none" anchor="ctr">
-            <a:noAutofit/>
-          </a:bodyPr>
-          <a:lstStyle/>
-          <a:p>
-            <a:pPr algn="l"/>
-            <a:r>
-              <a:rPr b="1" sz="1350" noProof="1">
-                <a:solidFill>
-                  <a:srgbClr val="2B2D2F"/>
-                </a:solidFill>
-                <a:latin typeface="QuattrocentoSans"/>
-                <a:ea typeface="QuattrocentoSans"/>
-              </a:rPr>
-              <a:t>ES 7.17</a:t>
-            </a:r>
-            <a:r>
-              <a:rPr sz="1350" noProof="1">
-                <a:solidFill>
-                  <a:srgbClr val="2B2D2F"/>
-                </a:solidFill>
-                <a:latin typeface="QuattrocentoSans"/>
-                <a:ea typeface="QuattrocentoSans"/>
-              </a:rPr>
-              <a:t> (telemetry)  •  </a:t>
-            </a:r>
-            <a:r>
-              <a:rPr b="1" sz="1350" noProof="1">
-                <a:solidFill>
-                  <a:srgbClr val="2B2D2F"/>
-                </a:solidFill>
-                <a:latin typeface="QuattrocentoSans"/>
-                <a:ea typeface="QuattrocentoSans"/>
-              </a:rPr>
-              <a:t>Redis</a:t>
-            </a:r>
-            <a:r>
-              <a:rPr sz="1350" noProof="1">
-                <a:solidFill>
-                  <a:srgbClr val="2B2D2F"/>
-                </a:solidFill>
-                <a:latin typeface="QuattrocentoSans"/>
-                <a:ea typeface="QuattrocentoSans"/>
-              </a:rPr>
-              <a:t> (cache/cursors)  •  </a:t>
-            </a:r>
-            <a:r>
-              <a:rPr b="1" sz="1350" noProof="1">
-                <a:solidFill>
-                  <a:srgbClr val="2B2D2F"/>
-                </a:solidFill>
-                <a:latin typeface="QuattrocentoSans"/>
-                <a:ea typeface="QuattrocentoSans"/>
-              </a:rPr>
-              <a:t>SQLite</a:t>
-            </a:r>
-            <a:r>
-              <a:rPr sz="1350" noProof="1">
-                <a:solidFill>
-                  <a:srgbClr val="2B2D2F"/>
-                </a:solidFill>
-                <a:latin typeface="QuattrocentoSans"/>
-                <a:ea typeface="QuattrocentoSans"/>
-              </a:rPr>
-              <a:t> (state)  •  </a:t>
-            </a:r>
-            <a:r>
-              <a:rPr b="1" sz="1350" noProof="1">
-                <a:solidFill>
-                  <a:srgbClr val="2B2D2F"/>
-                </a:solidFill>
-                <a:latin typeface="QuattrocentoSans"/>
-                <a:ea typeface="QuattrocentoSans"/>
-              </a:rPr>
-              <a:t>Ansible</a:t>
-            </a:r>
-            <a:r>
-              <a:rPr sz="1350" noProof="1">
-                <a:solidFill>
-                  <a:srgbClr val="2B2D2F"/>
-                </a:solidFill>
-                <a:latin typeface="QuattrocentoSans"/>
-                <a:ea typeface="QuattrocentoSans"/>
-              </a:rPr>
-              <a:t> (execution)  •  </a:t>
-            </a:r>
-            <a:r>
-              <a:rPr b="1" sz="1350" noProof="1">
-                <a:solidFill>
-                  <a:srgbClr val="2B2D2F"/>
-                </a:solidFill>
-                <a:latin typeface="QuattrocentoSans"/>
-                <a:ea typeface="QuattrocentoSans"/>
-              </a:rPr>
-              <a:t>LLM</a:t>
-            </a:r>
-          </a:p>
-        </p:txBody>
-      </p:sp>
-      <p:sp>
-        <p:nvSpPr>
-          <p:cNvPr id="34" name="dsl:stack-label"/>
-          <p:cNvSpPr txBox="1"/>
-          <p:nvPr/>
-        </p:nvSpPr>
-        <p:spPr>
-          <a:xfrm>
-            <a:off x="571500" y="6057900"/>
-            <a:ext cx="11049000" cy="285750"/>
-          </a:xfrm>
-          <a:prstGeom prst="rect">
-            <a:avLst/>
-          </a:prstGeom>
-          <a:noFill/>
-        </p:spPr>
-        <p:txBody>
-          <a:bodyPr wrap="none" anchor="ctr">
-            <a:noAutofit/>
-          </a:bodyPr>
-          <a:lstStyle/>
-          <a:p>
-            <a:pPr algn="ctr"/>
-            <a:r>
-              <a:rPr sz="975" noProof="1">
-                <a:solidFill>
-                  <a:srgbClr val="5C6B73"/>
-                </a:solidFill>
-                <a:latin typeface="QuattrocentoSans"/>
-                <a:ea typeface="QuattrocentoSans"/>
-              </a:rPr>
-              <a:t>Technology Stack: FastAPI  •  Next.js  •  Elasticsearch 7.17  •  Redis  •  SQLite + SQLAlchemy  •  MITRE ATT&amp;CK  •  Sigma</a:t>
-            </a:r>
-          </a:p>
-        </p:txBody>
-      </p:sp>
-      <p:sp>
-        <p:nvSpPr>
-          <p:cNvPr id="35" name="dsl:footer-author"/>
-          <p:cNvSpPr txBox="1"/>
-          <p:nvPr/>
-        </p:nvSpPr>
-        <p:spPr>
-          <a:xfrm>
-            <a:off x="571500" y="6629400"/>
-            <a:ext cx="1905000" cy="152400"/>
-          </a:xfrm>
-          <a:prstGeom prst="rect">
-            <a:avLst/>
-          </a:prstGeom>
-          <a:noFill/>
-        </p:spPr>
-        <p:txBody>
-          <a:bodyPr wrap="none" anchor="ctr">
-            <a:noAutofit/>
-          </a:bodyPr>
-          <a:lstStyle/>
-          <a:p>
-            <a:pPr algn="l"/>
-            <a:r>
-              <a:rPr sz="825" noProof="1" spc="75">
-                <a:solidFill>
-                  <a:srgbClr val="5C6B73"/>
-                </a:solidFill>
-                <a:latin typeface="Liter"/>
-                <a:ea typeface="Liter"/>
-              </a:rPr>
-              <a:t>GHAZI MABROUKI</a:t>
-            </a:r>
-          </a:p>
-        </p:txBody>
-      </p:sp>
-      <p:sp>
-        <p:nvSpPr>
-          <p:cNvPr id="36" name="dsl:footer-page"/>
-          <p:cNvSpPr txBox="1"/>
-          <p:nvPr/>
-        </p:nvSpPr>
-        <p:spPr>
-          <a:xfrm>
-            <a:off x="11334750" y="6629400"/>
-            <a:ext cx="381000" cy="152400"/>
-          </a:xfrm>
-          <a:prstGeom prst="rect">
-            <a:avLst/>
-          </a:prstGeom>
-          <a:noFill/>
-        </p:spPr>
-        <p:txBody>
-          <a:bodyPr wrap="none" anchor="ctr">
-            <a:noAutofit/>
-          </a:bodyPr>
-          <a:lstStyle/>
-          <a:p>
-            <a:pPr algn="r"/>
-            <a:r>
-              <a:rPr sz="900" noProof="1">
-                <a:solidFill>
-                  <a:srgbClr val="5C6B73"/>
-                </a:solidFill>
-                <a:latin typeface="Liter"/>
-                <a:ea typeface="Liter"/>
               </a:rPr>
               <a:t>23</a:t>
             </a:r>
@@ -27168,6 +26030,1736 @@
       <p:grpSpPr/>
       <p:sp>
         <p:nvSpPr>
+          <p:cNvPr id="2" name="dsl:ch6-number-decorative"/>
+          <p:cNvSpPr txBox="1"/>
+          <p:nvPr/>
+        </p:nvSpPr>
+        <p:spPr>
+          <a:xfrm>
+            <a:off x="381000" y="571500"/>
+            <a:ext cx="4381500" cy="2476500"/>
+          </a:xfrm>
+          <a:prstGeom prst="rect">
+            <a:avLst/>
+          </a:prstGeom>
+          <a:noFill/>
+        </p:spPr>
+        <p:txBody>
+          <a:bodyPr wrap="none" anchor="t">
+            <a:noAutofit/>
+          </a:bodyPr>
+          <a:lstStyle/>
+          <a:p>
+            <a:pPr algn="l"/>
+            <a:r>
+              <a:rPr sz="15000" noProof="1">
+                <a:solidFill>
+                  <a:srgbClr val="2D6A6A"/>
+                </a:solidFill>
+                <a:latin typeface="Liter"/>
+                <a:ea typeface="Liter"/>
+              </a:rPr>
+              <a:t>06</a:t>
+            </a:r>
+          </a:p>
+        </p:txBody>
+      </p:sp>
+      <p:sp>
+        <p:nvSpPr>
+          <p:cNvPr id="3" name="dsl:ch6-accent-bar"/>
+          <p:cNvSpPr/>
+          <p:nvPr/>
+        </p:nvSpPr>
+        <p:spPr>
+          <a:xfrm>
+            <a:off x="571500" y="3238500"/>
+            <a:ext cx="762000" cy="38100"/>
+          </a:xfrm>
+          <a:prstGeom prst="rect">
+            <a:avLst/>
+          </a:prstGeom>
+          <a:solidFill>
+            <a:srgbClr val="D4A373"/>
+          </a:solidFill>
+          <a:ln>
+            <a:noFill/>
+          </a:ln>
+          <a:effectLst/>
+        </p:spPr>
+        <p:style>
+          <a:lnRef idx="1">
+            <a:schemeClr val="accent1"/>
+          </a:lnRef>
+          <a:fillRef idx="3">
+            <a:schemeClr val="accent1"/>
+          </a:fillRef>
+          <a:effectRef idx="2">
+            <a:schemeClr val="accent1"/>
+          </a:effectRef>
+          <a:fontRef idx="minor">
+            <a:schemeClr val="lt1"/>
+          </a:fontRef>
+        </p:style>
+        <p:txBody>
+          <a:bodyPr rtlCol="0" anchor="ctr"/>
+          <a:lstStyle/>
+          <a:p>
+            <a:pPr algn="ctr"/>
+          </a:p>
+        </p:txBody>
+      </p:sp>
+      <p:sp>
+        <p:nvSpPr>
+          <p:cNvPr id="4" name="dsl:ch6-title"/>
+          <p:cNvSpPr txBox="1"/>
+          <p:nvPr/>
+        </p:nvSpPr>
+        <p:spPr>
+          <a:xfrm>
+            <a:off x="571500" y="3429000"/>
+            <a:ext cx="8572500" cy="523875"/>
+          </a:xfrm>
+          <a:prstGeom prst="rect">
+            <a:avLst/>
+          </a:prstGeom>
+          <a:noFill/>
+        </p:spPr>
+        <p:txBody>
+          <a:bodyPr wrap="none" anchor="ctr">
+            <a:noAutofit/>
+          </a:bodyPr>
+          <a:lstStyle/>
+          <a:p>
+            <a:pPr algn="l"/>
+            <a:r>
+              <a:rPr sz="2850" noProof="1">
+                <a:solidFill>
+                  <a:srgbClr val="2D6A6A"/>
+                </a:solidFill>
+                <a:latin typeface="Liter"/>
+                <a:ea typeface="Liter"/>
+              </a:rPr>
+              <a:t>06 — Architecture &amp; Deployment</a:t>
+            </a:r>
+          </a:p>
+        </p:txBody>
+      </p:sp>
+      <p:sp>
+        <p:nvSpPr>
+          <p:cNvPr id="5" name="dsl:ch6-subtitle"/>
+          <p:cNvSpPr txBox="1"/>
+          <p:nvPr/>
+        </p:nvSpPr>
+        <p:spPr>
+          <a:xfrm>
+            <a:off x="571500" y="4095750"/>
+            <a:ext cx="8572500" cy="333375"/>
+          </a:xfrm>
+          <a:prstGeom prst="rect">
+            <a:avLst/>
+          </a:prstGeom>
+          <a:noFill/>
+        </p:spPr>
+        <p:txBody>
+          <a:bodyPr wrap="none" anchor="ctr">
+            <a:noAutofit/>
+          </a:bodyPr>
+          <a:lstStyle/>
+          <a:p>
+            <a:pPr algn="l"/>
+            <a:r>
+              <a:rPr sz="1500" noProof="1">
+                <a:solidFill>
+                  <a:srgbClr val="5C6B73"/>
+                </a:solidFill>
+                <a:latin typeface="QuattrocentoSans"/>
+                <a:ea typeface="QuattrocentoSans"/>
+              </a:rPr>
+              <a:t>Four-tier stack deployed on Huawei Cloud</a:t>
+            </a:r>
+          </a:p>
+        </p:txBody>
+      </p:sp>
+    </p:spTree>
+  </p:cSld>
+  <p:clrMapOvr>
+    <a:masterClrMapping/>
+  </p:clrMapOvr>
+</p:sld>
+</file>
+
+<file path=ppt/slides/slide25.xml><?xml version="1.0" encoding="utf-8"?>
+<p:sld xmlns:a="http://schemas.openxmlformats.org/drawingml/2006/main" xmlns:p="http://schemas.openxmlformats.org/presentationml/2006/main" xmlns:r="http://schemas.openxmlformats.org/officeDocument/2006/relationships">
+  <p:cSld>
+    <p:bg>
+      <p:bgPr>
+        <a:solidFill>
+          <a:srgbClr val="FAFAF8"/>
+        </a:solidFill>
+        <a:effectLst/>
+      </p:bgPr>
+    </p:bg>
+    <p:spTree>
+      <p:nvGrpSpPr>
+        <p:cNvPr id="1" name=""/>
+        <p:cNvGrpSpPr/>
+        <p:nvPr/>
+      </p:nvGrpSpPr>
+      <p:grpSpPr/>
+      <p:sp>
+        <p:nvSpPr>
+          <p:cNvPr id="2" name="dsl:nav-bg"/>
+          <p:cNvSpPr/>
+          <p:nvPr/>
+        </p:nvSpPr>
+        <p:spPr>
+          <a:xfrm>
+            <a:off x="0" y="0"/>
+            <a:ext cx="12192000" cy="304800"/>
+          </a:xfrm>
+          <a:prstGeom prst="rect">
+            <a:avLst/>
+          </a:prstGeom>
+          <a:solidFill>
+            <a:srgbClr val="2D6A6A"/>
+          </a:solidFill>
+          <a:ln>
+            <a:noFill/>
+          </a:ln>
+          <a:effectLst/>
+        </p:spPr>
+        <p:style>
+          <a:lnRef idx="1">
+            <a:schemeClr val="accent1"/>
+          </a:lnRef>
+          <a:fillRef idx="3">
+            <a:schemeClr val="accent1"/>
+          </a:fillRef>
+          <a:effectRef idx="2">
+            <a:schemeClr val="accent1"/>
+          </a:effectRef>
+          <a:fontRef idx="minor">
+            <a:schemeClr val="lt1"/>
+          </a:fontRef>
+        </p:style>
+        <p:txBody>
+          <a:bodyPr rtlCol="0" anchor="ctr"/>
+          <a:lstStyle/>
+          <a:p>
+            <a:pPr algn="ctr"/>
+          </a:p>
+        </p:txBody>
+      </p:sp>
+      <p:sp>
+        <p:nvSpPr>
+          <p:cNvPr id="3" name="dsl:nav-active-underline"/>
+          <p:cNvSpPr/>
+          <p:nvPr/>
+        </p:nvSpPr>
+        <p:spPr>
+          <a:xfrm>
+            <a:off x="8001000" y="276225"/>
+            <a:ext cx="762000" cy="28575"/>
+          </a:xfrm>
+          <a:prstGeom prst="rect">
+            <a:avLst/>
+          </a:prstGeom>
+          <a:solidFill>
+            <a:srgbClr val="D4A373"/>
+          </a:solidFill>
+          <a:ln>
+            <a:noFill/>
+          </a:ln>
+          <a:effectLst/>
+        </p:spPr>
+        <p:style>
+          <a:lnRef idx="1">
+            <a:schemeClr val="accent1"/>
+          </a:lnRef>
+          <a:fillRef idx="3">
+            <a:schemeClr val="accent1"/>
+          </a:fillRef>
+          <a:effectRef idx="2">
+            <a:schemeClr val="accent1"/>
+          </a:effectRef>
+          <a:fontRef idx="minor">
+            <a:schemeClr val="lt1"/>
+          </a:fontRef>
+        </p:style>
+        <p:txBody>
+          <a:bodyPr rtlCol="0" anchor="ctr"/>
+          <a:lstStyle/>
+          <a:p>
+            <a:pPr algn="ctr"/>
+          </a:p>
+        </p:txBody>
+      </p:sp>
+      <p:sp>
+        <p:nvSpPr>
+          <p:cNvPr id="4" name="dsl:nav-1"/>
+          <p:cNvSpPr txBox="1"/>
+          <p:nvPr/>
+        </p:nvSpPr>
+        <p:spPr>
+          <a:xfrm>
+            <a:off x="0" y="0"/>
+            <a:ext cx="1524000" cy="304800"/>
+          </a:xfrm>
+          <a:prstGeom prst="rect">
+            <a:avLst/>
+          </a:prstGeom>
+          <a:noFill/>
+        </p:spPr>
+        <p:txBody>
+          <a:bodyPr wrap="none" anchor="ctr">
+            <a:noAutofit/>
+          </a:bodyPr>
+          <a:lstStyle/>
+          <a:p>
+            <a:pPr algn="ctr"/>
+            <a:r>
+              <a:rPr sz="825" noProof="1" spc="150">
+                <a:solidFill>
+                  <a:srgbClr val="8FB3B3"/>
+                </a:solidFill>
+                <a:latin typeface="Liter"/>
+                <a:ea typeface="Liter"/>
+              </a:rPr>
+              <a:t>SOC CHALLENGE</a:t>
+            </a:r>
+          </a:p>
+        </p:txBody>
+      </p:sp>
+      <p:sp>
+        <p:nvSpPr>
+          <p:cNvPr id="5" name="dsl:nav-2"/>
+          <p:cNvSpPr txBox="1"/>
+          <p:nvPr/>
+        </p:nvSpPr>
+        <p:spPr>
+          <a:xfrm>
+            <a:off x="1524000" y="0"/>
+            <a:ext cx="1524000" cy="304800"/>
+          </a:xfrm>
+          <a:prstGeom prst="rect">
+            <a:avLst/>
+          </a:prstGeom>
+          <a:noFill/>
+        </p:spPr>
+        <p:txBody>
+          <a:bodyPr wrap="none" anchor="ctr">
+            <a:noAutofit/>
+          </a:bodyPr>
+          <a:lstStyle/>
+          <a:p>
+            <a:pPr algn="ctr"/>
+            <a:r>
+              <a:rPr sz="825" noProof="1" spc="150">
+                <a:solidFill>
+                  <a:srgbClr val="8FB3B3"/>
+                </a:solidFill>
+                <a:latin typeface="Liter"/>
+                <a:ea typeface="Liter"/>
+              </a:rPr>
+              <a:t>OVERVIEW</a:t>
+            </a:r>
+          </a:p>
+        </p:txBody>
+      </p:sp>
+      <p:sp>
+        <p:nvSpPr>
+          <p:cNvPr id="6" name="dsl:nav-3"/>
+          <p:cNvSpPr txBox="1"/>
+          <p:nvPr/>
+        </p:nvSpPr>
+        <p:spPr>
+          <a:xfrm>
+            <a:off x="3048000" y="0"/>
+            <a:ext cx="1524000" cy="304800"/>
+          </a:xfrm>
+          <a:prstGeom prst="rect">
+            <a:avLst/>
+          </a:prstGeom>
+          <a:noFill/>
+        </p:spPr>
+        <p:txBody>
+          <a:bodyPr wrap="none" anchor="ctr">
+            <a:noAutofit/>
+          </a:bodyPr>
+          <a:lstStyle/>
+          <a:p>
+            <a:pPr algn="ctr"/>
+            <a:r>
+              <a:rPr sz="825" noProof="1" spc="150">
+                <a:solidFill>
+                  <a:srgbClr val="8FB3B3"/>
+                </a:solidFill>
+                <a:latin typeface="Liter"/>
+                <a:ea typeface="Liter"/>
+              </a:rPr>
+              <a:t>DATA</a:t>
+            </a:r>
+          </a:p>
+        </p:txBody>
+      </p:sp>
+      <p:sp>
+        <p:nvSpPr>
+          <p:cNvPr id="7" name="dsl:nav-4"/>
+          <p:cNvSpPr txBox="1"/>
+          <p:nvPr/>
+        </p:nvSpPr>
+        <p:spPr>
+          <a:xfrm>
+            <a:off x="4572000" y="0"/>
+            <a:ext cx="1524000" cy="304800"/>
+          </a:xfrm>
+          <a:prstGeom prst="rect">
+            <a:avLst/>
+          </a:prstGeom>
+          <a:noFill/>
+        </p:spPr>
+        <p:txBody>
+          <a:bodyPr wrap="none" anchor="ctr">
+            <a:noAutofit/>
+          </a:bodyPr>
+          <a:lstStyle/>
+          <a:p>
+            <a:pPr algn="ctr"/>
+            <a:r>
+              <a:rPr sz="825" noProof="1" spc="150">
+                <a:solidFill>
+                  <a:srgbClr val="8FB3B3"/>
+                </a:solidFill>
+                <a:latin typeface="Liter"/>
+                <a:ea typeface="Liter"/>
+              </a:rPr>
+              <a:t>PIPELINE</a:t>
+            </a:r>
+          </a:p>
+        </p:txBody>
+      </p:sp>
+      <p:sp>
+        <p:nvSpPr>
+          <p:cNvPr id="8" name="dsl:nav-5"/>
+          <p:cNvSpPr txBox="1"/>
+          <p:nvPr/>
+        </p:nvSpPr>
+        <p:spPr>
+          <a:xfrm>
+            <a:off x="6096000" y="0"/>
+            <a:ext cx="1524000" cy="304800"/>
+          </a:xfrm>
+          <a:prstGeom prst="rect">
+            <a:avLst/>
+          </a:prstGeom>
+          <a:noFill/>
+        </p:spPr>
+        <p:txBody>
+          <a:bodyPr wrap="none" anchor="ctr">
+            <a:noAutofit/>
+          </a:bodyPr>
+          <a:lstStyle/>
+          <a:p>
+            <a:pPr algn="ctr"/>
+            <a:r>
+              <a:rPr sz="825" noProof="1" spc="150">
+                <a:solidFill>
+                  <a:srgbClr val="8FB3B3"/>
+                </a:solidFill>
+                <a:latin typeface="Liter"/>
+                <a:ea typeface="Liter"/>
+              </a:rPr>
+              <a:t>AI OPERATIONS</a:t>
+            </a:r>
+          </a:p>
+        </p:txBody>
+      </p:sp>
+      <p:sp>
+        <p:nvSpPr>
+          <p:cNvPr id="9" name="dsl:nav-6"/>
+          <p:cNvSpPr txBox="1"/>
+          <p:nvPr/>
+        </p:nvSpPr>
+        <p:spPr>
+          <a:xfrm>
+            <a:off x="7620000" y="0"/>
+            <a:ext cx="1524000" cy="304800"/>
+          </a:xfrm>
+          <a:prstGeom prst="rect">
+            <a:avLst/>
+          </a:prstGeom>
+          <a:noFill/>
+        </p:spPr>
+        <p:txBody>
+          <a:bodyPr wrap="none" anchor="ctr">
+            <a:noAutofit/>
+          </a:bodyPr>
+          <a:lstStyle/>
+          <a:p>
+            <a:pPr algn="ctr"/>
+            <a:r>
+              <a:rPr sz="825" noProof="1" spc="150">
+                <a:solidFill>
+                  <a:srgbClr val="FFFFFF"/>
+                </a:solidFill>
+                <a:latin typeface="Liter"/>
+                <a:ea typeface="Liter"/>
+              </a:rPr>
+              <a:t>ARCHITECTURE</a:t>
+            </a:r>
+          </a:p>
+        </p:txBody>
+      </p:sp>
+      <p:sp>
+        <p:nvSpPr>
+          <p:cNvPr id="10" name="dsl:nav-7"/>
+          <p:cNvSpPr txBox="1"/>
+          <p:nvPr/>
+        </p:nvSpPr>
+        <p:spPr>
+          <a:xfrm>
+            <a:off x="9144000" y="0"/>
+            <a:ext cx="1524000" cy="304800"/>
+          </a:xfrm>
+          <a:prstGeom prst="rect">
+            <a:avLst/>
+          </a:prstGeom>
+          <a:noFill/>
+        </p:spPr>
+        <p:txBody>
+          <a:bodyPr wrap="none" anchor="ctr">
+            <a:noAutofit/>
+          </a:bodyPr>
+          <a:lstStyle/>
+          <a:p>
+            <a:pPr algn="ctr"/>
+            <a:r>
+              <a:rPr sz="825" noProof="1" spc="150">
+                <a:solidFill>
+                  <a:srgbClr val="8FB3B3"/>
+                </a:solidFill>
+                <a:latin typeface="Liter"/>
+                <a:ea typeface="Liter"/>
+              </a:rPr>
+              <a:t>SECURITY</a:t>
+            </a:r>
+          </a:p>
+        </p:txBody>
+      </p:sp>
+      <p:sp>
+        <p:nvSpPr>
+          <p:cNvPr id="11" name="dsl:nav-8"/>
+          <p:cNvSpPr txBox="1"/>
+          <p:nvPr/>
+        </p:nvSpPr>
+        <p:spPr>
+          <a:xfrm>
+            <a:off x="10668000" y="0"/>
+            <a:ext cx="1524000" cy="304800"/>
+          </a:xfrm>
+          <a:prstGeom prst="rect">
+            <a:avLst/>
+          </a:prstGeom>
+          <a:noFill/>
+        </p:spPr>
+        <p:txBody>
+          <a:bodyPr wrap="none" anchor="ctr">
+            <a:noAutofit/>
+          </a:bodyPr>
+          <a:lstStyle/>
+          <a:p>
+            <a:pPr algn="ctr"/>
+            <a:r>
+              <a:rPr sz="825" noProof="1" spc="150">
+                <a:solidFill>
+                  <a:srgbClr val="8FB3B3"/>
+                </a:solidFill>
+                <a:latin typeface="Liter"/>
+                <a:ea typeface="Liter"/>
+              </a:rPr>
+              <a:t>VALUE</a:t>
+            </a:r>
+          </a:p>
+        </p:txBody>
+      </p:sp>
+      <p:sp>
+        <p:nvSpPr>
+          <p:cNvPr id="12" name="dsl:title-accent"/>
+          <p:cNvSpPr/>
+          <p:nvPr/>
+        </p:nvSpPr>
+        <p:spPr>
+          <a:xfrm>
+            <a:off x="571500" y="438150"/>
+            <a:ext cx="571500" cy="38100"/>
+          </a:xfrm>
+          <a:prstGeom prst="rect">
+            <a:avLst/>
+          </a:prstGeom>
+          <a:solidFill>
+            <a:srgbClr val="D4A373"/>
+          </a:solidFill>
+          <a:ln>
+            <a:noFill/>
+          </a:ln>
+          <a:effectLst/>
+        </p:spPr>
+        <p:style>
+          <a:lnRef idx="1">
+            <a:schemeClr val="accent1"/>
+          </a:lnRef>
+          <a:fillRef idx="3">
+            <a:schemeClr val="accent1"/>
+          </a:fillRef>
+          <a:effectRef idx="2">
+            <a:schemeClr val="accent1"/>
+          </a:effectRef>
+          <a:fontRef idx="minor">
+            <a:schemeClr val="lt1"/>
+          </a:fontRef>
+        </p:style>
+        <p:txBody>
+          <a:bodyPr rtlCol="0" anchor="ctr"/>
+          <a:lstStyle/>
+          <a:p>
+            <a:pPr algn="ctr"/>
+          </a:p>
+        </p:txBody>
+      </p:sp>
+      <p:sp>
+        <p:nvSpPr>
+          <p:cNvPr id="13" name="dsl:title"/>
+          <p:cNvSpPr txBox="1"/>
+          <p:nvPr/>
+        </p:nvSpPr>
+        <p:spPr>
+          <a:xfrm>
+            <a:off x="571500" y="552450"/>
+            <a:ext cx="6667500" cy="400050"/>
+          </a:xfrm>
+          <a:prstGeom prst="rect">
+            <a:avLst/>
+          </a:prstGeom>
+          <a:noFill/>
+        </p:spPr>
+        <p:txBody>
+          <a:bodyPr wrap="none" anchor="ctr">
+            <a:noAutofit/>
+          </a:bodyPr>
+          <a:lstStyle/>
+          <a:p>
+            <a:pPr algn="l"/>
+            <a:r>
+              <a:rPr sz="2100" noProof="1">
+                <a:solidFill>
+                  <a:srgbClr val="2D6A6A"/>
+                </a:solidFill>
+                <a:latin typeface="Liter"/>
+                <a:ea typeface="Liter"/>
+              </a:rPr>
+              <a:t>Logical Architecture</a:t>
+            </a:r>
+          </a:p>
+        </p:txBody>
+      </p:sp>
+      <p:sp>
+        <p:nvSpPr>
+          <p:cNvPr id="14" name="dsl:ref-note"/>
+          <p:cNvSpPr txBox="1"/>
+          <p:nvPr/>
+        </p:nvSpPr>
+        <p:spPr>
+          <a:xfrm>
+            <a:off x="8572500" y="552450"/>
+            <a:ext cx="3048000" cy="400050"/>
+          </a:xfrm>
+          <a:prstGeom prst="rect">
+            <a:avLst/>
+          </a:prstGeom>
+          <a:noFill/>
+        </p:spPr>
+        <p:txBody>
+          <a:bodyPr wrap="none" anchor="ctr">
+            <a:noAutofit/>
+          </a:bodyPr>
+          <a:lstStyle/>
+          <a:p>
+            <a:pPr algn="r"/>
+            <a:r>
+              <a:rPr sz="975" noProof="1">
+                <a:solidFill>
+                  <a:srgbClr val="5C6B73"/>
+                </a:solidFill>
+                <a:latin typeface="QuattrocentoSans"/>
+                <a:ea typeface="QuattrocentoSans"/>
+              </a:rPr>
+              <a:t>Reference: main.pdf Sections 3.3-3.5</a:t>
+            </a:r>
+          </a:p>
+        </p:txBody>
+      </p:sp>
+      <p:sp>
+        <p:nvSpPr>
+          <p:cNvPr id="15" name="dsl:layer1-bg"/>
+          <p:cNvSpPr/>
+          <p:nvPr/>
+        </p:nvSpPr>
+        <p:spPr>
+          <a:xfrm>
+            <a:off x="571500" y="1143000"/>
+            <a:ext cx="11049000" cy="952500"/>
+          </a:xfrm>
+          <a:prstGeom prst="rect">
+            <a:avLst/>
+          </a:prstGeom>
+          <a:solidFill>
+            <a:srgbClr val="E8F2F2"/>
+          </a:solidFill>
+          <a:ln w="12700">
+            <a:solidFill>
+              <a:srgbClr val="2D6A6A"/>
+            </a:solidFill>
+            <a:prstDash val="solid"/>
+          </a:ln>
+          <a:effectLst/>
+        </p:spPr>
+        <p:style>
+          <a:lnRef idx="1">
+            <a:schemeClr val="accent1"/>
+          </a:lnRef>
+          <a:fillRef idx="3">
+            <a:schemeClr val="accent1"/>
+          </a:fillRef>
+          <a:effectRef idx="2">
+            <a:schemeClr val="accent1"/>
+          </a:effectRef>
+          <a:fontRef idx="minor">
+            <a:schemeClr val="lt1"/>
+          </a:fontRef>
+        </p:style>
+        <p:txBody>
+          <a:bodyPr rtlCol="0" anchor="ctr"/>
+          <a:lstStyle/>
+          <a:p>
+            <a:pPr algn="ctr"/>
+          </a:p>
+        </p:txBody>
+      </p:sp>
+      <p:sp>
+        <p:nvSpPr>
+          <p:cNvPr id="16" name="dsl:layer1-label-bg"/>
+          <p:cNvSpPr/>
+          <p:nvPr/>
+        </p:nvSpPr>
+        <p:spPr>
+          <a:xfrm>
+            <a:off x="571500" y="1143000"/>
+            <a:ext cx="1524000" cy="952500"/>
+          </a:xfrm>
+          <a:prstGeom prst="rect">
+            <a:avLst/>
+          </a:prstGeom>
+          <a:solidFill>
+            <a:srgbClr val="2D6A6A"/>
+          </a:solidFill>
+          <a:ln>
+            <a:noFill/>
+          </a:ln>
+          <a:effectLst/>
+        </p:spPr>
+        <p:style>
+          <a:lnRef idx="1">
+            <a:schemeClr val="accent1"/>
+          </a:lnRef>
+          <a:fillRef idx="3">
+            <a:schemeClr val="accent1"/>
+          </a:fillRef>
+          <a:effectRef idx="2">
+            <a:schemeClr val="accent1"/>
+          </a:effectRef>
+          <a:fontRef idx="minor">
+            <a:schemeClr val="lt1"/>
+          </a:fontRef>
+        </p:style>
+        <p:txBody>
+          <a:bodyPr rtlCol="0" anchor="ctr"/>
+          <a:lstStyle/>
+          <a:p>
+            <a:pPr algn="ctr"/>
+          </a:p>
+        </p:txBody>
+      </p:sp>
+      <p:sp>
+        <p:nvSpPr>
+          <p:cNvPr id="17" name="dsl:layer1-label"/>
+          <p:cNvSpPr txBox="1"/>
+          <p:nvPr/>
+        </p:nvSpPr>
+        <p:spPr>
+          <a:xfrm>
+            <a:off x="571500" y="1143000"/>
+            <a:ext cx="1524000" cy="952500"/>
+          </a:xfrm>
+          <a:prstGeom prst="rect">
+            <a:avLst/>
+          </a:prstGeom>
+          <a:noFill/>
+        </p:spPr>
+        <p:txBody>
+          <a:bodyPr wrap="none" anchor="ctr">
+            <a:noAutofit/>
+          </a:bodyPr>
+          <a:lstStyle/>
+          <a:p>
+            <a:pPr algn="ctr"/>
+            <a:r>
+              <a:rPr b="1" sz="1200" noProof="1">
+                <a:solidFill>
+                  <a:srgbClr val="FFFFFF"/>
+                </a:solidFill>
+                <a:latin typeface="Liter"/>
+                <a:ea typeface="Liter"/>
+              </a:rPr>
+              <a:t>FRONTEND</a:t>
+            </a:r>
+          </a:p>
+        </p:txBody>
+      </p:sp>
+      <p:sp>
+        <p:nvSpPr>
+          <p:cNvPr id="18" name="dsl:layer1-content"/>
+          <p:cNvSpPr txBox="1"/>
+          <p:nvPr/>
+        </p:nvSpPr>
+        <p:spPr>
+          <a:xfrm>
+            <a:off x="2286000" y="1238250"/>
+            <a:ext cx="9144000" cy="762000"/>
+          </a:xfrm>
+          <a:prstGeom prst="rect">
+            <a:avLst/>
+          </a:prstGeom>
+          <a:noFill/>
+        </p:spPr>
+        <p:txBody>
+          <a:bodyPr wrap="none" anchor="ctr">
+            <a:noAutofit/>
+          </a:bodyPr>
+          <a:lstStyle/>
+          <a:p>
+            <a:pPr algn="l"/>
+            <a:r>
+              <a:rPr b="1" sz="1350" noProof="1">
+                <a:solidFill>
+                  <a:srgbClr val="2B2D2F"/>
+                </a:solidFill>
+                <a:latin typeface="QuattrocentoSans"/>
+                <a:ea typeface="QuattrocentoSans"/>
+              </a:rPr>
+              <a:t>Next.js Dashboard</a:t>
+            </a:r>
+            <a:r>
+              <a:rPr sz="1350" noProof="1">
+                <a:solidFill>
+                  <a:srgbClr val="2B2D2F"/>
+                </a:solidFill>
+                <a:latin typeface="QuattrocentoSans"/>
+                <a:ea typeface="QuattrocentoSans"/>
+              </a:rPr>
+              <a:t> — SWR API client, WebSocket real-time updates, responsive UI</a:t>
+            </a:r>
+          </a:p>
+        </p:txBody>
+      </p:sp>
+      <p:cxnSp>
+        <p:nvCxnSpPr>
+          <p:cNvPr id="19" name="dsl:arrow-1-2"/>
+          <p:cNvCxnSpPr/>
+          <p:nvPr/>
+        </p:nvCxnSpPr>
+        <p:spPr>
+          <a:xfrm>
+            <a:off x="6000750" y="2095500"/>
+            <a:ext cx="0" cy="190500"/>
+          </a:xfrm>
+          <a:prstGeom prst="straightConnector1">
+            <a:avLst/>
+          </a:prstGeom>
+          <a:ln w="25400">
+            <a:solidFill>
+              <a:srgbClr val="D4A373"/>
+            </a:solidFill>
+            <a:prstDash val="solid"/>
+            <a:tailEnd type="arrow"/>
+          </a:ln>
+          <a:effectLst/>
+        </p:spPr>
+        <p:style>
+          <a:lnRef idx="2">
+            <a:schemeClr val="accent1"/>
+          </a:lnRef>
+          <a:fillRef idx="0">
+            <a:schemeClr val="accent1"/>
+          </a:fillRef>
+          <a:effectRef idx="1">
+            <a:schemeClr val="accent1"/>
+          </a:effectRef>
+          <a:fontRef idx="minor">
+            <a:schemeClr val="tx1"/>
+          </a:fontRef>
+        </p:style>
+      </p:cxnSp>
+      <p:sp>
+        <p:nvSpPr>
+          <p:cNvPr id="20" name="dsl:layer2-bg"/>
+          <p:cNvSpPr/>
+          <p:nvPr/>
+        </p:nvSpPr>
+        <p:spPr>
+          <a:xfrm>
+            <a:off x="571500" y="2286000"/>
+            <a:ext cx="11049000" cy="952500"/>
+          </a:xfrm>
+          <a:prstGeom prst="rect">
+            <a:avLst/>
+          </a:prstGeom>
+          <a:solidFill>
+            <a:srgbClr val="E8F2F2"/>
+          </a:solidFill>
+          <a:ln w="12700">
+            <a:solidFill>
+              <a:srgbClr val="2D6A6A"/>
+            </a:solidFill>
+            <a:prstDash val="solid"/>
+          </a:ln>
+          <a:effectLst/>
+        </p:spPr>
+        <p:style>
+          <a:lnRef idx="1">
+            <a:schemeClr val="accent1"/>
+          </a:lnRef>
+          <a:fillRef idx="3">
+            <a:schemeClr val="accent1"/>
+          </a:fillRef>
+          <a:effectRef idx="2">
+            <a:schemeClr val="accent1"/>
+          </a:effectRef>
+          <a:fontRef idx="minor">
+            <a:schemeClr val="lt1"/>
+          </a:fontRef>
+        </p:style>
+        <p:txBody>
+          <a:bodyPr rtlCol="0" anchor="ctr"/>
+          <a:lstStyle/>
+          <a:p>
+            <a:pPr algn="ctr"/>
+          </a:p>
+        </p:txBody>
+      </p:sp>
+      <p:sp>
+        <p:nvSpPr>
+          <p:cNvPr id="21" name="dsl:layer2-label-bg"/>
+          <p:cNvSpPr/>
+          <p:nvPr/>
+        </p:nvSpPr>
+        <p:spPr>
+          <a:xfrm>
+            <a:off x="571500" y="2286000"/>
+            <a:ext cx="1524000" cy="952500"/>
+          </a:xfrm>
+          <a:prstGeom prst="rect">
+            <a:avLst/>
+          </a:prstGeom>
+          <a:solidFill>
+            <a:srgbClr val="2D6A6A"/>
+          </a:solidFill>
+          <a:ln>
+            <a:noFill/>
+          </a:ln>
+          <a:effectLst/>
+        </p:spPr>
+        <p:style>
+          <a:lnRef idx="1">
+            <a:schemeClr val="accent1"/>
+          </a:lnRef>
+          <a:fillRef idx="3">
+            <a:schemeClr val="accent1"/>
+          </a:fillRef>
+          <a:effectRef idx="2">
+            <a:schemeClr val="accent1"/>
+          </a:effectRef>
+          <a:fontRef idx="minor">
+            <a:schemeClr val="lt1"/>
+          </a:fontRef>
+        </p:style>
+        <p:txBody>
+          <a:bodyPr rtlCol="0" anchor="ctr"/>
+          <a:lstStyle/>
+          <a:p>
+            <a:pPr algn="ctr"/>
+          </a:p>
+        </p:txBody>
+      </p:sp>
+      <p:sp>
+        <p:nvSpPr>
+          <p:cNvPr id="22" name="dsl:layer2-label"/>
+          <p:cNvSpPr txBox="1"/>
+          <p:nvPr/>
+        </p:nvSpPr>
+        <p:spPr>
+          <a:xfrm>
+            <a:off x="571500" y="2286000"/>
+            <a:ext cx="1524000" cy="952500"/>
+          </a:xfrm>
+          <a:prstGeom prst="rect">
+            <a:avLst/>
+          </a:prstGeom>
+          <a:noFill/>
+        </p:spPr>
+        <p:txBody>
+          <a:bodyPr wrap="none" anchor="ctr">
+            <a:noAutofit/>
+          </a:bodyPr>
+          <a:lstStyle/>
+          <a:p>
+            <a:pPr algn="ctr"/>
+            <a:r>
+              <a:rPr b="1" sz="1200" noProof="1">
+                <a:solidFill>
+                  <a:srgbClr val="FFFFFF"/>
+                </a:solidFill>
+                <a:latin typeface="Liter"/>
+                <a:ea typeface="Liter"/>
+              </a:rPr>
+              <a:t>API LAYER</a:t>
+            </a:r>
+          </a:p>
+        </p:txBody>
+      </p:sp>
+      <p:sp>
+        <p:nvSpPr>
+          <p:cNvPr id="23" name="dsl:layer2-content"/>
+          <p:cNvSpPr txBox="1"/>
+          <p:nvPr/>
+        </p:nvSpPr>
+        <p:spPr>
+          <a:xfrm>
+            <a:off x="2286000" y="2381250"/>
+            <a:ext cx="9144000" cy="762000"/>
+          </a:xfrm>
+          <a:prstGeom prst="rect">
+            <a:avLst/>
+          </a:prstGeom>
+          <a:noFill/>
+        </p:spPr>
+        <p:txBody>
+          <a:bodyPr wrap="none" anchor="ctr">
+            <a:noAutofit/>
+          </a:bodyPr>
+          <a:lstStyle/>
+          <a:p>
+            <a:pPr algn="l"/>
+            <a:r>
+              <a:rPr b="1" sz="1350" noProof="1">
+                <a:solidFill>
+                  <a:srgbClr val="2B2D2F"/>
+                </a:solidFill>
+                <a:latin typeface="QuattrocentoSans"/>
+                <a:ea typeface="QuattrocentoSans"/>
+              </a:rPr>
+              <a:t>FastAPI</a:t>
+            </a:r>
+            <a:r>
+              <a:rPr sz="1350" noProof="1">
+                <a:solidFill>
+                  <a:srgbClr val="2B2D2F"/>
+                </a:solidFill>
+                <a:latin typeface="QuattrocentoSans"/>
+                <a:ea typeface="QuattrocentoSans"/>
+              </a:rPr>
+              <a:t> — REST endpoints, CORS, rate limiting, WebSocket for live updates</a:t>
+            </a:r>
+          </a:p>
+        </p:txBody>
+      </p:sp>
+      <p:cxnSp>
+        <p:nvCxnSpPr>
+          <p:cNvPr id="24" name="dsl:arrow-2-3"/>
+          <p:cNvCxnSpPr/>
+          <p:nvPr/>
+        </p:nvCxnSpPr>
+        <p:spPr>
+          <a:xfrm>
+            <a:off x="6000750" y="3238500"/>
+            <a:ext cx="0" cy="190500"/>
+          </a:xfrm>
+          <a:prstGeom prst="straightConnector1">
+            <a:avLst/>
+          </a:prstGeom>
+          <a:ln w="25400">
+            <a:solidFill>
+              <a:srgbClr val="D4A373"/>
+            </a:solidFill>
+            <a:prstDash val="solid"/>
+            <a:tailEnd type="arrow"/>
+          </a:ln>
+          <a:effectLst/>
+        </p:spPr>
+        <p:style>
+          <a:lnRef idx="2">
+            <a:schemeClr val="accent1"/>
+          </a:lnRef>
+          <a:fillRef idx="0">
+            <a:schemeClr val="accent1"/>
+          </a:fillRef>
+          <a:effectRef idx="1">
+            <a:schemeClr val="accent1"/>
+          </a:effectRef>
+          <a:fontRef idx="minor">
+            <a:schemeClr val="tx1"/>
+          </a:fontRef>
+        </p:style>
+      </p:cxnSp>
+      <p:sp>
+        <p:nvSpPr>
+          <p:cNvPr id="25" name="dsl:layer3-bg"/>
+          <p:cNvSpPr/>
+          <p:nvPr/>
+        </p:nvSpPr>
+        <p:spPr>
+          <a:xfrm>
+            <a:off x="571500" y="3429000"/>
+            <a:ext cx="11049000" cy="1143000"/>
+          </a:xfrm>
+          <a:prstGeom prst="rect">
+            <a:avLst/>
+          </a:prstGeom>
+          <a:solidFill>
+            <a:srgbClr val="F5EDE3"/>
+          </a:solidFill>
+          <a:ln w="12700">
+            <a:solidFill>
+              <a:srgbClr val="D4A373"/>
+            </a:solidFill>
+            <a:prstDash val="solid"/>
+          </a:ln>
+          <a:effectLst/>
+        </p:spPr>
+        <p:style>
+          <a:lnRef idx="1">
+            <a:schemeClr val="accent1"/>
+          </a:lnRef>
+          <a:fillRef idx="3">
+            <a:schemeClr val="accent1"/>
+          </a:fillRef>
+          <a:effectRef idx="2">
+            <a:schemeClr val="accent1"/>
+          </a:effectRef>
+          <a:fontRef idx="minor">
+            <a:schemeClr val="lt1"/>
+          </a:fontRef>
+        </p:style>
+        <p:txBody>
+          <a:bodyPr rtlCol="0" anchor="ctr"/>
+          <a:lstStyle/>
+          <a:p>
+            <a:pPr algn="ctr"/>
+          </a:p>
+        </p:txBody>
+      </p:sp>
+      <p:sp>
+        <p:nvSpPr>
+          <p:cNvPr id="26" name="dsl:layer3-label-bg"/>
+          <p:cNvSpPr/>
+          <p:nvPr/>
+        </p:nvSpPr>
+        <p:spPr>
+          <a:xfrm>
+            <a:off x="571500" y="3429000"/>
+            <a:ext cx="1524000" cy="1143000"/>
+          </a:xfrm>
+          <a:prstGeom prst="rect">
+            <a:avLst/>
+          </a:prstGeom>
+          <a:solidFill>
+            <a:srgbClr val="D4A373"/>
+          </a:solidFill>
+          <a:ln>
+            <a:noFill/>
+          </a:ln>
+          <a:effectLst/>
+        </p:spPr>
+        <p:style>
+          <a:lnRef idx="1">
+            <a:schemeClr val="accent1"/>
+          </a:lnRef>
+          <a:fillRef idx="3">
+            <a:schemeClr val="accent1"/>
+          </a:fillRef>
+          <a:effectRef idx="2">
+            <a:schemeClr val="accent1"/>
+          </a:effectRef>
+          <a:fontRef idx="minor">
+            <a:schemeClr val="lt1"/>
+          </a:fontRef>
+        </p:style>
+        <p:txBody>
+          <a:bodyPr rtlCol="0" anchor="ctr"/>
+          <a:lstStyle/>
+          <a:p>
+            <a:pPr algn="ctr"/>
+          </a:p>
+        </p:txBody>
+      </p:sp>
+      <p:sp>
+        <p:nvSpPr>
+          <p:cNvPr id="27" name="dsl:layer3-label"/>
+          <p:cNvSpPr txBox="1"/>
+          <p:nvPr/>
+        </p:nvSpPr>
+        <p:spPr>
+          <a:xfrm>
+            <a:off x="571500" y="3429000"/>
+            <a:ext cx="1524000" cy="1143000"/>
+          </a:xfrm>
+          <a:prstGeom prst="rect">
+            <a:avLst/>
+          </a:prstGeom>
+          <a:noFill/>
+        </p:spPr>
+        <p:txBody>
+          <a:bodyPr wrap="none" anchor="ctr">
+            <a:noAutofit/>
+          </a:bodyPr>
+          <a:lstStyle/>
+          <a:p>
+            <a:pPr algn="ctr"/>
+            <a:r>
+              <a:rPr b="1" sz="1200" noProof="1">
+                <a:solidFill>
+                  <a:srgbClr val="FFFFFF"/>
+                </a:solidFill>
+                <a:latin typeface="Liter"/>
+                <a:ea typeface="Liter"/>
+              </a:rPr>
+              <a:t>WORKFLOW</a:t>
+            </a:r>
+          </a:p>
+        </p:txBody>
+      </p:sp>
+      <p:sp>
+        <p:nvSpPr>
+          <p:cNvPr id="28" name="dsl:layer3-content"/>
+          <p:cNvSpPr txBox="1"/>
+          <p:nvPr/>
+        </p:nvSpPr>
+        <p:spPr>
+          <a:xfrm>
+            <a:off x="2286000" y="3524250"/>
+            <a:ext cx="9144000" cy="952500"/>
+          </a:xfrm>
+          <a:prstGeom prst="rect">
+            <a:avLst/>
+          </a:prstGeom>
+          <a:noFill/>
+        </p:spPr>
+        <p:txBody>
+          <a:bodyPr wrap="none" anchor="ctr">
+            <a:noAutofit/>
+          </a:bodyPr>
+          <a:lstStyle/>
+          <a:p>
+            <a:pPr algn="l"/>
+            <a:r>
+              <a:rPr b="1" sz="1350" noProof="1">
+                <a:solidFill>
+                  <a:srgbClr val="2B2D2F"/>
+                </a:solidFill>
+                <a:latin typeface="QuattrocentoSans"/>
+                <a:ea typeface="QuattrocentoSans"/>
+              </a:rPr>
+              <a:t>Pipeline</a:t>
+            </a:r>
+            <a:r>
+              <a:rPr sz="1350" noProof="1">
+                <a:solidFill>
+                  <a:srgbClr val="2B2D2F"/>
+                </a:solidFill>
+                <a:latin typeface="QuattrocentoSans"/>
+                <a:ea typeface="QuattrocentoSans"/>
+              </a:rPr>
+              <a:t> (poll, map, enrich, dedup, correlate)  •  </a:t>
+            </a:r>
+            <a:r>
+              <a:rPr b="1" sz="1350" noProof="1">
+                <a:solidFill>
+                  <a:srgbClr val="2B2D2F"/>
+                </a:solidFill>
+                <a:latin typeface="QuattrocentoSans"/>
+                <a:ea typeface="QuattrocentoSans"/>
+              </a:rPr>
+              <a:t>Incident Manager</a:t>
+            </a:r>
+            <a:r>
+              <a:rPr sz="1350" noProof="1">
+                <a:solidFill>
+                  <a:srgbClr val="2B2D2F"/>
+                </a:solidFill>
+                <a:latin typeface="QuattrocentoSans"/>
+                <a:ea typeface="QuattrocentoSans"/>
+              </a:rPr>
+              <a:t>  •  </a:t>
+            </a:r>
+            <a:r>
+              <a:rPr b="1" sz="1350" noProof="1">
+                <a:solidFill>
+                  <a:srgbClr val="2B2D2F"/>
+                </a:solidFill>
+                <a:latin typeface="QuattrocentoSans"/>
+                <a:ea typeface="QuattrocentoSans"/>
+              </a:rPr>
+              <a:t>AI Response</a:t>
+            </a:r>
+            <a:r>
+              <a:rPr sz="1350" noProof="1">
+                <a:solidFill>
+                  <a:srgbClr val="2B2D2F"/>
+                </a:solidFill>
+                <a:latin typeface="QuattrocentoSans"/>
+                <a:ea typeface="QuattrocentoSans"/>
+              </a:rPr>
+              <a:t>  •  </a:t>
+            </a:r>
+            <a:r>
+              <a:rPr b="1" sz="1350" noProof="1">
+                <a:solidFill>
+                  <a:srgbClr val="2B2D2F"/>
+                </a:solidFill>
+                <a:latin typeface="QuattrocentoSans"/>
+                <a:ea typeface="QuattrocentoSans"/>
+              </a:rPr>
+              <a:t>Operator</a:t>
+            </a:r>
+          </a:p>
+        </p:txBody>
+      </p:sp>
+      <p:cxnSp>
+        <p:nvCxnSpPr>
+          <p:cNvPr id="29" name="dsl:arrow-3-4"/>
+          <p:cNvCxnSpPr/>
+          <p:nvPr/>
+        </p:nvCxnSpPr>
+        <p:spPr>
+          <a:xfrm>
+            <a:off x="6000750" y="4572000"/>
+            <a:ext cx="0" cy="190500"/>
+          </a:xfrm>
+          <a:prstGeom prst="straightConnector1">
+            <a:avLst/>
+          </a:prstGeom>
+          <a:ln w="25400">
+            <a:solidFill>
+              <a:srgbClr val="D4A373"/>
+            </a:solidFill>
+            <a:prstDash val="solid"/>
+            <a:tailEnd type="arrow"/>
+          </a:ln>
+          <a:effectLst/>
+        </p:spPr>
+        <p:style>
+          <a:lnRef idx="2">
+            <a:schemeClr val="accent1"/>
+          </a:lnRef>
+          <a:fillRef idx="0">
+            <a:schemeClr val="accent1"/>
+          </a:fillRef>
+          <a:effectRef idx="1">
+            <a:schemeClr val="accent1"/>
+          </a:effectRef>
+          <a:fontRef idx="minor">
+            <a:schemeClr val="tx1"/>
+          </a:fontRef>
+        </p:style>
+      </p:cxnSp>
+      <p:sp>
+        <p:nvSpPr>
+          <p:cNvPr id="30" name="dsl:layer4-bg"/>
+          <p:cNvSpPr/>
+          <p:nvPr/>
+        </p:nvSpPr>
+        <p:spPr>
+          <a:xfrm>
+            <a:off x="571500" y="4762500"/>
+            <a:ext cx="11049000" cy="1143000"/>
+          </a:xfrm>
+          <a:prstGeom prst="rect">
+            <a:avLst/>
+          </a:prstGeom>
+          <a:solidFill>
+            <a:srgbClr val="EDEAE5"/>
+          </a:solidFill>
+          <a:ln w="12700">
+            <a:solidFill>
+              <a:srgbClr val="5C6B73"/>
+            </a:solidFill>
+            <a:prstDash val="solid"/>
+          </a:ln>
+          <a:effectLst/>
+        </p:spPr>
+        <p:style>
+          <a:lnRef idx="1">
+            <a:schemeClr val="accent1"/>
+          </a:lnRef>
+          <a:fillRef idx="3">
+            <a:schemeClr val="accent1"/>
+          </a:fillRef>
+          <a:effectRef idx="2">
+            <a:schemeClr val="accent1"/>
+          </a:effectRef>
+          <a:fontRef idx="minor">
+            <a:schemeClr val="lt1"/>
+          </a:fontRef>
+        </p:style>
+        <p:txBody>
+          <a:bodyPr rtlCol="0" anchor="ctr"/>
+          <a:lstStyle/>
+          <a:p>
+            <a:pPr algn="ctr"/>
+          </a:p>
+        </p:txBody>
+      </p:sp>
+      <p:sp>
+        <p:nvSpPr>
+          <p:cNvPr id="31" name="dsl:layer4-label-bg"/>
+          <p:cNvSpPr/>
+          <p:nvPr/>
+        </p:nvSpPr>
+        <p:spPr>
+          <a:xfrm>
+            <a:off x="571500" y="4762500"/>
+            <a:ext cx="1524000" cy="1143000"/>
+          </a:xfrm>
+          <a:prstGeom prst="rect">
+            <a:avLst/>
+          </a:prstGeom>
+          <a:solidFill>
+            <a:srgbClr val="5C6B73"/>
+          </a:solidFill>
+          <a:ln>
+            <a:noFill/>
+          </a:ln>
+          <a:effectLst/>
+        </p:spPr>
+        <p:style>
+          <a:lnRef idx="1">
+            <a:schemeClr val="accent1"/>
+          </a:lnRef>
+          <a:fillRef idx="3">
+            <a:schemeClr val="accent1"/>
+          </a:fillRef>
+          <a:effectRef idx="2">
+            <a:schemeClr val="accent1"/>
+          </a:effectRef>
+          <a:fontRef idx="minor">
+            <a:schemeClr val="lt1"/>
+          </a:fontRef>
+        </p:style>
+        <p:txBody>
+          <a:bodyPr rtlCol="0" anchor="ctr"/>
+          <a:lstStyle/>
+          <a:p>
+            <a:pPr algn="ctr"/>
+          </a:p>
+        </p:txBody>
+      </p:sp>
+      <p:sp>
+        <p:nvSpPr>
+          <p:cNvPr id="32" name="dsl:layer4-label"/>
+          <p:cNvSpPr txBox="1"/>
+          <p:nvPr/>
+        </p:nvSpPr>
+        <p:spPr>
+          <a:xfrm>
+            <a:off x="571500" y="4762500"/>
+            <a:ext cx="1524000" cy="1143000"/>
+          </a:xfrm>
+          <a:prstGeom prst="rect">
+            <a:avLst/>
+          </a:prstGeom>
+          <a:noFill/>
+        </p:spPr>
+        <p:txBody>
+          <a:bodyPr wrap="none" anchor="ctr">
+            <a:noAutofit/>
+          </a:bodyPr>
+          <a:lstStyle/>
+          <a:p>
+            <a:pPr algn="ctr"/>
+            <a:r>
+              <a:rPr b="1" sz="1200" noProof="1">
+                <a:solidFill>
+                  <a:srgbClr val="FFFFFF"/>
+                </a:solidFill>
+                <a:latin typeface="Liter"/>
+                <a:ea typeface="Liter"/>
+              </a:rPr>
+              <a:t>INFRA</a:t>
+            </a:r>
+          </a:p>
+        </p:txBody>
+      </p:sp>
+      <p:sp>
+        <p:nvSpPr>
+          <p:cNvPr id="33" name="dsl:layer4-content"/>
+          <p:cNvSpPr txBox="1"/>
+          <p:nvPr/>
+        </p:nvSpPr>
+        <p:spPr>
+          <a:xfrm>
+            <a:off x="2286000" y="4857750"/>
+            <a:ext cx="9144000" cy="952500"/>
+          </a:xfrm>
+          <a:prstGeom prst="rect">
+            <a:avLst/>
+          </a:prstGeom>
+          <a:noFill/>
+        </p:spPr>
+        <p:txBody>
+          <a:bodyPr wrap="none" anchor="ctr">
+            <a:noAutofit/>
+          </a:bodyPr>
+          <a:lstStyle/>
+          <a:p>
+            <a:pPr algn="l"/>
+            <a:r>
+              <a:rPr b="1" sz="1350" noProof="1">
+                <a:solidFill>
+                  <a:srgbClr val="2B2D2F"/>
+                </a:solidFill>
+                <a:latin typeface="QuattrocentoSans"/>
+                <a:ea typeface="QuattrocentoSans"/>
+              </a:rPr>
+              <a:t>ES 7.17</a:t>
+            </a:r>
+            <a:r>
+              <a:rPr sz="1350" noProof="1">
+                <a:solidFill>
+                  <a:srgbClr val="2B2D2F"/>
+                </a:solidFill>
+                <a:latin typeface="QuattrocentoSans"/>
+                <a:ea typeface="QuattrocentoSans"/>
+              </a:rPr>
+              <a:t> (telemetry)  •  </a:t>
+            </a:r>
+            <a:r>
+              <a:rPr b="1" sz="1350" noProof="1">
+                <a:solidFill>
+                  <a:srgbClr val="2B2D2F"/>
+                </a:solidFill>
+                <a:latin typeface="QuattrocentoSans"/>
+                <a:ea typeface="QuattrocentoSans"/>
+              </a:rPr>
+              <a:t>Redis</a:t>
+            </a:r>
+            <a:r>
+              <a:rPr sz="1350" noProof="1">
+                <a:solidFill>
+                  <a:srgbClr val="2B2D2F"/>
+                </a:solidFill>
+                <a:latin typeface="QuattrocentoSans"/>
+                <a:ea typeface="QuattrocentoSans"/>
+              </a:rPr>
+              <a:t> (cache/cursors)  •  </a:t>
+            </a:r>
+            <a:r>
+              <a:rPr b="1" sz="1350" noProof="1">
+                <a:solidFill>
+                  <a:srgbClr val="2B2D2F"/>
+                </a:solidFill>
+                <a:latin typeface="QuattrocentoSans"/>
+                <a:ea typeface="QuattrocentoSans"/>
+              </a:rPr>
+              <a:t>SQLite</a:t>
+            </a:r>
+            <a:r>
+              <a:rPr sz="1350" noProof="1">
+                <a:solidFill>
+                  <a:srgbClr val="2B2D2F"/>
+                </a:solidFill>
+                <a:latin typeface="QuattrocentoSans"/>
+                <a:ea typeface="QuattrocentoSans"/>
+              </a:rPr>
+              <a:t> (state)  •  </a:t>
+            </a:r>
+            <a:r>
+              <a:rPr b="1" sz="1350" noProof="1">
+                <a:solidFill>
+                  <a:srgbClr val="2B2D2F"/>
+                </a:solidFill>
+                <a:latin typeface="QuattrocentoSans"/>
+                <a:ea typeface="QuattrocentoSans"/>
+              </a:rPr>
+              <a:t>Ansible</a:t>
+            </a:r>
+            <a:r>
+              <a:rPr sz="1350" noProof="1">
+                <a:solidFill>
+                  <a:srgbClr val="2B2D2F"/>
+                </a:solidFill>
+                <a:latin typeface="QuattrocentoSans"/>
+                <a:ea typeface="QuattrocentoSans"/>
+              </a:rPr>
+              <a:t> (execution)  •  </a:t>
+            </a:r>
+            <a:r>
+              <a:rPr b="1" sz="1350" noProof="1">
+                <a:solidFill>
+                  <a:srgbClr val="2B2D2F"/>
+                </a:solidFill>
+                <a:latin typeface="QuattrocentoSans"/>
+                <a:ea typeface="QuattrocentoSans"/>
+              </a:rPr>
+              <a:t>LLM</a:t>
+            </a:r>
+          </a:p>
+        </p:txBody>
+      </p:sp>
+      <p:sp>
+        <p:nvSpPr>
+          <p:cNvPr id="34" name="dsl:stack-label"/>
+          <p:cNvSpPr txBox="1"/>
+          <p:nvPr/>
+        </p:nvSpPr>
+        <p:spPr>
+          <a:xfrm>
+            <a:off x="571500" y="6057900"/>
+            <a:ext cx="11049000" cy="285750"/>
+          </a:xfrm>
+          <a:prstGeom prst="rect">
+            <a:avLst/>
+          </a:prstGeom>
+          <a:noFill/>
+        </p:spPr>
+        <p:txBody>
+          <a:bodyPr wrap="none" anchor="ctr">
+            <a:noAutofit/>
+          </a:bodyPr>
+          <a:lstStyle/>
+          <a:p>
+            <a:pPr algn="ctr"/>
+            <a:r>
+              <a:rPr sz="975" noProof="1">
+                <a:solidFill>
+                  <a:srgbClr val="5C6B73"/>
+                </a:solidFill>
+                <a:latin typeface="QuattrocentoSans"/>
+                <a:ea typeface="QuattrocentoSans"/>
+              </a:rPr>
+              <a:t>Technology Stack: FastAPI  •  Next.js  •  Elasticsearch 7.17  •  Redis  •  SQLite + SQLAlchemy  •  MITRE ATT&amp;CK  •  Sigma</a:t>
+            </a:r>
+          </a:p>
+        </p:txBody>
+      </p:sp>
+      <p:sp>
+        <p:nvSpPr>
+          <p:cNvPr id="35" name="dsl:footer-author"/>
+          <p:cNvSpPr txBox="1"/>
+          <p:nvPr/>
+        </p:nvSpPr>
+        <p:spPr>
+          <a:xfrm>
+            <a:off x="571500" y="6629400"/>
+            <a:ext cx="1905000" cy="152400"/>
+          </a:xfrm>
+          <a:prstGeom prst="rect">
+            <a:avLst/>
+          </a:prstGeom>
+          <a:noFill/>
+        </p:spPr>
+        <p:txBody>
+          <a:bodyPr wrap="none" anchor="ctr">
+            <a:noAutofit/>
+          </a:bodyPr>
+          <a:lstStyle/>
+          <a:p>
+            <a:pPr algn="l"/>
+            <a:r>
+              <a:rPr sz="825" noProof="1" spc="75">
+                <a:solidFill>
+                  <a:srgbClr val="5C6B73"/>
+                </a:solidFill>
+                <a:latin typeface="Liter"/>
+                <a:ea typeface="Liter"/>
+              </a:rPr>
+              <a:t>GHAZI MABROUKI</a:t>
+            </a:r>
+          </a:p>
+        </p:txBody>
+      </p:sp>
+      <p:sp>
+        <p:nvSpPr>
+          <p:cNvPr id="36" name="dsl:footer-page"/>
+          <p:cNvSpPr txBox="1"/>
+          <p:nvPr/>
+        </p:nvSpPr>
+        <p:spPr>
+          <a:xfrm>
+            <a:off x="11334750" y="6629400"/>
+            <a:ext cx="381000" cy="152400"/>
+          </a:xfrm>
+          <a:prstGeom prst="rect">
+            <a:avLst/>
+          </a:prstGeom>
+          <a:noFill/>
+        </p:spPr>
+        <p:txBody>
+          <a:bodyPr wrap="none" anchor="ctr">
+            <a:noAutofit/>
+          </a:bodyPr>
+          <a:lstStyle/>
+          <a:p>
+            <a:pPr algn="r"/>
+            <a:r>
+              <a:rPr sz="900" noProof="1">
+                <a:solidFill>
+                  <a:srgbClr val="5C6B73"/>
+                </a:solidFill>
+                <a:latin typeface="Liter"/>
+                <a:ea typeface="Liter"/>
+              </a:rPr>
+              <a:t>25</a:t>
+            </a:r>
+          </a:p>
+        </p:txBody>
+      </p:sp>
+    </p:spTree>
+  </p:cSld>
+  <p:clrMapOvr>
+    <a:masterClrMapping/>
+  </p:clrMapOvr>
+</p:sld>
+</file>
+
+<file path=ppt/slides/slide26.xml><?xml version="1.0" encoding="utf-8"?>
+<p:sld xmlns:a="http://schemas.openxmlformats.org/drawingml/2006/main" xmlns:p="http://schemas.openxmlformats.org/presentationml/2006/main" xmlns:r="http://schemas.openxmlformats.org/officeDocument/2006/relationships">
+  <p:cSld>
+    <p:bg>
+      <p:bgPr>
+        <a:solidFill>
+          <a:srgbClr val="FAFAF8"/>
+        </a:solidFill>
+        <a:effectLst/>
+      </p:bgPr>
+    </p:bg>
+    <p:spTree>
+      <p:nvGrpSpPr>
+        <p:cNvPr id="1" name=""/>
+        <p:cNvGrpSpPr/>
+        <p:nvPr/>
+      </p:nvGrpSpPr>
+      <p:grpSpPr/>
+      <p:sp>
+        <p:nvSpPr>
           <p:cNvPr id="2" name="dsl:nav-bg"/>
           <p:cNvSpPr/>
           <p:nvPr/>
@@ -28813,7 +29405,7 @@
                 <a:latin typeface="Liter"/>
                 <a:ea typeface="Liter"/>
               </a:rPr>
-              <a:t>24</a:t>
+              <a:t>26</a:t>
             </a:r>
           </a:p>
         </p:txBody>
@@ -28826,7 +29418,7 @@
 </p:sld>
 </file>
 
-<file path=ppt/slides/slide25.xml><?xml version="1.0" encoding="utf-8"?>
+<file path=ppt/slides/slide27.xml><?xml version="1.0" encoding="utf-8"?>
 <p:sld xmlns:a="http://schemas.openxmlformats.org/drawingml/2006/main" xmlns:p="http://schemas.openxmlformats.org/presentationml/2006/main" xmlns:r="http://schemas.openxmlformats.org/officeDocument/2006/relationships">
   <p:cSld>
     <p:bg>
@@ -30695,7 +31287,7 @@
                 <a:latin typeface="Liter"/>
                 <a:ea typeface="Liter"/>
               </a:rPr>
-              <a:t>25</a:t>
+              <a:t>27</a:t>
             </a:r>
           </a:p>
         </p:txBody>
@@ -30708,7 +31300,7 @@
 </p:sld>
 </file>
 
-<file path=ppt/slides/slide26.xml><?xml version="1.0" encoding="utf-8"?>
+<file path=ppt/slides/slide28.xml><?xml version="1.0" encoding="utf-8"?>
 <p:sld xmlns:a="http://schemas.openxmlformats.org/drawingml/2006/main" xmlns:p="http://schemas.openxmlformats.org/presentationml/2006/main" xmlns:r="http://schemas.openxmlformats.org/officeDocument/2006/relationships">
   <p:cSld>
     <p:bg>
@@ -30886,7 +31478,7 @@
 </p:sld>
 </file>
 
-<file path=ppt/slides/slide27.xml><?xml version="1.0" encoding="utf-8"?>
+<file path=ppt/slides/slide29.xml><?xml version="1.0" encoding="utf-8"?>
 <p:sld xmlns:a="http://schemas.openxmlformats.org/drawingml/2006/main" xmlns:p="http://schemas.openxmlformats.org/presentationml/2006/main" xmlns:r="http://schemas.openxmlformats.org/officeDocument/2006/relationships">
   <p:cSld>
     <p:bg>
@@ -33487,7 +34079,7 @@
                 <a:latin typeface="Liter"/>
                 <a:ea typeface="Liter"/>
               </a:rPr>
-              <a:t>27</a:t>
+              <a:t>29</a:t>
             </a:r>
           </a:p>
         </p:txBody>
@@ -33500,7 +34092,319 @@
 </p:sld>
 </file>
 
-<file path=ppt/slides/slide28.xml><?xml version="1.0" encoding="utf-8"?>
+<file path=ppt/slides/slide3.xml><?xml version="1.0" encoding="utf-8"?>
+<p:sld xmlns:a="http://schemas.openxmlformats.org/drawingml/2006/main" xmlns:p="http://schemas.openxmlformats.org/presentationml/2006/main" xmlns:r="http://schemas.openxmlformats.org/officeDocument/2006/relationships">
+  <p:cSld>
+    <p:bg>
+      <p:bgPr>
+        <a:solidFill>
+          <a:srgbClr val="FAFAF8"/>
+        </a:solidFill>
+        <a:effectLst/>
+      </p:bgPr>
+    </p:bg>
+    <p:spTree>
+      <p:nvGrpSpPr>
+        <p:cNvPr id="1" name=""/>
+        <p:cNvGrpSpPr/>
+        <p:nvPr/>
+      </p:nvGrpSpPr>
+      <p:grpSpPr/>
+      <p:sp>
+        <p:nvSpPr>
+          <p:cNvPr id="2" name="dsl:ch-number-bg"/>
+          <p:cNvSpPr txBox="1"/>
+          <p:nvPr/>
+        </p:nvSpPr>
+        <p:spPr>
+          <a:xfrm>
+            <a:off x="571500" y="762000"/>
+            <a:ext cx="4762500" cy="2095500"/>
+          </a:xfrm>
+          <a:prstGeom prst="rect">
+            <a:avLst/>
+          </a:prstGeom>
+          <a:noFill/>
+        </p:spPr>
+        <p:txBody>
+          <a:bodyPr wrap="none" anchor="t">
+            <a:noAutofit/>
+          </a:bodyPr>
+          <a:lstStyle/>
+          <a:p>
+            <a:pPr algn="l"/>
+            <a:r>
+              <a:rPr b="1" sz="15000" noProof="1">
+                <a:solidFill>
+                  <a:srgbClr val="2D6A6A">
+                    <a:alpha val="8235"/>
+                  </a:srgbClr>
+                </a:solidFill>
+                <a:latin typeface="Liter"/>
+                <a:ea typeface="Liter"/>
+              </a:rPr>
+              <a:t>01</a:t>
+            </a:r>
+          </a:p>
+        </p:txBody>
+      </p:sp>
+      <p:sp>
+        <p:nvSpPr>
+          <p:cNvPr id="3" name="dsl:accent-bar"/>
+          <p:cNvSpPr/>
+          <p:nvPr/>
+        </p:nvSpPr>
+        <p:spPr>
+          <a:xfrm>
+            <a:off x="762000" y="2952750"/>
+            <a:ext cx="762000" cy="38100"/>
+          </a:xfrm>
+          <a:prstGeom prst="rect">
+            <a:avLst/>
+          </a:prstGeom>
+          <a:solidFill>
+            <a:srgbClr val="D4A373"/>
+          </a:solidFill>
+          <a:ln>
+            <a:noFill/>
+          </a:ln>
+          <a:effectLst/>
+        </p:spPr>
+        <p:style>
+          <a:lnRef idx="1">
+            <a:schemeClr val="accent1"/>
+          </a:lnRef>
+          <a:fillRef idx="3">
+            <a:schemeClr val="accent1"/>
+          </a:fillRef>
+          <a:effectRef idx="2">
+            <a:schemeClr val="accent1"/>
+          </a:effectRef>
+          <a:fontRef idx="minor">
+            <a:schemeClr val="lt1"/>
+          </a:fontRef>
+        </p:style>
+        <p:txBody>
+          <a:bodyPr rtlCol="0" anchor="ctr"/>
+          <a:lstStyle/>
+          <a:p>
+            <a:pPr algn="ctr"/>
+          </a:p>
+        </p:txBody>
+      </p:sp>
+      <p:sp>
+        <p:nvSpPr>
+          <p:cNvPr id="4" name="dsl:ch-label"/>
+          <p:cNvSpPr txBox="1"/>
+          <p:nvPr/>
+        </p:nvSpPr>
+        <p:spPr>
+          <a:xfrm>
+            <a:off x="762000" y="3143250"/>
+            <a:ext cx="3810000" cy="285750"/>
+          </a:xfrm>
+          <a:prstGeom prst="rect">
+            <a:avLst/>
+          </a:prstGeom>
+          <a:noFill/>
+        </p:spPr>
+        <p:txBody>
+          <a:bodyPr wrap="none" anchor="t">
+            <a:noAutofit/>
+          </a:bodyPr>
+          <a:lstStyle/>
+          <a:p>
+            <a:pPr algn="l"/>
+            <a:r>
+              <a:rPr b="1" sz="1200" noProof="1" spc="225">
+                <a:solidFill>
+                  <a:srgbClr val="D4A373"/>
+                </a:solidFill>
+                <a:latin typeface="Liter"/>
+                <a:ea typeface="Liter"/>
+              </a:rPr>
+              <a:t>CHAPTER 01</a:t>
+            </a:r>
+          </a:p>
+        </p:txBody>
+      </p:sp>
+      <p:sp>
+        <p:nvSpPr>
+          <p:cNvPr id="5" name="dsl:ch-title|s=$title"/>
+          <p:cNvSpPr txBox="1"/>
+          <p:nvPr/>
+        </p:nvSpPr>
+        <p:spPr>
+          <a:xfrm>
+            <a:off x="762000" y="3524250"/>
+            <a:ext cx="7620000" cy="571500"/>
+          </a:xfrm>
+          <a:prstGeom prst="rect">
+            <a:avLst/>
+          </a:prstGeom>
+          <a:noFill/>
+        </p:spPr>
+        <p:txBody>
+          <a:bodyPr wrap="none" anchor="t">
+            <a:noAutofit/>
+          </a:bodyPr>
+          <a:lstStyle/>
+          <a:p>
+            <a:pPr algn="l">
+              <a:lnSpc>
+                <a:spcPct val="120000"/>
+              </a:lnSpc>
+            </a:pPr>
+            <a:r>
+              <a:rPr b="1" sz="3300" noProof="1">
+                <a:solidFill>
+                  <a:srgbClr val="2D6A6A"/>
+                </a:solidFill>
+                <a:latin typeface="Liter"/>
+                <a:ea typeface="Liter"/>
+              </a:rPr>
+              <a:t>The SOC Challenge</a:t>
+            </a:r>
+          </a:p>
+        </p:txBody>
+      </p:sp>
+      <p:sp>
+        <p:nvSpPr>
+          <p:cNvPr id="6" name="dsl:ch-subtitle|s=$subtitle"/>
+          <p:cNvSpPr txBox="1"/>
+          <p:nvPr/>
+        </p:nvSpPr>
+        <p:spPr>
+          <a:xfrm>
+            <a:off x="762000" y="4191000"/>
+            <a:ext cx="7620000" cy="381000"/>
+          </a:xfrm>
+          <a:prstGeom prst="rect">
+            <a:avLst/>
+          </a:prstGeom>
+          <a:noFill/>
+        </p:spPr>
+        <p:txBody>
+          <a:bodyPr wrap="square" anchor="t">
+            <a:noAutofit/>
+          </a:bodyPr>
+          <a:lstStyle/>
+          <a:p>
+            <a:pPr algn="l">
+              <a:lnSpc>
+                <a:spcPct val="140000"/>
+              </a:lnSpc>
+            </a:pPr>
+            <a:r>
+              <a:rPr sz="1650" noProof="1">
+                <a:solidFill>
+                  <a:srgbClr val="5C6B73"/>
+                </a:solidFill>
+                <a:latin typeface="QuattrocentoSans"/>
+                <a:ea typeface="QuattrocentoSans"/>
+              </a:rPr>
+              <a:t>Why modern SOC environments struggle to keep pace with threats</a:t>
+            </a:r>
+          </a:p>
+        </p:txBody>
+      </p:sp>
+      <p:sp>
+        <p:nvSpPr>
+          <p:cNvPr id="7" name="dsl:deco-line"/>
+          <p:cNvSpPr/>
+          <p:nvPr/>
+        </p:nvSpPr>
+        <p:spPr>
+          <a:xfrm>
+            <a:off x="762000" y="4953000"/>
+            <a:ext cx="2857500" cy="19050"/>
+          </a:xfrm>
+          <a:prstGeom prst="rect">
+            <a:avLst/>
+          </a:prstGeom>
+          <a:solidFill>
+            <a:srgbClr val="E5E5E0"/>
+          </a:solidFill>
+          <a:ln>
+            <a:noFill/>
+          </a:ln>
+          <a:effectLst/>
+        </p:spPr>
+        <p:style>
+          <a:lnRef idx="1">
+            <a:schemeClr val="accent1"/>
+          </a:lnRef>
+          <a:fillRef idx="3">
+            <a:schemeClr val="accent1"/>
+          </a:fillRef>
+          <a:effectRef idx="2">
+            <a:schemeClr val="accent1"/>
+          </a:effectRef>
+          <a:fontRef idx="minor">
+            <a:schemeClr val="lt1"/>
+          </a:fontRef>
+        </p:style>
+        <p:txBody>
+          <a:bodyPr rtlCol="0" anchor="ctr"/>
+          <a:lstStyle/>
+          <a:p>
+            <a:pPr algn="ctr"/>
+          </a:p>
+        </p:txBody>
+      </p:sp>
+      <p:sp>
+        <p:nvSpPr>
+          <p:cNvPr id="8" name="dsl:bottom-bar"/>
+          <p:cNvSpPr/>
+          <p:nvPr/>
+        </p:nvSpPr>
+        <p:spPr>
+          <a:xfrm>
+            <a:off x="0" y="6667500"/>
+            <a:ext cx="12192000" cy="190500"/>
+          </a:xfrm>
+          <a:prstGeom prst="rect">
+            <a:avLst/>
+          </a:prstGeom>
+          <a:solidFill>
+            <a:srgbClr val="2D6A6A"/>
+          </a:solidFill>
+          <a:ln>
+            <a:noFill/>
+          </a:ln>
+          <a:effectLst/>
+        </p:spPr>
+        <p:style>
+          <a:lnRef idx="1">
+            <a:schemeClr val="accent1"/>
+          </a:lnRef>
+          <a:fillRef idx="3">
+            <a:schemeClr val="accent1"/>
+          </a:fillRef>
+          <a:effectRef idx="2">
+            <a:schemeClr val="accent1"/>
+          </a:effectRef>
+          <a:fontRef idx="minor">
+            <a:schemeClr val="lt1"/>
+          </a:fontRef>
+        </p:style>
+        <p:txBody>
+          <a:bodyPr rtlCol="0" anchor="ctr"/>
+          <a:lstStyle/>
+          <a:p>
+            <a:pPr algn="ctr"/>
+          </a:p>
+        </p:txBody>
+      </p:sp>
+    </p:spTree>
+  </p:cSld>
+  <p:clrMapOvr>
+    <a:masterClrMapping/>
+  </p:clrMapOvr>
+</p:sld>
+</file>
+
+<file path=ppt/slides/slide30.xml><?xml version="1.0" encoding="utf-8"?>
 <p:sld xmlns:a="http://schemas.openxmlformats.org/drawingml/2006/main" xmlns:p="http://schemas.openxmlformats.org/presentationml/2006/main" xmlns:r="http://schemas.openxmlformats.org/officeDocument/2006/relationships">
   <p:cSld>
     <p:bg>
@@ -35812,3030 +36716,6 @@
                 <a:latin typeface="Liter"/>
                 <a:ea typeface="Liter"/>
               </a:rPr>
-              <a:t>28</a:t>
-            </a:r>
-          </a:p>
-        </p:txBody>
-      </p:sp>
-    </p:spTree>
-  </p:cSld>
-  <p:clrMapOvr>
-    <a:masterClrMapping/>
-  </p:clrMapOvr>
-</p:sld>
-</file>
-
-<file path=ppt/slides/slide29.xml><?xml version="1.0" encoding="utf-8"?>
-<p:sld xmlns:a="http://schemas.openxmlformats.org/drawingml/2006/main" xmlns:p="http://schemas.openxmlformats.org/presentationml/2006/main" xmlns:r="http://schemas.openxmlformats.org/officeDocument/2006/relationships">
-  <p:cSld>
-    <p:bg>
-      <p:bgPr>
-        <a:solidFill>
-          <a:srgbClr val="FAFAF8"/>
-        </a:solidFill>
-        <a:effectLst/>
-      </p:bgPr>
-    </p:bg>
-    <p:spTree>
-      <p:nvGrpSpPr>
-        <p:cNvPr id="1" name=""/>
-        <p:cNvGrpSpPr/>
-        <p:nvPr/>
-      </p:nvGrpSpPr>
-      <p:grpSpPr/>
-      <p:sp>
-        <p:nvSpPr>
-          <p:cNvPr id="2" name="dsl:ch8-number-decorative"/>
-          <p:cNvSpPr txBox="1"/>
-          <p:nvPr/>
-        </p:nvSpPr>
-        <p:spPr>
-          <a:xfrm>
-            <a:off x="381000" y="571500"/>
-            <a:ext cx="4381500" cy="2476500"/>
-          </a:xfrm>
-          <a:prstGeom prst="rect">
-            <a:avLst/>
-          </a:prstGeom>
-          <a:noFill/>
-        </p:spPr>
-        <p:txBody>
-          <a:bodyPr wrap="none" anchor="t">
-            <a:noAutofit/>
-          </a:bodyPr>
-          <a:lstStyle/>
-          <a:p>
-            <a:pPr algn="l"/>
-            <a:r>
-              <a:rPr sz="15000" noProof="1">
-                <a:solidFill>
-                  <a:srgbClr val="2D6A6A"/>
-                </a:solidFill>
-                <a:latin typeface="Liter"/>
-                <a:ea typeface="Liter"/>
-              </a:rPr>
-              <a:t>08</a:t>
-            </a:r>
-          </a:p>
-        </p:txBody>
-      </p:sp>
-      <p:sp>
-        <p:nvSpPr>
-          <p:cNvPr id="3" name="dsl:ch8-accent-bar"/>
-          <p:cNvSpPr/>
-          <p:nvPr/>
-        </p:nvSpPr>
-        <p:spPr>
-          <a:xfrm>
-            <a:off x="571500" y="3238500"/>
-            <a:ext cx="762000" cy="38100"/>
-          </a:xfrm>
-          <a:prstGeom prst="rect">
-            <a:avLst/>
-          </a:prstGeom>
-          <a:solidFill>
-            <a:srgbClr val="D4A373"/>
-          </a:solidFill>
-          <a:ln>
-            <a:noFill/>
-          </a:ln>
-          <a:effectLst/>
-        </p:spPr>
-        <p:style>
-          <a:lnRef idx="1">
-            <a:schemeClr val="accent1"/>
-          </a:lnRef>
-          <a:fillRef idx="3">
-            <a:schemeClr val="accent1"/>
-          </a:fillRef>
-          <a:effectRef idx="2">
-            <a:schemeClr val="accent1"/>
-          </a:effectRef>
-          <a:fontRef idx="minor">
-            <a:schemeClr val="lt1"/>
-          </a:fontRef>
-        </p:style>
-        <p:txBody>
-          <a:bodyPr rtlCol="0" anchor="ctr"/>
-          <a:lstStyle/>
-          <a:p>
-            <a:pPr algn="ctr"/>
-          </a:p>
-        </p:txBody>
-      </p:sp>
-      <p:sp>
-        <p:nvSpPr>
-          <p:cNvPr id="4" name="dsl:ch8-title"/>
-          <p:cNvSpPr txBox="1"/>
-          <p:nvPr/>
-        </p:nvSpPr>
-        <p:spPr>
-          <a:xfrm>
-            <a:off x="571500" y="3429000"/>
-            <a:ext cx="8572500" cy="523875"/>
-          </a:xfrm>
-          <a:prstGeom prst="rect">
-            <a:avLst/>
-          </a:prstGeom>
-          <a:noFill/>
-        </p:spPr>
-        <p:txBody>
-          <a:bodyPr wrap="none" anchor="ctr">
-            <a:noAutofit/>
-          </a:bodyPr>
-          <a:lstStyle/>
-          <a:p>
-            <a:pPr algn="l"/>
-            <a:r>
-              <a:rPr sz="2850" noProof="1">
-                <a:solidFill>
-                  <a:srgbClr val="2D6A6A"/>
-                </a:solidFill>
-                <a:latin typeface="Liter"/>
-                <a:ea typeface="Liter"/>
-              </a:rPr>
-              <a:t>08 — Value &amp; Roadmap</a:t>
-            </a:r>
-          </a:p>
-        </p:txBody>
-      </p:sp>
-      <p:sp>
-        <p:nvSpPr>
-          <p:cNvPr id="5" name="dsl:ch8-subtitle"/>
-          <p:cNvSpPr txBox="1"/>
-          <p:nvPr/>
-        </p:nvSpPr>
-        <p:spPr>
-          <a:xfrm>
-            <a:off x="571500" y="4095750"/>
-            <a:ext cx="8572500" cy="333375"/>
-          </a:xfrm>
-          <a:prstGeom prst="rect">
-            <a:avLst/>
-          </a:prstGeom>
-          <a:noFill/>
-        </p:spPr>
-        <p:txBody>
-          <a:bodyPr wrap="none" anchor="ctr">
-            <a:noAutofit/>
-          </a:bodyPr>
-          <a:lstStyle/>
-          <a:p>
-            <a:pPr algn="l"/>
-            <a:r>
-              <a:rPr sz="1500" noProof="1">
-                <a:solidFill>
-                  <a:srgbClr val="5C6B73"/>
-                </a:solidFill>
-                <a:latin typeface="QuattrocentoSans"/>
-                <a:ea typeface="QuattrocentoSans"/>
-              </a:rPr>
-              <a:t>From prototype to production-ready SOC platform</a:t>
-            </a:r>
-          </a:p>
-        </p:txBody>
-      </p:sp>
-    </p:spTree>
-  </p:cSld>
-  <p:clrMapOvr>
-    <a:masterClrMapping/>
-  </p:clrMapOvr>
-</p:sld>
-</file>
-
-<file path=ppt/slides/slide3.xml><?xml version="1.0" encoding="utf-8"?>
-<p:sld xmlns:a="http://schemas.openxmlformats.org/drawingml/2006/main" xmlns:p="http://schemas.openxmlformats.org/presentationml/2006/main" xmlns:r="http://schemas.openxmlformats.org/officeDocument/2006/relationships">
-  <p:cSld>
-    <p:bg>
-      <p:bgPr>
-        <a:solidFill>
-          <a:srgbClr val="FAFAF8"/>
-        </a:solidFill>
-        <a:effectLst/>
-      </p:bgPr>
-    </p:bg>
-    <p:spTree>
-      <p:nvGrpSpPr>
-        <p:cNvPr id="1" name=""/>
-        <p:cNvGrpSpPr/>
-        <p:nvPr/>
-      </p:nvGrpSpPr>
-      <p:grpSpPr/>
-      <p:sp>
-        <p:nvSpPr>
-          <p:cNvPr id="2" name="dsl:ch-number-bg"/>
-          <p:cNvSpPr txBox="1"/>
-          <p:nvPr/>
-        </p:nvSpPr>
-        <p:spPr>
-          <a:xfrm>
-            <a:off x="571500" y="762000"/>
-            <a:ext cx="4762500" cy="2095500"/>
-          </a:xfrm>
-          <a:prstGeom prst="rect">
-            <a:avLst/>
-          </a:prstGeom>
-          <a:noFill/>
-        </p:spPr>
-        <p:txBody>
-          <a:bodyPr wrap="none" anchor="t">
-            <a:noAutofit/>
-          </a:bodyPr>
-          <a:lstStyle/>
-          <a:p>
-            <a:pPr algn="l"/>
-            <a:r>
-              <a:rPr b="1" sz="15000" noProof="1">
-                <a:solidFill>
-                  <a:srgbClr val="2D6A6A">
-                    <a:alpha val="8235"/>
-                  </a:srgbClr>
-                </a:solidFill>
-                <a:latin typeface="Liter"/>
-                <a:ea typeface="Liter"/>
-              </a:rPr>
-              <a:t>01</a:t>
-            </a:r>
-          </a:p>
-        </p:txBody>
-      </p:sp>
-      <p:sp>
-        <p:nvSpPr>
-          <p:cNvPr id="3" name="dsl:accent-bar"/>
-          <p:cNvSpPr/>
-          <p:nvPr/>
-        </p:nvSpPr>
-        <p:spPr>
-          <a:xfrm>
-            <a:off x="762000" y="2952750"/>
-            <a:ext cx="762000" cy="38100"/>
-          </a:xfrm>
-          <a:prstGeom prst="rect">
-            <a:avLst/>
-          </a:prstGeom>
-          <a:solidFill>
-            <a:srgbClr val="D4A373"/>
-          </a:solidFill>
-          <a:ln>
-            <a:noFill/>
-          </a:ln>
-          <a:effectLst/>
-        </p:spPr>
-        <p:style>
-          <a:lnRef idx="1">
-            <a:schemeClr val="accent1"/>
-          </a:lnRef>
-          <a:fillRef idx="3">
-            <a:schemeClr val="accent1"/>
-          </a:fillRef>
-          <a:effectRef idx="2">
-            <a:schemeClr val="accent1"/>
-          </a:effectRef>
-          <a:fontRef idx="minor">
-            <a:schemeClr val="lt1"/>
-          </a:fontRef>
-        </p:style>
-        <p:txBody>
-          <a:bodyPr rtlCol="0" anchor="ctr"/>
-          <a:lstStyle/>
-          <a:p>
-            <a:pPr algn="ctr"/>
-          </a:p>
-        </p:txBody>
-      </p:sp>
-      <p:sp>
-        <p:nvSpPr>
-          <p:cNvPr id="4" name="dsl:ch-label"/>
-          <p:cNvSpPr txBox="1"/>
-          <p:nvPr/>
-        </p:nvSpPr>
-        <p:spPr>
-          <a:xfrm>
-            <a:off x="762000" y="3143250"/>
-            <a:ext cx="3810000" cy="285750"/>
-          </a:xfrm>
-          <a:prstGeom prst="rect">
-            <a:avLst/>
-          </a:prstGeom>
-          <a:noFill/>
-        </p:spPr>
-        <p:txBody>
-          <a:bodyPr wrap="none" anchor="t">
-            <a:noAutofit/>
-          </a:bodyPr>
-          <a:lstStyle/>
-          <a:p>
-            <a:pPr algn="l"/>
-            <a:r>
-              <a:rPr b="1" sz="1200" noProof="1" spc="225">
-                <a:solidFill>
-                  <a:srgbClr val="D4A373"/>
-                </a:solidFill>
-                <a:latin typeface="Liter"/>
-                <a:ea typeface="Liter"/>
-              </a:rPr>
-              <a:t>CHAPTER 01</a:t>
-            </a:r>
-          </a:p>
-        </p:txBody>
-      </p:sp>
-      <p:sp>
-        <p:nvSpPr>
-          <p:cNvPr id="5" name="dsl:ch-title|s=$title"/>
-          <p:cNvSpPr txBox="1"/>
-          <p:nvPr/>
-        </p:nvSpPr>
-        <p:spPr>
-          <a:xfrm>
-            <a:off x="762000" y="3524250"/>
-            <a:ext cx="7620000" cy="571500"/>
-          </a:xfrm>
-          <a:prstGeom prst="rect">
-            <a:avLst/>
-          </a:prstGeom>
-          <a:noFill/>
-        </p:spPr>
-        <p:txBody>
-          <a:bodyPr wrap="none" anchor="t">
-            <a:noAutofit/>
-          </a:bodyPr>
-          <a:lstStyle/>
-          <a:p>
-            <a:pPr algn="l">
-              <a:lnSpc>
-                <a:spcPct val="120000"/>
-              </a:lnSpc>
-            </a:pPr>
-            <a:r>
-              <a:rPr b="1" sz="3300" noProof="1">
-                <a:solidFill>
-                  <a:srgbClr val="2D6A6A"/>
-                </a:solidFill>
-                <a:latin typeface="Liter"/>
-                <a:ea typeface="Liter"/>
-              </a:rPr>
-              <a:t>The SOC Challenge</a:t>
-            </a:r>
-          </a:p>
-        </p:txBody>
-      </p:sp>
-      <p:sp>
-        <p:nvSpPr>
-          <p:cNvPr id="6" name="dsl:ch-subtitle|s=$subtitle"/>
-          <p:cNvSpPr txBox="1"/>
-          <p:nvPr/>
-        </p:nvSpPr>
-        <p:spPr>
-          <a:xfrm>
-            <a:off x="762000" y="4191000"/>
-            <a:ext cx="7620000" cy="381000"/>
-          </a:xfrm>
-          <a:prstGeom prst="rect">
-            <a:avLst/>
-          </a:prstGeom>
-          <a:noFill/>
-        </p:spPr>
-        <p:txBody>
-          <a:bodyPr wrap="square" anchor="t">
-            <a:noAutofit/>
-          </a:bodyPr>
-          <a:lstStyle/>
-          <a:p>
-            <a:pPr algn="l">
-              <a:lnSpc>
-                <a:spcPct val="140000"/>
-              </a:lnSpc>
-            </a:pPr>
-            <a:r>
-              <a:rPr sz="1650" noProof="1">
-                <a:solidFill>
-                  <a:srgbClr val="5C6B73"/>
-                </a:solidFill>
-                <a:latin typeface="QuattrocentoSans"/>
-                <a:ea typeface="QuattrocentoSans"/>
-              </a:rPr>
-              <a:t>Why modern SOC environments struggle to keep pace with threats</a:t>
-            </a:r>
-          </a:p>
-        </p:txBody>
-      </p:sp>
-      <p:sp>
-        <p:nvSpPr>
-          <p:cNvPr id="7" name="dsl:deco-line"/>
-          <p:cNvSpPr/>
-          <p:nvPr/>
-        </p:nvSpPr>
-        <p:spPr>
-          <a:xfrm>
-            <a:off x="762000" y="4953000"/>
-            <a:ext cx="2857500" cy="19050"/>
-          </a:xfrm>
-          <a:prstGeom prst="rect">
-            <a:avLst/>
-          </a:prstGeom>
-          <a:solidFill>
-            <a:srgbClr val="E5E5E0"/>
-          </a:solidFill>
-          <a:ln>
-            <a:noFill/>
-          </a:ln>
-          <a:effectLst/>
-        </p:spPr>
-        <p:style>
-          <a:lnRef idx="1">
-            <a:schemeClr val="accent1"/>
-          </a:lnRef>
-          <a:fillRef idx="3">
-            <a:schemeClr val="accent1"/>
-          </a:fillRef>
-          <a:effectRef idx="2">
-            <a:schemeClr val="accent1"/>
-          </a:effectRef>
-          <a:fontRef idx="minor">
-            <a:schemeClr val="lt1"/>
-          </a:fontRef>
-        </p:style>
-        <p:txBody>
-          <a:bodyPr rtlCol="0" anchor="ctr"/>
-          <a:lstStyle/>
-          <a:p>
-            <a:pPr algn="ctr"/>
-          </a:p>
-        </p:txBody>
-      </p:sp>
-      <p:sp>
-        <p:nvSpPr>
-          <p:cNvPr id="8" name="dsl:bottom-bar"/>
-          <p:cNvSpPr/>
-          <p:nvPr/>
-        </p:nvSpPr>
-        <p:spPr>
-          <a:xfrm>
-            <a:off x="0" y="6667500"/>
-            <a:ext cx="12192000" cy="190500"/>
-          </a:xfrm>
-          <a:prstGeom prst="rect">
-            <a:avLst/>
-          </a:prstGeom>
-          <a:solidFill>
-            <a:srgbClr val="2D6A6A"/>
-          </a:solidFill>
-          <a:ln>
-            <a:noFill/>
-          </a:ln>
-          <a:effectLst/>
-        </p:spPr>
-        <p:style>
-          <a:lnRef idx="1">
-            <a:schemeClr val="accent1"/>
-          </a:lnRef>
-          <a:fillRef idx="3">
-            <a:schemeClr val="accent1"/>
-          </a:fillRef>
-          <a:effectRef idx="2">
-            <a:schemeClr val="accent1"/>
-          </a:effectRef>
-          <a:fontRef idx="minor">
-            <a:schemeClr val="lt1"/>
-          </a:fontRef>
-        </p:style>
-        <p:txBody>
-          <a:bodyPr rtlCol="0" anchor="ctr"/>
-          <a:lstStyle/>
-          <a:p>
-            <a:pPr algn="ctr"/>
-          </a:p>
-        </p:txBody>
-      </p:sp>
-    </p:spTree>
-  </p:cSld>
-  <p:clrMapOvr>
-    <a:masterClrMapping/>
-  </p:clrMapOvr>
-</p:sld>
-</file>
-
-<file path=ppt/slides/slide30.xml><?xml version="1.0" encoding="utf-8"?>
-<p:sld xmlns:a="http://schemas.openxmlformats.org/drawingml/2006/main" xmlns:p="http://schemas.openxmlformats.org/presentationml/2006/main" xmlns:r="http://schemas.openxmlformats.org/officeDocument/2006/relationships">
-  <p:cSld>
-    <p:bg>
-      <p:bgPr>
-        <a:solidFill>
-          <a:srgbClr val="FAFAF8"/>
-        </a:solidFill>
-        <a:effectLst/>
-      </p:bgPr>
-    </p:bg>
-    <p:spTree>
-      <p:nvGrpSpPr>
-        <p:cNvPr id="1" name=""/>
-        <p:cNvGrpSpPr/>
-        <p:nvPr/>
-      </p:nvGrpSpPr>
-      <p:grpSpPr/>
-      <p:sp>
-        <p:nvSpPr>
-          <p:cNvPr id="2" name="dsl:nav-bg"/>
-          <p:cNvSpPr/>
-          <p:nvPr/>
-        </p:nvSpPr>
-        <p:spPr>
-          <a:xfrm>
-            <a:off x="0" y="0"/>
-            <a:ext cx="12192000" cy="304800"/>
-          </a:xfrm>
-          <a:prstGeom prst="rect">
-            <a:avLst/>
-          </a:prstGeom>
-          <a:solidFill>
-            <a:srgbClr val="2D6A6A"/>
-          </a:solidFill>
-          <a:ln>
-            <a:noFill/>
-          </a:ln>
-          <a:effectLst/>
-        </p:spPr>
-        <p:style>
-          <a:lnRef idx="1">
-            <a:schemeClr val="accent1"/>
-          </a:lnRef>
-          <a:fillRef idx="3">
-            <a:schemeClr val="accent1"/>
-          </a:fillRef>
-          <a:effectRef idx="2">
-            <a:schemeClr val="accent1"/>
-          </a:effectRef>
-          <a:fontRef idx="minor">
-            <a:schemeClr val="lt1"/>
-          </a:fontRef>
-        </p:style>
-        <p:txBody>
-          <a:bodyPr rtlCol="0" anchor="ctr"/>
-          <a:lstStyle/>
-          <a:p>
-            <a:pPr algn="ctr"/>
-          </a:p>
-        </p:txBody>
-      </p:sp>
-      <p:sp>
-        <p:nvSpPr>
-          <p:cNvPr id="3" name="dsl:nav-active-underline"/>
-          <p:cNvSpPr/>
-          <p:nvPr/>
-        </p:nvSpPr>
-        <p:spPr>
-          <a:xfrm>
-            <a:off x="11049000" y="276225"/>
-            <a:ext cx="762000" cy="28575"/>
-          </a:xfrm>
-          <a:prstGeom prst="rect">
-            <a:avLst/>
-          </a:prstGeom>
-          <a:solidFill>
-            <a:srgbClr val="D4A373"/>
-          </a:solidFill>
-          <a:ln>
-            <a:noFill/>
-          </a:ln>
-          <a:effectLst/>
-        </p:spPr>
-        <p:style>
-          <a:lnRef idx="1">
-            <a:schemeClr val="accent1"/>
-          </a:lnRef>
-          <a:fillRef idx="3">
-            <a:schemeClr val="accent1"/>
-          </a:fillRef>
-          <a:effectRef idx="2">
-            <a:schemeClr val="accent1"/>
-          </a:effectRef>
-          <a:fontRef idx="minor">
-            <a:schemeClr val="lt1"/>
-          </a:fontRef>
-        </p:style>
-        <p:txBody>
-          <a:bodyPr rtlCol="0" anchor="ctr"/>
-          <a:lstStyle/>
-          <a:p>
-            <a:pPr algn="ctr"/>
-          </a:p>
-        </p:txBody>
-      </p:sp>
-      <p:sp>
-        <p:nvSpPr>
-          <p:cNvPr id="4" name="dsl:nav-1"/>
-          <p:cNvSpPr txBox="1"/>
-          <p:nvPr/>
-        </p:nvSpPr>
-        <p:spPr>
-          <a:xfrm>
-            <a:off x="0" y="0"/>
-            <a:ext cx="1524000" cy="304800"/>
-          </a:xfrm>
-          <a:prstGeom prst="rect">
-            <a:avLst/>
-          </a:prstGeom>
-          <a:noFill/>
-        </p:spPr>
-        <p:txBody>
-          <a:bodyPr wrap="none" anchor="ctr">
-            <a:noAutofit/>
-          </a:bodyPr>
-          <a:lstStyle/>
-          <a:p>
-            <a:pPr algn="ctr"/>
-            <a:r>
-              <a:rPr sz="825" noProof="1" spc="150">
-                <a:solidFill>
-                  <a:srgbClr val="8FB3B3"/>
-                </a:solidFill>
-                <a:latin typeface="Liter"/>
-                <a:ea typeface="Liter"/>
-              </a:rPr>
-              <a:t>SOC CHALLENGE</a:t>
-            </a:r>
-          </a:p>
-        </p:txBody>
-      </p:sp>
-      <p:sp>
-        <p:nvSpPr>
-          <p:cNvPr id="5" name="dsl:nav-2"/>
-          <p:cNvSpPr txBox="1"/>
-          <p:nvPr/>
-        </p:nvSpPr>
-        <p:spPr>
-          <a:xfrm>
-            <a:off x="1524000" y="0"/>
-            <a:ext cx="1524000" cy="304800"/>
-          </a:xfrm>
-          <a:prstGeom prst="rect">
-            <a:avLst/>
-          </a:prstGeom>
-          <a:noFill/>
-        </p:spPr>
-        <p:txBody>
-          <a:bodyPr wrap="none" anchor="ctr">
-            <a:noAutofit/>
-          </a:bodyPr>
-          <a:lstStyle/>
-          <a:p>
-            <a:pPr algn="ctr"/>
-            <a:r>
-              <a:rPr sz="825" noProof="1" spc="150">
-                <a:solidFill>
-                  <a:srgbClr val="8FB3B3"/>
-                </a:solidFill>
-                <a:latin typeface="Liter"/>
-                <a:ea typeface="Liter"/>
-              </a:rPr>
-              <a:t>OVERVIEW</a:t>
-            </a:r>
-          </a:p>
-        </p:txBody>
-      </p:sp>
-      <p:sp>
-        <p:nvSpPr>
-          <p:cNvPr id="6" name="dsl:nav-3"/>
-          <p:cNvSpPr txBox="1"/>
-          <p:nvPr/>
-        </p:nvSpPr>
-        <p:spPr>
-          <a:xfrm>
-            <a:off x="3048000" y="0"/>
-            <a:ext cx="1524000" cy="304800"/>
-          </a:xfrm>
-          <a:prstGeom prst="rect">
-            <a:avLst/>
-          </a:prstGeom>
-          <a:noFill/>
-        </p:spPr>
-        <p:txBody>
-          <a:bodyPr wrap="none" anchor="ctr">
-            <a:noAutofit/>
-          </a:bodyPr>
-          <a:lstStyle/>
-          <a:p>
-            <a:pPr algn="ctr"/>
-            <a:r>
-              <a:rPr sz="825" noProof="1" spc="150">
-                <a:solidFill>
-                  <a:srgbClr val="8FB3B3"/>
-                </a:solidFill>
-                <a:latin typeface="Liter"/>
-                <a:ea typeface="Liter"/>
-              </a:rPr>
-              <a:t>DATA</a:t>
-            </a:r>
-          </a:p>
-        </p:txBody>
-      </p:sp>
-      <p:sp>
-        <p:nvSpPr>
-          <p:cNvPr id="7" name="dsl:nav-4"/>
-          <p:cNvSpPr txBox="1"/>
-          <p:nvPr/>
-        </p:nvSpPr>
-        <p:spPr>
-          <a:xfrm>
-            <a:off x="4572000" y="0"/>
-            <a:ext cx="1524000" cy="304800"/>
-          </a:xfrm>
-          <a:prstGeom prst="rect">
-            <a:avLst/>
-          </a:prstGeom>
-          <a:noFill/>
-        </p:spPr>
-        <p:txBody>
-          <a:bodyPr wrap="none" anchor="ctr">
-            <a:noAutofit/>
-          </a:bodyPr>
-          <a:lstStyle/>
-          <a:p>
-            <a:pPr algn="ctr"/>
-            <a:r>
-              <a:rPr sz="825" noProof="1" spc="150">
-                <a:solidFill>
-                  <a:srgbClr val="8FB3B3"/>
-                </a:solidFill>
-                <a:latin typeface="Liter"/>
-                <a:ea typeface="Liter"/>
-              </a:rPr>
-              <a:t>PIPELINE</a:t>
-            </a:r>
-          </a:p>
-        </p:txBody>
-      </p:sp>
-      <p:sp>
-        <p:nvSpPr>
-          <p:cNvPr id="8" name="dsl:nav-5"/>
-          <p:cNvSpPr txBox="1"/>
-          <p:nvPr/>
-        </p:nvSpPr>
-        <p:spPr>
-          <a:xfrm>
-            <a:off x="6096000" y="0"/>
-            <a:ext cx="1524000" cy="304800"/>
-          </a:xfrm>
-          <a:prstGeom prst="rect">
-            <a:avLst/>
-          </a:prstGeom>
-          <a:noFill/>
-        </p:spPr>
-        <p:txBody>
-          <a:bodyPr wrap="none" anchor="ctr">
-            <a:noAutofit/>
-          </a:bodyPr>
-          <a:lstStyle/>
-          <a:p>
-            <a:pPr algn="ctr"/>
-            <a:r>
-              <a:rPr sz="825" noProof="1" spc="150">
-                <a:solidFill>
-                  <a:srgbClr val="8FB3B3"/>
-                </a:solidFill>
-                <a:latin typeface="Liter"/>
-                <a:ea typeface="Liter"/>
-              </a:rPr>
-              <a:t>AI OPERATIONS</a:t>
-            </a:r>
-          </a:p>
-        </p:txBody>
-      </p:sp>
-      <p:sp>
-        <p:nvSpPr>
-          <p:cNvPr id="9" name="dsl:nav-6"/>
-          <p:cNvSpPr txBox="1"/>
-          <p:nvPr/>
-        </p:nvSpPr>
-        <p:spPr>
-          <a:xfrm>
-            <a:off x="7620000" y="0"/>
-            <a:ext cx="1524000" cy="304800"/>
-          </a:xfrm>
-          <a:prstGeom prst="rect">
-            <a:avLst/>
-          </a:prstGeom>
-          <a:noFill/>
-        </p:spPr>
-        <p:txBody>
-          <a:bodyPr wrap="none" anchor="ctr">
-            <a:noAutofit/>
-          </a:bodyPr>
-          <a:lstStyle/>
-          <a:p>
-            <a:pPr algn="ctr"/>
-            <a:r>
-              <a:rPr sz="825" noProof="1" spc="150">
-                <a:solidFill>
-                  <a:srgbClr val="8FB3B3"/>
-                </a:solidFill>
-                <a:latin typeface="Liter"/>
-                <a:ea typeface="Liter"/>
-              </a:rPr>
-              <a:t>ARCHITECTURE</a:t>
-            </a:r>
-          </a:p>
-        </p:txBody>
-      </p:sp>
-      <p:sp>
-        <p:nvSpPr>
-          <p:cNvPr id="10" name="dsl:nav-7"/>
-          <p:cNvSpPr txBox="1"/>
-          <p:nvPr/>
-        </p:nvSpPr>
-        <p:spPr>
-          <a:xfrm>
-            <a:off x="9144000" y="0"/>
-            <a:ext cx="1524000" cy="304800"/>
-          </a:xfrm>
-          <a:prstGeom prst="rect">
-            <a:avLst/>
-          </a:prstGeom>
-          <a:noFill/>
-        </p:spPr>
-        <p:txBody>
-          <a:bodyPr wrap="none" anchor="ctr">
-            <a:noAutofit/>
-          </a:bodyPr>
-          <a:lstStyle/>
-          <a:p>
-            <a:pPr algn="ctr"/>
-            <a:r>
-              <a:rPr sz="825" noProof="1" spc="150">
-                <a:solidFill>
-                  <a:srgbClr val="8FB3B3"/>
-                </a:solidFill>
-                <a:latin typeface="Liter"/>
-                <a:ea typeface="Liter"/>
-              </a:rPr>
-              <a:t>SECURITY</a:t>
-            </a:r>
-          </a:p>
-        </p:txBody>
-      </p:sp>
-      <p:sp>
-        <p:nvSpPr>
-          <p:cNvPr id="11" name="dsl:nav-8"/>
-          <p:cNvSpPr txBox="1"/>
-          <p:nvPr/>
-        </p:nvSpPr>
-        <p:spPr>
-          <a:xfrm>
-            <a:off x="10668000" y="0"/>
-            <a:ext cx="1524000" cy="304800"/>
-          </a:xfrm>
-          <a:prstGeom prst="rect">
-            <a:avLst/>
-          </a:prstGeom>
-          <a:noFill/>
-        </p:spPr>
-        <p:txBody>
-          <a:bodyPr wrap="none" anchor="ctr">
-            <a:noAutofit/>
-          </a:bodyPr>
-          <a:lstStyle/>
-          <a:p>
-            <a:pPr algn="ctr"/>
-            <a:r>
-              <a:rPr sz="825" noProof="1" spc="150">
-                <a:solidFill>
-                  <a:srgbClr val="FFFFFF"/>
-                </a:solidFill>
-                <a:latin typeface="Liter"/>
-                <a:ea typeface="Liter"/>
-              </a:rPr>
-              <a:t>VALUE</a:t>
-            </a:r>
-          </a:p>
-        </p:txBody>
-      </p:sp>
-      <p:sp>
-        <p:nvSpPr>
-          <p:cNvPr id="12" name="dsl:title-accent"/>
-          <p:cNvSpPr/>
-          <p:nvPr/>
-        </p:nvSpPr>
-        <p:spPr>
-          <a:xfrm>
-            <a:off x="571500" y="438150"/>
-            <a:ext cx="571500" cy="38100"/>
-          </a:xfrm>
-          <a:prstGeom prst="rect">
-            <a:avLst/>
-          </a:prstGeom>
-          <a:solidFill>
-            <a:srgbClr val="D4A373"/>
-          </a:solidFill>
-          <a:ln>
-            <a:noFill/>
-          </a:ln>
-          <a:effectLst/>
-        </p:spPr>
-        <p:style>
-          <a:lnRef idx="1">
-            <a:schemeClr val="accent1"/>
-          </a:lnRef>
-          <a:fillRef idx="3">
-            <a:schemeClr val="accent1"/>
-          </a:fillRef>
-          <a:effectRef idx="2">
-            <a:schemeClr val="accent1"/>
-          </a:effectRef>
-          <a:fontRef idx="minor">
-            <a:schemeClr val="lt1"/>
-          </a:fontRef>
-        </p:style>
-        <p:txBody>
-          <a:bodyPr rtlCol="0" anchor="ctr"/>
-          <a:lstStyle/>
-          <a:p>
-            <a:pPr algn="ctr"/>
-          </a:p>
-        </p:txBody>
-      </p:sp>
-      <p:sp>
-        <p:nvSpPr>
-          <p:cNvPr id="13" name="dsl:title"/>
-          <p:cNvSpPr txBox="1"/>
-          <p:nvPr/>
-        </p:nvSpPr>
-        <p:spPr>
-          <a:xfrm>
-            <a:off x="571500" y="552450"/>
-            <a:ext cx="6667500" cy="400050"/>
-          </a:xfrm>
-          <a:prstGeom prst="rect">
-            <a:avLst/>
-          </a:prstGeom>
-          <a:noFill/>
-        </p:spPr>
-        <p:txBody>
-          <a:bodyPr wrap="none" anchor="ctr">
-            <a:noAutofit/>
-          </a:bodyPr>
-          <a:lstStyle/>
-          <a:p>
-            <a:pPr algn="l"/>
-            <a:r>
-              <a:rPr sz="2100" noProof="1">
-                <a:solidFill>
-                  <a:srgbClr val="2D6A6A"/>
-                </a:solidFill>
-                <a:latin typeface="Liter"/>
-                <a:ea typeface="Liter"/>
-              </a:rPr>
-              <a:t>Value of ARIA</a:t>
-            </a:r>
-          </a:p>
-        </p:txBody>
-      </p:sp>
-      <p:sp>
-        <p:nvSpPr>
-          <p:cNvPr id="14" name="dsl:ref-note"/>
-          <p:cNvSpPr txBox="1"/>
-          <p:nvPr/>
-        </p:nvSpPr>
-        <p:spPr>
-          <a:xfrm>
-            <a:off x="8096250" y="552450"/>
-            <a:ext cx="3524250" cy="400050"/>
-          </a:xfrm>
-          <a:prstGeom prst="rect">
-            <a:avLst/>
-          </a:prstGeom>
-          <a:noFill/>
-        </p:spPr>
-        <p:txBody>
-          <a:bodyPr wrap="none" anchor="ctr">
-            <a:noAutofit/>
-          </a:bodyPr>
-          <a:lstStyle/>
-          <a:p>
-            <a:pPr algn="r"/>
-            <a:r>
-              <a:rPr sz="975" noProof="1">
-                <a:solidFill>
-                  <a:srgbClr val="5C6B73"/>
-                </a:solidFill>
-                <a:latin typeface="QuattrocentoSans"/>
-                <a:ea typeface="QuattrocentoSans"/>
-              </a:rPr>
-              <a:t>Reference: main.pdf General Conclusion</a:t>
-            </a:r>
-          </a:p>
-        </p:txBody>
-      </p:sp>
-      <p:sp>
-        <p:nvSpPr>
-          <p:cNvPr id="15" name="dsl:v1-bg"/>
-          <p:cNvSpPr/>
-          <p:nvPr/>
-        </p:nvSpPr>
-        <p:spPr>
-          <a:xfrm>
-            <a:off x="571500" y="1123950"/>
-            <a:ext cx="3552825" cy="2476500"/>
-          </a:xfrm>
-          <a:prstGeom prst="rect">
-            <a:avLst/>
-          </a:prstGeom>
-          <a:solidFill>
-            <a:srgbClr val="F5F5F2"/>
-          </a:solidFill>
-          <a:ln>
-            <a:noFill/>
-          </a:ln>
-          <a:effectLst/>
-        </p:spPr>
-        <p:style>
-          <a:lnRef idx="1">
-            <a:schemeClr val="accent1"/>
-          </a:lnRef>
-          <a:fillRef idx="3">
-            <a:schemeClr val="accent1"/>
-          </a:fillRef>
-          <a:effectRef idx="2">
-            <a:schemeClr val="accent1"/>
-          </a:effectRef>
-          <a:fontRef idx="minor">
-            <a:schemeClr val="lt1"/>
-          </a:fontRef>
-        </p:style>
-        <p:txBody>
-          <a:bodyPr rtlCol="0" anchor="ctr"/>
-          <a:lstStyle/>
-          <a:p>
-            <a:pPr algn="ctr"/>
-          </a:p>
-        </p:txBody>
-      </p:sp>
-      <p:sp>
-        <p:nvSpPr>
-          <p:cNvPr id="16" name="dsl:v1-accent"/>
-          <p:cNvSpPr/>
-          <p:nvPr/>
-        </p:nvSpPr>
-        <p:spPr>
-          <a:xfrm>
-            <a:off x="571500" y="1123950"/>
-            <a:ext cx="3552825" cy="47625"/>
-          </a:xfrm>
-          <a:prstGeom prst="rect">
-            <a:avLst/>
-          </a:prstGeom>
-          <a:solidFill>
-            <a:srgbClr val="D4A373"/>
-          </a:solidFill>
-          <a:ln>
-            <a:noFill/>
-          </a:ln>
-          <a:effectLst/>
-        </p:spPr>
-        <p:style>
-          <a:lnRef idx="1">
-            <a:schemeClr val="accent1"/>
-          </a:lnRef>
-          <a:fillRef idx="3">
-            <a:schemeClr val="accent1"/>
-          </a:fillRef>
-          <a:effectRef idx="2">
-            <a:schemeClr val="accent1"/>
-          </a:effectRef>
-          <a:fontRef idx="minor">
-            <a:schemeClr val="lt1"/>
-          </a:fontRef>
-        </p:style>
-        <p:txBody>
-          <a:bodyPr rtlCol="0" anchor="ctr"/>
-          <a:lstStyle/>
-          <a:p>
-            <a:pPr algn="ctr"/>
-          </a:p>
-        </p:txBody>
-      </p:sp>
-      <p:sp>
-        <p:nvSpPr>
-          <p:cNvPr id="17" name="dsl:v1-icon|i=fas:bolt"/>
-          <p:cNvSpPr/>
-          <p:nvPr/>
-        </p:nvSpPr>
-        <p:spPr>
-          <a:xfrm>
-            <a:off x="781050" y="1314450"/>
-            <a:ext cx="266700" cy="304800"/>
-          </a:xfrm>
-          <a:custGeom>
-            <a:avLst/>
-            <a:gdLst/>
-            <a:ahLst/>
-            <a:cxnLst/>
-            <a:rect l="l" t="t" r="r" b="b"/>
-            <a:pathLst>
-              <a:path w="266700" h="304800">
-                <a:moveTo>
-                  <a:pt x="208002" y="26550"/>
-                </a:moveTo>
-                <a:cubicBezTo>
-                  <a:pt x="211514" y="18395"/>
-                  <a:pt x="208895" y="8870"/>
-                  <a:pt x="201691" y="3631"/>
-                </a:cubicBezTo>
-                <a:cubicBezTo>
-                  <a:pt x="194488" y="-1607"/>
-                  <a:pt x="184665" y="-1131"/>
-                  <a:pt x="177938" y="4702"/>
-                </a:cubicBezTo>
-                <a:lnTo>
-                  <a:pt x="25538" y="138052"/>
-                </a:lnTo>
-                <a:cubicBezTo>
-                  <a:pt x="19585" y="143291"/>
-                  <a:pt x="17442" y="151685"/>
-                  <a:pt x="20240" y="159067"/>
-                </a:cubicBezTo>
-                <a:cubicBezTo>
-                  <a:pt x="23038" y="166449"/>
-                  <a:pt x="30182" y="171450"/>
-                  <a:pt x="38100" y="171450"/>
-                </a:cubicBezTo>
-                <a:lnTo>
-                  <a:pt x="104477" y="171450"/>
-                </a:lnTo>
-                <a:lnTo>
-                  <a:pt x="58697" y="278249"/>
-                </a:lnTo>
-                <a:cubicBezTo>
-                  <a:pt x="55185" y="286404"/>
-                  <a:pt x="57804" y="295929"/>
-                  <a:pt x="65008" y="301168"/>
-                </a:cubicBezTo>
-                <a:cubicBezTo>
-                  <a:pt x="72211" y="306407"/>
-                  <a:pt x="82034" y="305931"/>
-                  <a:pt x="88761" y="300097"/>
-                </a:cubicBezTo>
-                <a:lnTo>
-                  <a:pt x="241161" y="166747"/>
-                </a:lnTo>
-                <a:cubicBezTo>
-                  <a:pt x="247114" y="161508"/>
-                  <a:pt x="249257" y="153114"/>
-                  <a:pt x="246459" y="145732"/>
-                </a:cubicBezTo>
-                <a:cubicBezTo>
-                  <a:pt x="243661" y="138350"/>
-                  <a:pt x="236577" y="133409"/>
-                  <a:pt x="228600" y="133409"/>
-                </a:cubicBezTo>
-                <a:lnTo>
-                  <a:pt x="162222" y="133409"/>
-                </a:lnTo>
-                <a:lnTo>
-                  <a:pt x="208002" y="26550"/>
-                </a:lnTo>
-                <a:close/>
-              </a:path>
-            </a:pathLst>
-          </a:custGeom>
-          <a:solidFill>
-            <a:srgbClr val="D4A373"/>
-          </a:solidFill>
-          <a:ln>
-            <a:noFill/>
-          </a:ln>
-          <a:effectLst/>
-        </p:spPr>
-        <p:txBody>
-          <a:bodyPr/>
-          <a:p/>
-        </p:txBody>
-      </p:sp>
-      <p:sp>
-        <p:nvSpPr>
-          <p:cNvPr id="18" name="dsl:v1-title"/>
-          <p:cNvSpPr txBox="1"/>
-          <p:nvPr/>
-        </p:nvSpPr>
-        <p:spPr>
-          <a:xfrm>
-            <a:off x="762000" y="1714500"/>
-            <a:ext cx="3171825" cy="247650"/>
-          </a:xfrm>
-          <a:prstGeom prst="rect">
-            <a:avLst/>
-          </a:prstGeom>
-          <a:noFill/>
-        </p:spPr>
-        <p:txBody>
-          <a:bodyPr wrap="none" anchor="ctr">
-            <a:noAutofit/>
-          </a:bodyPr>
-          <a:lstStyle/>
-          <a:p>
-            <a:pPr algn="l"/>
-            <a:r>
-              <a:rPr b="1" sz="1500" noProof="1">
-                <a:solidFill>
-                  <a:srgbClr val="2D6A6A"/>
-                </a:solidFill>
-                <a:latin typeface="Liter"/>
-                <a:ea typeface="Liter"/>
-              </a:rPr>
-              <a:t>Faster Investigation</a:t>
-            </a:r>
-          </a:p>
-        </p:txBody>
-      </p:sp>
-      <p:sp>
-        <p:nvSpPr>
-          <p:cNvPr id="19" name="dsl:v1-desc"/>
-          <p:cNvSpPr txBox="1"/>
-          <p:nvPr/>
-        </p:nvSpPr>
-        <p:spPr>
-          <a:xfrm>
-            <a:off x="762000" y="2038350"/>
-            <a:ext cx="3171825" cy="1428750"/>
-          </a:xfrm>
-          <a:prstGeom prst="rect">
-            <a:avLst/>
-          </a:prstGeom>
-          <a:noFill/>
-        </p:spPr>
-        <p:txBody>
-          <a:bodyPr wrap="square" anchor="t">
-            <a:noAutofit/>
-          </a:bodyPr>
-          <a:lstStyle/>
-          <a:p>
-            <a:pPr algn="l"/>
-            <a:r>
-              <a:rPr sz="1200" noProof="1">
-                <a:solidFill>
-                  <a:srgbClr val="2B2D2F"/>
-                </a:solidFill>
-                <a:latin typeface="QuattrocentoSans"/>
-                <a:ea typeface="QuattrocentoSans"/>
-              </a:rPr>
-              <a:t>AI-generated summaries and narratives reduce manual analysis time. Analysts get context-rich investigations instantly.</a:t>
-            </a:r>
-          </a:p>
-        </p:txBody>
-      </p:sp>
-      <p:sp>
-        <p:nvSpPr>
-          <p:cNvPr id="20" name="dsl:v2-bg"/>
-          <p:cNvSpPr/>
-          <p:nvPr/>
-        </p:nvSpPr>
-        <p:spPr>
-          <a:xfrm>
-            <a:off x="4314825" y="1123950"/>
-            <a:ext cx="3562350" cy="2476500"/>
-          </a:xfrm>
-          <a:prstGeom prst="rect">
-            <a:avLst/>
-          </a:prstGeom>
-          <a:solidFill>
-            <a:srgbClr val="F5F5F2"/>
-          </a:solidFill>
-          <a:ln>
-            <a:noFill/>
-          </a:ln>
-          <a:effectLst/>
-        </p:spPr>
-        <p:style>
-          <a:lnRef idx="1">
-            <a:schemeClr val="accent1"/>
-          </a:lnRef>
-          <a:fillRef idx="3">
-            <a:schemeClr val="accent1"/>
-          </a:fillRef>
-          <a:effectRef idx="2">
-            <a:schemeClr val="accent1"/>
-          </a:effectRef>
-          <a:fontRef idx="minor">
-            <a:schemeClr val="lt1"/>
-          </a:fontRef>
-        </p:style>
-        <p:txBody>
-          <a:bodyPr rtlCol="0" anchor="ctr"/>
-          <a:lstStyle/>
-          <a:p>
-            <a:pPr algn="ctr"/>
-          </a:p>
-        </p:txBody>
-      </p:sp>
-      <p:sp>
-        <p:nvSpPr>
-          <p:cNvPr id="21" name="dsl:v2-accent"/>
-          <p:cNvSpPr/>
-          <p:nvPr/>
-        </p:nvSpPr>
-        <p:spPr>
-          <a:xfrm>
-            <a:off x="4314825" y="1123950"/>
-            <a:ext cx="3562350" cy="47625"/>
-          </a:xfrm>
-          <a:prstGeom prst="rect">
-            <a:avLst/>
-          </a:prstGeom>
-          <a:solidFill>
-            <a:srgbClr val="D4A373"/>
-          </a:solidFill>
-          <a:ln>
-            <a:noFill/>
-          </a:ln>
-          <a:effectLst/>
-        </p:spPr>
-        <p:style>
-          <a:lnRef idx="1">
-            <a:schemeClr val="accent1"/>
-          </a:lnRef>
-          <a:fillRef idx="3">
-            <a:schemeClr val="accent1"/>
-          </a:fillRef>
-          <a:effectRef idx="2">
-            <a:schemeClr val="accent1"/>
-          </a:effectRef>
-          <a:fontRef idx="minor">
-            <a:schemeClr val="lt1"/>
-          </a:fontRef>
-        </p:style>
-        <p:txBody>
-          <a:bodyPr rtlCol="0" anchor="ctr"/>
-          <a:lstStyle/>
-          <a:p>
-            <a:pPr algn="ctr"/>
-          </a:p>
-        </p:txBody>
-      </p:sp>
-      <p:sp>
-        <p:nvSpPr>
-          <p:cNvPr id="22" name="dsl:v2-icon|i=fas:link"/>
-          <p:cNvSpPr/>
-          <p:nvPr/>
-        </p:nvSpPr>
-        <p:spPr>
-          <a:xfrm>
-            <a:off x="4505325" y="1344930"/>
-            <a:ext cx="304800" cy="243840"/>
-          </a:xfrm>
-          <a:custGeom>
-            <a:avLst/>
-            <a:gdLst/>
-            <a:ahLst/>
-            <a:cxnLst/>
-            <a:rect l="l" t="t" r="r" b="b"/>
-            <a:pathLst>
-              <a:path w="304800" h="243840">
-                <a:moveTo>
-                  <a:pt x="276129" y="127492"/>
-                </a:moveTo>
-                <a:cubicBezTo>
-                  <a:pt x="303037" y="100584"/>
-                  <a:pt x="303037" y="57007"/>
-                  <a:pt x="276129" y="30098"/>
-                </a:cubicBezTo>
-                <a:cubicBezTo>
-                  <a:pt x="252317" y="6286"/>
-                  <a:pt x="214788" y="3190"/>
-                  <a:pt x="187404" y="22764"/>
-                </a:cubicBezTo>
-                <a:lnTo>
-                  <a:pt x="186642" y="23288"/>
-                </a:lnTo>
-                <a:cubicBezTo>
-                  <a:pt x="179784" y="28193"/>
-                  <a:pt x="178212" y="37718"/>
-                  <a:pt x="183118" y="44529"/>
-                </a:cubicBezTo>
-                <a:cubicBezTo>
-                  <a:pt x="188023" y="51339"/>
-                  <a:pt x="197548" y="52959"/>
-                  <a:pt x="204358" y="48053"/>
-                </a:cubicBezTo>
-                <a:lnTo>
-                  <a:pt x="205120" y="47529"/>
-                </a:lnTo>
-                <a:cubicBezTo>
-                  <a:pt x="220408" y="36623"/>
-                  <a:pt x="241315" y="38338"/>
-                  <a:pt x="254555" y="51625"/>
-                </a:cubicBezTo>
-                <a:cubicBezTo>
-                  <a:pt x="269557" y="66627"/>
-                  <a:pt x="269557" y="90916"/>
-                  <a:pt x="254555" y="105918"/>
-                </a:cubicBezTo>
-                <a:lnTo>
-                  <a:pt x="201120" y="159448"/>
-                </a:lnTo>
-                <a:cubicBezTo>
-                  <a:pt x="186118" y="174450"/>
-                  <a:pt x="161829" y="174450"/>
-                  <a:pt x="146827" y="159448"/>
-                </a:cubicBezTo>
-                <a:cubicBezTo>
-                  <a:pt x="133540" y="146161"/>
-                  <a:pt x="131826" y="125253"/>
-                  <a:pt x="142732" y="110013"/>
-                </a:cubicBezTo>
-                <a:lnTo>
-                  <a:pt x="143256" y="109251"/>
-                </a:lnTo>
-                <a:cubicBezTo>
-                  <a:pt x="148161" y="102393"/>
-                  <a:pt x="146542" y="92868"/>
-                  <a:pt x="139731" y="88011"/>
-                </a:cubicBezTo>
-                <a:cubicBezTo>
-                  <a:pt x="132921" y="83153"/>
-                  <a:pt x="123348" y="84724"/>
-                  <a:pt x="118491" y="91535"/>
-                </a:cubicBezTo>
-                <a:lnTo>
-                  <a:pt x="117967" y="92297"/>
-                </a:lnTo>
-                <a:cubicBezTo>
-                  <a:pt x="98345" y="119634"/>
-                  <a:pt x="101441" y="157162"/>
-                  <a:pt x="125253" y="180975"/>
-                </a:cubicBezTo>
-                <a:cubicBezTo>
-                  <a:pt x="152161" y="207883"/>
-                  <a:pt x="195738" y="207883"/>
-                  <a:pt x="222646" y="180975"/>
-                </a:cubicBezTo>
-                <a:lnTo>
-                  <a:pt x="276129" y="127492"/>
-                </a:lnTo>
-                <a:close/>
-                <a:moveTo>
-                  <a:pt x="28670" y="116347"/>
-                </a:moveTo>
-                <a:cubicBezTo>
-                  <a:pt x="1762" y="143256"/>
-                  <a:pt x="1762" y="186832"/>
-                  <a:pt x="28670" y="213741"/>
-                </a:cubicBezTo>
-                <a:cubicBezTo>
-                  <a:pt x="52482" y="237553"/>
-                  <a:pt x="90011" y="240649"/>
-                  <a:pt x="117395" y="221075"/>
-                </a:cubicBezTo>
-                <a:lnTo>
-                  <a:pt x="118157" y="220551"/>
-                </a:lnTo>
-                <a:cubicBezTo>
-                  <a:pt x="125015" y="215645"/>
-                  <a:pt x="126587" y="206120"/>
-                  <a:pt x="121681" y="199310"/>
-                </a:cubicBezTo>
-                <a:cubicBezTo>
-                  <a:pt x="116776" y="192500"/>
-                  <a:pt x="107251" y="190880"/>
-                  <a:pt x="100441" y="195786"/>
-                </a:cubicBezTo>
-                <a:lnTo>
-                  <a:pt x="99679" y="196310"/>
-                </a:lnTo>
-                <a:cubicBezTo>
-                  <a:pt x="84391" y="207216"/>
-                  <a:pt x="63484" y="205501"/>
-                  <a:pt x="50244" y="192214"/>
-                </a:cubicBezTo>
-                <a:cubicBezTo>
-                  <a:pt x="35242" y="177165"/>
-                  <a:pt x="35242" y="152876"/>
-                  <a:pt x="50244" y="137874"/>
-                </a:cubicBezTo>
-                <a:lnTo>
-                  <a:pt x="103679" y="84391"/>
-                </a:lnTo>
-                <a:cubicBezTo>
-                  <a:pt x="118681" y="69389"/>
-                  <a:pt x="142970" y="69389"/>
-                  <a:pt x="157972" y="84391"/>
-                </a:cubicBezTo>
-                <a:cubicBezTo>
-                  <a:pt x="171259" y="97678"/>
-                  <a:pt x="172974" y="118586"/>
-                  <a:pt x="162067" y="133873"/>
-                </a:cubicBezTo>
-                <a:lnTo>
-                  <a:pt x="161544" y="134635"/>
-                </a:lnTo>
-                <a:cubicBezTo>
-                  <a:pt x="156638" y="141493"/>
-                  <a:pt x="158257" y="151018"/>
-                  <a:pt x="165068" y="155876"/>
-                </a:cubicBezTo>
-                <a:cubicBezTo>
-                  <a:pt x="171878" y="160734"/>
-                  <a:pt x="181451" y="159162"/>
-                  <a:pt x="186309" y="152352"/>
-                </a:cubicBezTo>
-                <a:lnTo>
-                  <a:pt x="186832" y="151590"/>
-                </a:lnTo>
-                <a:cubicBezTo>
-                  <a:pt x="206454" y="124206"/>
-                  <a:pt x="203358" y="86677"/>
-                  <a:pt x="179546" y="62865"/>
-                </a:cubicBezTo>
-                <a:cubicBezTo>
-                  <a:pt x="152638" y="35956"/>
-                  <a:pt x="109061" y="35956"/>
-                  <a:pt x="82153" y="62865"/>
-                </a:cubicBezTo>
-                <a:lnTo>
-                  <a:pt x="28670" y="116347"/>
-                </a:lnTo>
-                <a:close/>
-              </a:path>
-            </a:pathLst>
-          </a:custGeom>
-          <a:solidFill>
-            <a:srgbClr val="D4A373"/>
-          </a:solidFill>
-          <a:ln>
-            <a:noFill/>
-          </a:ln>
-          <a:effectLst/>
-        </p:spPr>
-        <p:txBody>
-          <a:bodyPr/>
-          <a:p/>
-        </p:txBody>
-      </p:sp>
-      <p:sp>
-        <p:nvSpPr>
-          <p:cNvPr id="23" name="dsl:v2-title"/>
-          <p:cNvSpPr txBox="1"/>
-          <p:nvPr/>
-        </p:nvSpPr>
-        <p:spPr>
-          <a:xfrm>
-            <a:off x="4505325" y="1714500"/>
-            <a:ext cx="3181350" cy="247650"/>
-          </a:xfrm>
-          <a:prstGeom prst="rect">
-            <a:avLst/>
-          </a:prstGeom>
-          <a:noFill/>
-        </p:spPr>
-        <p:txBody>
-          <a:bodyPr wrap="none" anchor="ctr">
-            <a:noAutofit/>
-          </a:bodyPr>
-          <a:lstStyle/>
-          <a:p>
-            <a:pPr algn="l"/>
-            <a:r>
-              <a:rPr b="1" sz="1500" noProof="1">
-                <a:solidFill>
-                  <a:srgbClr val="2D6A6A"/>
-                </a:solidFill>
-                <a:latin typeface="Liter"/>
-                <a:ea typeface="Liter"/>
-              </a:rPr>
-              <a:t>Better Correlation</a:t>
-            </a:r>
-          </a:p>
-        </p:txBody>
-      </p:sp>
-      <p:sp>
-        <p:nvSpPr>
-          <p:cNvPr id="24" name="dsl:v2-desc"/>
-          <p:cNvSpPr txBox="1"/>
-          <p:nvPr/>
-        </p:nvSpPr>
-        <p:spPr>
-          <a:xfrm>
-            <a:off x="4505325" y="2038350"/>
-            <a:ext cx="3181350" cy="1428750"/>
-          </a:xfrm>
-          <a:prstGeom prst="rect">
-            <a:avLst/>
-          </a:prstGeom>
-          <a:noFill/>
-        </p:spPr>
-        <p:txBody>
-          <a:bodyPr wrap="square" anchor="t">
-            <a:noAutofit/>
-          </a:bodyPr>
-          <a:lstStyle/>
-          <a:p>
-            <a:pPr algn="l"/>
-            <a:r>
-              <a:rPr sz="1200" noProof="1">
-                <a:solidFill>
-                  <a:srgbClr val="2B2D2F"/>
-                </a:solidFill>
-                <a:latin typeface="QuattrocentoSans"/>
-                <a:ea typeface="QuattrocentoSans"/>
-              </a:rPr>
-              <a:t>Time-windowed and indicator-based grouping reconstructs complete attack chains from isolated alerts.</a:t>
-            </a:r>
-          </a:p>
-        </p:txBody>
-      </p:sp>
-      <p:sp>
-        <p:nvSpPr>
-          <p:cNvPr id="25" name="dsl:v3-bg"/>
-          <p:cNvSpPr/>
-          <p:nvPr/>
-        </p:nvSpPr>
-        <p:spPr>
-          <a:xfrm>
-            <a:off x="8067675" y="1123950"/>
-            <a:ext cx="3552825" cy="2476500"/>
-          </a:xfrm>
-          <a:prstGeom prst="rect">
-            <a:avLst/>
-          </a:prstGeom>
-          <a:solidFill>
-            <a:srgbClr val="F5F5F2"/>
-          </a:solidFill>
-          <a:ln>
-            <a:noFill/>
-          </a:ln>
-          <a:effectLst/>
-        </p:spPr>
-        <p:style>
-          <a:lnRef idx="1">
-            <a:schemeClr val="accent1"/>
-          </a:lnRef>
-          <a:fillRef idx="3">
-            <a:schemeClr val="accent1"/>
-          </a:fillRef>
-          <a:effectRef idx="2">
-            <a:schemeClr val="accent1"/>
-          </a:effectRef>
-          <a:fontRef idx="minor">
-            <a:schemeClr val="lt1"/>
-          </a:fontRef>
-        </p:style>
-        <p:txBody>
-          <a:bodyPr rtlCol="0" anchor="ctr"/>
-          <a:lstStyle/>
-          <a:p>
-            <a:pPr algn="ctr"/>
-          </a:p>
-        </p:txBody>
-      </p:sp>
-      <p:sp>
-        <p:nvSpPr>
-          <p:cNvPr id="26" name="dsl:v3-accent"/>
-          <p:cNvSpPr/>
-          <p:nvPr/>
-        </p:nvSpPr>
-        <p:spPr>
-          <a:xfrm>
-            <a:off x="8067675" y="1123950"/>
-            <a:ext cx="3552825" cy="47625"/>
-          </a:xfrm>
-          <a:prstGeom prst="rect">
-            <a:avLst/>
-          </a:prstGeom>
-          <a:solidFill>
-            <a:srgbClr val="D4A373"/>
-          </a:solidFill>
-          <a:ln>
-            <a:noFill/>
-          </a:ln>
-          <a:effectLst/>
-        </p:spPr>
-        <p:style>
-          <a:lnRef idx="1">
-            <a:schemeClr val="accent1"/>
-          </a:lnRef>
-          <a:fillRef idx="3">
-            <a:schemeClr val="accent1"/>
-          </a:fillRef>
-          <a:effectRef idx="2">
-            <a:schemeClr val="accent1"/>
-          </a:effectRef>
-          <a:fontRef idx="minor">
-            <a:schemeClr val="lt1"/>
-          </a:fontRef>
-        </p:style>
-        <p:txBody>
-          <a:bodyPr rtlCol="0" anchor="ctr"/>
-          <a:lstStyle/>
-          <a:p>
-            <a:pPr algn="ctr"/>
-          </a:p>
-        </p:txBody>
-      </p:sp>
-      <p:sp>
-        <p:nvSpPr>
-          <p:cNvPr id="27" name="dsl:v3-icon|i=fas:bell-slash"/>
-          <p:cNvSpPr/>
-          <p:nvPr/>
-        </p:nvSpPr>
-        <p:spPr>
-          <a:xfrm>
-            <a:off x="8258175" y="1344930"/>
-            <a:ext cx="304800" cy="243840"/>
-          </a:xfrm>
-          <a:custGeom>
-            <a:avLst/>
-            <a:gdLst/>
-            <a:ahLst/>
-            <a:cxnLst/>
-            <a:rect l="l" t="t" r="r" b="b"/>
-            <a:pathLst>
-              <a:path w="304800" h="243840">
-                <a:moveTo>
-                  <a:pt x="18478" y="2428"/>
-                </a:moveTo>
-                <a:cubicBezTo>
-                  <a:pt x="13525" y="-1476"/>
-                  <a:pt x="6334" y="-571"/>
-                  <a:pt x="2428" y="4381"/>
-                </a:cubicBezTo>
-                <a:cubicBezTo>
-                  <a:pt x="-1476" y="9334"/>
-                  <a:pt x="-571" y="16525"/>
-                  <a:pt x="4381" y="20431"/>
-                </a:cubicBezTo>
-                <a:lnTo>
-                  <a:pt x="286321" y="241411"/>
-                </a:lnTo>
-                <a:cubicBezTo>
-                  <a:pt x="291274" y="245316"/>
-                  <a:pt x="298465" y="244411"/>
-                  <a:pt x="302371" y="239458"/>
-                </a:cubicBezTo>
-                <a:cubicBezTo>
-                  <a:pt x="306276" y="234505"/>
-                  <a:pt x="305371" y="227314"/>
-                  <a:pt x="300418" y="223408"/>
-                </a:cubicBezTo>
-                <a:lnTo>
-                  <a:pt x="257460" y="189738"/>
-                </a:lnTo>
-                <a:cubicBezTo>
-                  <a:pt x="258413" y="191643"/>
-                  <a:pt x="259365" y="194024"/>
-                  <a:pt x="260318" y="189118"/>
-                </a:cubicBezTo>
-                <a:cubicBezTo>
-                  <a:pt x="262794" y="183641"/>
-                  <a:pt x="261794" y="177212"/>
-                  <a:pt x="257794" y="172735"/>
-                </a:cubicBezTo>
-                <a:lnTo>
-                  <a:pt x="254269" y="168783"/>
-                </a:lnTo>
-                <a:cubicBezTo>
-                  <a:pt x="236839" y="152019"/>
-                  <a:pt x="228600" y="130444"/>
-                  <a:pt x="228600" y="108013"/>
-                </a:cubicBezTo>
-                <a:lnTo>
-                  <a:pt x="228600" y="99060"/>
-                </a:lnTo>
-                <a:cubicBezTo>
-                  <a:pt x="228600" y="62198"/>
-                  <a:pt x="202406" y="31432"/>
-                  <a:pt x="167640" y="24383"/>
-                </a:cubicBezTo>
-                <a:lnTo>
-                  <a:pt x="167640" y="15240"/>
-                </a:lnTo>
-                <a:cubicBezTo>
-                  <a:pt x="167640" y="6810"/>
-                  <a:pt x="160829" y="0"/>
-                  <a:pt x="152400" y="0"/>
-                </a:cubicBezTo>
-                <a:cubicBezTo>
-                  <a:pt x="143970" y="0"/>
-                  <a:pt x="137160" y="6810"/>
-                  <a:pt x="137160" y="15240"/>
-                </a:cubicBezTo>
-                <a:lnTo>
-                  <a:pt x="137160" y="24384"/>
-                </a:lnTo>
-                <a:cubicBezTo>
-                  <a:pt x="116871" y="28479"/>
-                  <a:pt x="99536" y="40671"/>
-                  <a:pt x="88582" y="57388"/>
-                </a:cubicBezTo>
-                <a:lnTo>
-                  <a:pt x="18478" y="2428"/>
-                </a:lnTo>
-                <a:close/>
-                <a:moveTo>
-                  <a:pt x="193452" y="198120"/>
-                </a:moveTo>
-                <a:lnTo>
-                  <a:pt x="76200" y="105775"/>
-                </a:lnTo>
-                <a:lnTo>
-                  <a:pt x="76200" y="108061"/>
-                </a:lnTo>
-                <a:cubicBezTo>
-                  <a:pt x="76200" y="130444"/>
-                  <a:pt x="67960" y="152066"/>
-                  <a:pt x="53101" y="168830"/>
-                </a:cubicBezTo>
-                <a:lnTo>
-                  <a:pt x="49577" y="172783"/>
-                </a:lnTo>
-                <a:cubicBezTo>
-                  <a:pt x="45577" y="177260"/>
-                  <a:pt x="44624" y="183689"/>
-                  <a:pt x="47053" y="189166"/>
-                </a:cubicBezTo>
-                <a:cubicBezTo>
-                  <a:pt x="49482" y="194643"/>
-                  <a:pt x="54959" y="198120"/>
-                  <a:pt x="60960" y="198120"/>
-                </a:cubicBezTo>
-                <a:lnTo>
-                  <a:pt x="193452" y="198120"/>
-                </a:lnTo>
-                <a:close/>
-                <a:moveTo>
-                  <a:pt x="173974" y="234934"/>
-                </a:moveTo>
-                <a:cubicBezTo>
-                  <a:pt x="179689" y="229219"/>
-                  <a:pt x="182880" y="221456"/>
-                  <a:pt x="182880" y="213360"/>
-                </a:cubicBezTo>
-                <a:lnTo>
-                  <a:pt x="152400" y="213360"/>
-                </a:lnTo>
-                <a:lnTo>
-                  <a:pt x="121920" y="213360"/>
-                </a:lnTo>
-                <a:cubicBezTo>
-                  <a:pt x="121920" y="221456"/>
-                  <a:pt x="125110" y="229219"/>
-                  <a:pt x="130825" y="234934"/>
-                </a:cubicBezTo>
-                <a:cubicBezTo>
-                  <a:pt x="136540" y="240649"/>
-                  <a:pt x="144303" y="243840"/>
-                  <a:pt x="152400" y="243840"/>
-                </a:cubicBezTo>
-                <a:cubicBezTo>
-                  <a:pt x="160496" y="243840"/>
-                  <a:pt x="168259" y="240649"/>
-                  <a:pt x="173974" y="234934"/>
-                </a:cubicBezTo>
-                <a:close/>
-              </a:path>
-            </a:pathLst>
-          </a:custGeom>
-          <a:solidFill>
-            <a:srgbClr val="D4A373"/>
-          </a:solidFill>
-          <a:ln>
-            <a:noFill/>
-          </a:ln>
-          <a:effectLst/>
-        </p:spPr>
-        <p:txBody>
-          <a:bodyPr/>
-          <a:p/>
-        </p:txBody>
-      </p:sp>
-      <p:sp>
-        <p:nvSpPr>
-          <p:cNvPr id="28" name="dsl:v3-title"/>
-          <p:cNvSpPr txBox="1"/>
-          <p:nvPr/>
-        </p:nvSpPr>
-        <p:spPr>
-          <a:xfrm>
-            <a:off x="8258175" y="1714500"/>
-            <a:ext cx="3171825" cy="247650"/>
-          </a:xfrm>
-          <a:prstGeom prst="rect">
-            <a:avLst/>
-          </a:prstGeom>
-          <a:noFill/>
-        </p:spPr>
-        <p:txBody>
-          <a:bodyPr wrap="none" anchor="ctr">
-            <a:noAutofit/>
-          </a:bodyPr>
-          <a:lstStyle/>
-          <a:p>
-            <a:pPr algn="l"/>
-            <a:r>
-              <a:rPr b="1" sz="1500" noProof="1">
-                <a:solidFill>
-                  <a:srgbClr val="2D6A6A"/>
-                </a:solidFill>
-                <a:latin typeface="Liter"/>
-                <a:ea typeface="Liter"/>
-              </a:rPr>
-              <a:t>Reduced Alert Fatigue</a:t>
-            </a:r>
-          </a:p>
-        </p:txBody>
-      </p:sp>
-      <p:sp>
-        <p:nvSpPr>
-          <p:cNvPr id="29" name="dsl:v3-desc"/>
-          <p:cNvSpPr txBox="1"/>
-          <p:nvPr/>
-        </p:nvSpPr>
-        <p:spPr>
-          <a:xfrm>
-            <a:off x="8258175" y="2038350"/>
-            <a:ext cx="3171825" cy="1428750"/>
-          </a:xfrm>
-          <a:prstGeom prst="rect">
-            <a:avLst/>
-          </a:prstGeom>
-          <a:noFill/>
-        </p:spPr>
-        <p:txBody>
-          <a:bodyPr wrap="square" anchor="t">
-            <a:noAutofit/>
-          </a:bodyPr>
-          <a:lstStyle/>
-          <a:p>
-            <a:pPr algn="l"/>
-            <a:r>
-              <a:rPr sz="1200" noProof="1">
-                <a:solidFill>
-                  <a:srgbClr val="2B2D2F"/>
-                </a:solidFill>
-                <a:latin typeface="QuattrocentoSans"/>
-                <a:ea typeface="QuattrocentoSans"/>
-              </a:rPr>
-              <a:t>Deduplication and Sigma noise filtering suppress repetitive and low-value alerts before they reach analysts.</a:t>
-            </a:r>
-          </a:p>
-        </p:txBody>
-      </p:sp>
-      <p:sp>
-        <p:nvSpPr>
-          <p:cNvPr id="30" name="dsl:v4-bg"/>
-          <p:cNvSpPr/>
-          <p:nvPr/>
-        </p:nvSpPr>
-        <p:spPr>
-          <a:xfrm>
-            <a:off x="571500" y="3790950"/>
-            <a:ext cx="3552825" cy="2476500"/>
-          </a:xfrm>
-          <a:prstGeom prst="rect">
-            <a:avLst/>
-          </a:prstGeom>
-          <a:solidFill>
-            <a:srgbClr val="F5F5F2"/>
-          </a:solidFill>
-          <a:ln>
-            <a:noFill/>
-          </a:ln>
-          <a:effectLst/>
-        </p:spPr>
-        <p:style>
-          <a:lnRef idx="1">
-            <a:schemeClr val="accent1"/>
-          </a:lnRef>
-          <a:fillRef idx="3">
-            <a:schemeClr val="accent1"/>
-          </a:fillRef>
-          <a:effectRef idx="2">
-            <a:schemeClr val="accent1"/>
-          </a:effectRef>
-          <a:fontRef idx="minor">
-            <a:schemeClr val="lt1"/>
-          </a:fontRef>
-        </p:style>
-        <p:txBody>
-          <a:bodyPr rtlCol="0" anchor="ctr"/>
-          <a:lstStyle/>
-          <a:p>
-            <a:pPr algn="ctr"/>
-          </a:p>
-        </p:txBody>
-      </p:sp>
-      <p:sp>
-        <p:nvSpPr>
-          <p:cNvPr id="31" name="dsl:v4-accent"/>
-          <p:cNvSpPr/>
-          <p:nvPr/>
-        </p:nvSpPr>
-        <p:spPr>
-          <a:xfrm>
-            <a:off x="571500" y="3790950"/>
-            <a:ext cx="3552825" cy="47625"/>
-          </a:xfrm>
-          <a:prstGeom prst="rect">
-            <a:avLst/>
-          </a:prstGeom>
-          <a:solidFill>
-            <a:srgbClr val="2D6A6A"/>
-          </a:solidFill>
-          <a:ln>
-            <a:noFill/>
-          </a:ln>
-          <a:effectLst/>
-        </p:spPr>
-        <p:style>
-          <a:lnRef idx="1">
-            <a:schemeClr val="accent1"/>
-          </a:lnRef>
-          <a:fillRef idx="3">
-            <a:schemeClr val="accent1"/>
-          </a:fillRef>
-          <a:effectRef idx="2">
-            <a:schemeClr val="accent1"/>
-          </a:effectRef>
-          <a:fontRef idx="minor">
-            <a:schemeClr val="lt1"/>
-          </a:fontRef>
-        </p:style>
-        <p:txBody>
-          <a:bodyPr rtlCol="0" anchor="ctr"/>
-          <a:lstStyle/>
-          <a:p>
-            <a:pPr algn="ctr"/>
-          </a:p>
-        </p:txBody>
-      </p:sp>
-      <p:sp>
-        <p:nvSpPr>
-          <p:cNvPr id="32" name="dsl:v4-icon|i=fas:eye"/>
-          <p:cNvSpPr/>
-          <p:nvPr/>
-        </p:nvSpPr>
-        <p:spPr>
-          <a:xfrm>
-            <a:off x="762000" y="3998383"/>
-            <a:ext cx="304800" cy="270933"/>
-          </a:xfrm>
-          <a:custGeom>
-            <a:avLst/>
-            <a:gdLst/>
-            <a:ahLst/>
-            <a:cxnLst/>
-            <a:rect l="l" t="t" r="r" b="b"/>
-            <a:pathLst>
-              <a:path w="304800" h="270933">
-                <a:moveTo>
-                  <a:pt x="152400" y="42333"/>
-                </a:moveTo>
-                <a:cubicBezTo>
-                  <a:pt x="117898" y="42333"/>
-                  <a:pt x="89534" y="57996"/>
-                  <a:pt x="67786" y="78157"/>
-                </a:cubicBezTo>
-                <a:cubicBezTo>
-                  <a:pt x="47413" y="97102"/>
-                  <a:pt x="33337" y="119591"/>
-                  <a:pt x="26140" y="135466"/>
-                </a:cubicBezTo>
-                <a:cubicBezTo>
-                  <a:pt x="33337" y="151341"/>
-                  <a:pt x="47413" y="173831"/>
-                  <a:pt x="67733" y="192775"/>
-                </a:cubicBezTo>
-                <a:cubicBezTo>
-                  <a:pt x="89534" y="212936"/>
-                  <a:pt x="117898" y="228599"/>
-                  <a:pt x="152400" y="228599"/>
-                </a:cubicBezTo>
-                <a:cubicBezTo>
-                  <a:pt x="186901" y="228599"/>
-                  <a:pt x="215265" y="212936"/>
-                  <a:pt x="237013" y="192775"/>
-                </a:cubicBezTo>
-                <a:cubicBezTo>
-                  <a:pt x="257386" y="173831"/>
-                  <a:pt x="271462" y="151341"/>
-                  <a:pt x="278659" y="135466"/>
-                </a:cubicBezTo>
-                <a:cubicBezTo>
-                  <a:pt x="271462" y="119591"/>
-                  <a:pt x="257386" y="97102"/>
-                  <a:pt x="237066" y="78157"/>
-                </a:cubicBezTo>
-                <a:cubicBezTo>
-                  <a:pt x="215265" y="57996"/>
-                  <a:pt x="186901" y="42333"/>
-                  <a:pt x="152400" y="42333"/>
-                </a:cubicBezTo>
-                <a:close/>
-                <a:moveTo>
-                  <a:pt x="50482" y="59584"/>
-                </a:moveTo>
-                <a:cubicBezTo>
-                  <a:pt x="75406" y="36406"/>
-                  <a:pt x="109643" y="16933"/>
-                  <a:pt x="152400" y="16933"/>
-                </a:cubicBezTo>
-                <a:cubicBezTo>
-                  <a:pt x="195156" y="16933"/>
-                  <a:pt x="229393" y="36406"/>
-                  <a:pt x="254317" y="59584"/>
-                </a:cubicBezTo>
-                <a:cubicBezTo>
-                  <a:pt x="279082" y="82602"/>
-                  <a:pt x="295645" y="110066"/>
-                  <a:pt x="303530" y="128957"/>
-                </a:cubicBezTo>
-                <a:cubicBezTo>
-                  <a:pt x="305276" y="133138"/>
-                  <a:pt x="305276" y="137794"/>
-                  <a:pt x="303530" y="141975"/>
-                </a:cubicBezTo>
-                <a:cubicBezTo>
-                  <a:pt x="295645" y="160866"/>
-                  <a:pt x="279082" y="188383"/>
-                  <a:pt x="254317" y="211349"/>
-                </a:cubicBezTo>
-                <a:cubicBezTo>
-                  <a:pt x="229393" y="234526"/>
-                  <a:pt x="195156" y="253999"/>
-                  <a:pt x="152400" y="253999"/>
-                </a:cubicBezTo>
-                <a:cubicBezTo>
-                  <a:pt x="109643" y="253999"/>
-                  <a:pt x="75406" y="234526"/>
-                  <a:pt x="50482" y="211349"/>
-                </a:cubicBezTo>
-                <a:cubicBezTo>
-                  <a:pt x="25717" y="188383"/>
-                  <a:pt x="9154" y="160866"/>
-                  <a:pt x="1322" y="141975"/>
-                </a:cubicBezTo>
-                <a:cubicBezTo>
-                  <a:pt x="-423" y="137795"/>
-                  <a:pt x="-423" y="133138"/>
-                  <a:pt x="1322" y="128957"/>
-                </a:cubicBezTo>
-                <a:cubicBezTo>
-                  <a:pt x="9154" y="110066"/>
-                  <a:pt x="25717" y="82550"/>
-                  <a:pt x="50482" y="59584"/>
-                </a:cubicBezTo>
-                <a:close/>
-                <a:moveTo>
-                  <a:pt x="152400" y="177800"/>
-                </a:moveTo>
-                <a:cubicBezTo>
-                  <a:pt x="175789" y="177800"/>
-                  <a:pt x="194733" y="158855"/>
-                  <a:pt x="194733" y="135466"/>
-                </a:cubicBezTo>
-                <a:cubicBezTo>
-                  <a:pt x="194733" y="112077"/>
-                  <a:pt x="175789" y="93133"/>
-                  <a:pt x="152400" y="93133"/>
-                </a:cubicBezTo>
-                <a:cubicBezTo>
-                  <a:pt x="156104" y="93133"/>
-                  <a:pt x="151712" y="93133"/>
-                  <a:pt x="151341" y="93133"/>
-                </a:cubicBezTo>
-                <a:cubicBezTo>
-                  <a:pt x="152029" y="95832"/>
-                  <a:pt x="152400" y="98689"/>
-                  <a:pt x="152400" y="101600"/>
-                </a:cubicBezTo>
-                <a:cubicBezTo>
-                  <a:pt x="152400" y="120279"/>
-                  <a:pt x="137212" y="135466"/>
-                  <a:pt x="118533" y="135466"/>
-                </a:cubicBezTo>
-                <a:cubicBezTo>
-                  <a:pt x="115622" y="135466"/>
-                  <a:pt x="112765" y="139170"/>
-                  <a:pt x="110066" y="134408"/>
-                </a:cubicBezTo>
-                <a:cubicBezTo>
-                  <a:pt x="110066" y="138112"/>
-                  <a:pt x="110066" y="135096"/>
-                  <a:pt x="110066" y="135466"/>
-                </a:cubicBezTo>
-                <a:cubicBezTo>
-                  <a:pt x="110066" y="158855"/>
-                  <a:pt x="129010" y="177800"/>
-                  <a:pt x="152400" y="177800"/>
-                </a:cubicBezTo>
-                <a:close/>
-                <a:moveTo>
-                  <a:pt x="152400" y="67733"/>
-                </a:moveTo>
-                <a:cubicBezTo>
-                  <a:pt x="189557" y="67733"/>
-                  <a:pt x="220133" y="98309"/>
-                  <a:pt x="220133" y="135466"/>
-                </a:cubicBezTo>
-                <a:cubicBezTo>
-                  <a:pt x="220133" y="172624"/>
-                  <a:pt x="189557" y="203200"/>
-                  <a:pt x="152400" y="203200"/>
-                </a:cubicBezTo>
-                <a:cubicBezTo>
-                  <a:pt x="115242" y="203200"/>
-                  <a:pt x="84666" y="172624"/>
-                  <a:pt x="84666" y="135466"/>
-                </a:cubicBezTo>
-                <a:cubicBezTo>
-                  <a:pt x="84666" y="98309"/>
-                  <a:pt x="115242" y="67733"/>
-                  <a:pt x="152400" y="67733"/>
-                </a:cubicBezTo>
-                <a:close/>
-              </a:path>
-            </a:pathLst>
-          </a:custGeom>
-          <a:solidFill>
-            <a:srgbClr val="2D6A6A"/>
-          </a:solidFill>
-          <a:ln>
-            <a:noFill/>
-          </a:ln>
-          <a:effectLst/>
-        </p:spPr>
-        <p:txBody>
-          <a:bodyPr/>
-          <a:p/>
-        </p:txBody>
-      </p:sp>
-      <p:sp>
-        <p:nvSpPr>
-          <p:cNvPr id="33" name="dsl:v4-title"/>
-          <p:cNvSpPr txBox="1"/>
-          <p:nvPr/>
-        </p:nvSpPr>
-        <p:spPr>
-          <a:xfrm>
-            <a:off x="762000" y="4381500"/>
-            <a:ext cx="3171825" cy="247650"/>
-          </a:xfrm>
-          <a:prstGeom prst="rect">
-            <a:avLst/>
-          </a:prstGeom>
-          <a:noFill/>
-        </p:spPr>
-        <p:txBody>
-          <a:bodyPr wrap="none" anchor="ctr">
-            <a:noAutofit/>
-          </a:bodyPr>
-          <a:lstStyle/>
-          <a:p>
-            <a:pPr algn="l"/>
-            <a:r>
-              <a:rPr b="1" sz="1500" noProof="1">
-                <a:solidFill>
-                  <a:srgbClr val="2D6A6A"/>
-                </a:solidFill>
-                <a:latin typeface="Liter"/>
-                <a:ea typeface="Liter"/>
-              </a:rPr>
-              <a:t>Stronger Visibility</a:t>
-            </a:r>
-          </a:p>
-        </p:txBody>
-      </p:sp>
-      <p:sp>
-        <p:nvSpPr>
-          <p:cNvPr id="34" name="dsl:v4-desc"/>
-          <p:cNvSpPr txBox="1"/>
-          <p:nvPr/>
-        </p:nvSpPr>
-        <p:spPr>
-          <a:xfrm>
-            <a:off x="762000" y="4705350"/>
-            <a:ext cx="3171825" cy="1428750"/>
-          </a:xfrm>
-          <a:prstGeom prst="rect">
-            <a:avLst/>
-          </a:prstGeom>
-          <a:noFill/>
-        </p:spPr>
-        <p:txBody>
-          <a:bodyPr wrap="square" anchor="t">
-            <a:noAutofit/>
-          </a:bodyPr>
-          <a:lstStyle/>
-          <a:p>
-            <a:pPr algn="l"/>
-            <a:r>
-              <a:rPr sz="1200" noProof="1">
-                <a:solidFill>
-                  <a:srgbClr val="2B2D2F"/>
-                </a:solidFill>
-                <a:latin typeface="QuattrocentoSans"/>
-                <a:ea typeface="QuattrocentoSans"/>
-              </a:rPr>
-              <a:t>Network + host + runtime + metrics in a unified monitoring stack. No blind spots across the attack surface.</a:t>
-            </a:r>
-          </a:p>
-        </p:txBody>
-      </p:sp>
-      <p:sp>
-        <p:nvSpPr>
-          <p:cNvPr id="35" name="dsl:v5-bg"/>
-          <p:cNvSpPr/>
-          <p:nvPr/>
-        </p:nvSpPr>
-        <p:spPr>
-          <a:xfrm>
-            <a:off x="4314825" y="3790950"/>
-            <a:ext cx="3562350" cy="2476500"/>
-          </a:xfrm>
-          <a:prstGeom prst="rect">
-            <a:avLst/>
-          </a:prstGeom>
-          <a:solidFill>
-            <a:srgbClr val="F5F5F2"/>
-          </a:solidFill>
-          <a:ln>
-            <a:noFill/>
-          </a:ln>
-          <a:effectLst/>
-        </p:spPr>
-        <p:style>
-          <a:lnRef idx="1">
-            <a:schemeClr val="accent1"/>
-          </a:lnRef>
-          <a:fillRef idx="3">
-            <a:schemeClr val="accent1"/>
-          </a:fillRef>
-          <a:effectRef idx="2">
-            <a:schemeClr val="accent1"/>
-          </a:effectRef>
-          <a:fontRef idx="minor">
-            <a:schemeClr val="lt1"/>
-          </a:fontRef>
-        </p:style>
-        <p:txBody>
-          <a:bodyPr rtlCol="0" anchor="ctr"/>
-          <a:lstStyle/>
-          <a:p>
-            <a:pPr algn="ctr"/>
-          </a:p>
-        </p:txBody>
-      </p:sp>
-      <p:sp>
-        <p:nvSpPr>
-          <p:cNvPr id="36" name="dsl:v5-accent"/>
-          <p:cNvSpPr/>
-          <p:nvPr/>
-        </p:nvSpPr>
-        <p:spPr>
-          <a:xfrm>
-            <a:off x="4314825" y="3790950"/>
-            <a:ext cx="3562350" cy="47625"/>
-          </a:xfrm>
-          <a:prstGeom prst="rect">
-            <a:avLst/>
-          </a:prstGeom>
-          <a:solidFill>
-            <a:srgbClr val="2D6A6A"/>
-          </a:solidFill>
-          <a:ln>
-            <a:noFill/>
-          </a:ln>
-          <a:effectLst/>
-        </p:spPr>
-        <p:style>
-          <a:lnRef idx="1">
-            <a:schemeClr val="accent1"/>
-          </a:lnRef>
-          <a:fillRef idx="3">
-            <a:schemeClr val="accent1"/>
-          </a:fillRef>
-          <a:effectRef idx="2">
-            <a:schemeClr val="accent1"/>
-          </a:effectRef>
-          <a:fontRef idx="minor">
-            <a:schemeClr val="lt1"/>
-          </a:fontRef>
-        </p:style>
-        <p:txBody>
-          <a:bodyPr rtlCol="0" anchor="ctr"/>
-          <a:lstStyle/>
-          <a:p>
-            <a:pPr algn="ctr"/>
-          </a:p>
-        </p:txBody>
-      </p:sp>
-      <p:sp>
-        <p:nvSpPr>
-          <p:cNvPr id="37" name="dsl:v5-icon|i=fas:shield-halved"/>
-          <p:cNvSpPr/>
-          <p:nvPr/>
-        </p:nvSpPr>
-        <p:spPr>
-          <a:xfrm>
-            <a:off x="4505325" y="3981450"/>
-            <a:ext cx="304800" cy="304800"/>
-          </a:xfrm>
-          <a:custGeom>
-            <a:avLst/>
-            <a:gdLst/>
-            <a:ahLst/>
-            <a:cxnLst/>
-            <a:rect l="l" t="t" r="r" b="b"/>
-            <a:pathLst>
-              <a:path w="304800" h="304800">
-                <a:moveTo>
-                  <a:pt x="152400" y="0"/>
-                </a:moveTo>
-                <a:cubicBezTo>
-                  <a:pt x="155138" y="0"/>
-                  <a:pt x="157876" y="595"/>
-                  <a:pt x="160377" y="1726"/>
-                </a:cubicBezTo>
-                <a:lnTo>
-                  <a:pt x="272474" y="49291"/>
-                </a:lnTo>
-                <a:cubicBezTo>
-                  <a:pt x="285571" y="54828"/>
-                  <a:pt x="295334" y="67746"/>
-                  <a:pt x="295275" y="83343"/>
-                </a:cubicBezTo>
-                <a:cubicBezTo>
-                  <a:pt x="298251" y="142398"/>
-                  <a:pt x="270688" y="250447"/>
-                  <a:pt x="168116" y="299561"/>
-                </a:cubicBezTo>
-                <a:cubicBezTo>
-                  <a:pt x="158174" y="304323"/>
-                  <a:pt x="146625" y="304323"/>
-                  <a:pt x="136683" y="299561"/>
-                </a:cubicBezTo>
-                <a:cubicBezTo>
-                  <a:pt x="34111" y="250447"/>
-                  <a:pt x="9822" y="142398"/>
-                  <a:pt x="9525" y="83343"/>
-                </a:cubicBezTo>
-                <a:cubicBezTo>
-                  <a:pt x="10120" y="67746"/>
-                  <a:pt x="19228" y="54828"/>
-                  <a:pt x="32325" y="49291"/>
-                </a:cubicBezTo>
-                <a:lnTo>
-                  <a:pt x="144482" y="1726"/>
-                </a:lnTo>
-                <a:cubicBezTo>
-                  <a:pt x="146923" y="595"/>
-                  <a:pt x="149661" y="0"/>
-                  <a:pt x="152400" y="0"/>
-                </a:cubicBezTo>
-                <a:close/>
-                <a:moveTo>
-                  <a:pt x="152400" y="39766"/>
-                </a:moveTo>
-                <a:lnTo>
-                  <a:pt x="152400" y="264795"/>
-                </a:lnTo>
-                <a:cubicBezTo>
-                  <a:pt x="234553" y="225028"/>
-                  <a:pt x="256639" y="136981"/>
-                  <a:pt x="257175" y="84177"/>
-                </a:cubicBezTo>
-                <a:lnTo>
-                  <a:pt x="152400" y="39766"/>
-                </a:lnTo>
-                <a:lnTo>
-                  <a:pt x="152400" y="39766"/>
-                </a:lnTo>
-                <a:close/>
-              </a:path>
-            </a:pathLst>
-          </a:custGeom>
-          <a:solidFill>
-            <a:srgbClr val="2D6A6A"/>
-          </a:solidFill>
-          <a:ln>
-            <a:noFill/>
-          </a:ln>
-          <a:effectLst/>
-        </p:spPr>
-        <p:txBody>
-          <a:bodyPr/>
-          <a:p/>
-        </p:txBody>
-      </p:sp>
-      <p:sp>
-        <p:nvSpPr>
-          <p:cNvPr id="38" name="dsl:v5-title"/>
-          <p:cNvSpPr txBox="1"/>
-          <p:nvPr/>
-        </p:nvSpPr>
-        <p:spPr>
-          <a:xfrm>
-            <a:off x="4505325" y="4381500"/>
-            <a:ext cx="3181350" cy="247650"/>
-          </a:xfrm>
-          <a:prstGeom prst="rect">
-            <a:avLst/>
-          </a:prstGeom>
-          <a:noFill/>
-        </p:spPr>
-        <p:txBody>
-          <a:bodyPr wrap="none" anchor="ctr">
-            <a:noAutofit/>
-          </a:bodyPr>
-          <a:lstStyle/>
-          <a:p>
-            <a:pPr algn="l"/>
-            <a:r>
-              <a:rPr b="1" sz="1500" noProof="1">
-                <a:solidFill>
-                  <a:srgbClr val="2D6A6A"/>
-                </a:solidFill>
-                <a:latin typeface="Liter"/>
-                <a:ea typeface="Liter"/>
-              </a:rPr>
-              <a:t>Consistent Response</a:t>
-            </a:r>
-          </a:p>
-        </p:txBody>
-      </p:sp>
-      <p:sp>
-        <p:nvSpPr>
-          <p:cNvPr id="39" name="dsl:v5-desc"/>
-          <p:cNvSpPr txBox="1"/>
-          <p:nvPr/>
-        </p:nvSpPr>
-        <p:spPr>
-          <a:xfrm>
-            <a:off x="4505325" y="4705350"/>
-            <a:ext cx="3181350" cy="1428750"/>
-          </a:xfrm>
-          <a:prstGeom prst="rect">
-            <a:avLst/>
-          </a:prstGeom>
-          <a:noFill/>
-        </p:spPr>
-        <p:txBody>
-          <a:bodyPr wrap="square" anchor="t">
-            <a:noAutofit/>
-          </a:bodyPr>
-          <a:lstStyle/>
-          <a:p>
-            <a:pPr algn="l"/>
-            <a:r>
-              <a:rPr sz="1200" noProof="1">
-                <a:solidFill>
-                  <a:srgbClr val="2B2D2F"/>
-                </a:solidFill>
-                <a:latin typeface="QuattrocentoSans"/>
-                <a:ea typeface="QuattrocentoSans"/>
-              </a:rPr>
-              <a:t>Approval-gated Ansible playbooks with verification ensure every response follows the same controlled process.</a:t>
-            </a:r>
-          </a:p>
-        </p:txBody>
-      </p:sp>
-      <p:sp>
-        <p:nvSpPr>
-          <p:cNvPr id="40" name="dsl:v6-bg"/>
-          <p:cNvSpPr/>
-          <p:nvPr/>
-        </p:nvSpPr>
-        <p:spPr>
-          <a:xfrm>
-            <a:off x="8067675" y="3790950"/>
-            <a:ext cx="3552825" cy="2476500"/>
-          </a:xfrm>
-          <a:prstGeom prst="rect">
-            <a:avLst/>
-          </a:prstGeom>
-          <a:solidFill>
-            <a:srgbClr val="F5F5F2"/>
-          </a:solidFill>
-          <a:ln>
-            <a:noFill/>
-          </a:ln>
-          <a:effectLst/>
-        </p:spPr>
-        <p:style>
-          <a:lnRef idx="1">
-            <a:schemeClr val="accent1"/>
-          </a:lnRef>
-          <a:fillRef idx="3">
-            <a:schemeClr val="accent1"/>
-          </a:fillRef>
-          <a:effectRef idx="2">
-            <a:schemeClr val="accent1"/>
-          </a:effectRef>
-          <a:fontRef idx="minor">
-            <a:schemeClr val="lt1"/>
-          </a:fontRef>
-        </p:style>
-        <p:txBody>
-          <a:bodyPr rtlCol="0" anchor="ctr"/>
-          <a:lstStyle/>
-          <a:p>
-            <a:pPr algn="ctr"/>
-          </a:p>
-        </p:txBody>
-      </p:sp>
-      <p:sp>
-        <p:nvSpPr>
-          <p:cNvPr id="41" name="dsl:v6-accent"/>
-          <p:cNvSpPr/>
-          <p:nvPr/>
-        </p:nvSpPr>
-        <p:spPr>
-          <a:xfrm>
-            <a:off x="8067675" y="3790950"/>
-            <a:ext cx="3552825" cy="47625"/>
-          </a:xfrm>
-          <a:prstGeom prst="rect">
-            <a:avLst/>
-          </a:prstGeom>
-          <a:solidFill>
-            <a:srgbClr val="2D6A6A"/>
-          </a:solidFill>
-          <a:ln>
-            <a:noFill/>
-          </a:ln>
-          <a:effectLst/>
-        </p:spPr>
-        <p:style>
-          <a:lnRef idx="1">
-            <a:schemeClr val="accent1"/>
-          </a:lnRef>
-          <a:fillRef idx="3">
-            <a:schemeClr val="accent1"/>
-          </a:fillRef>
-          <a:effectRef idx="2">
-            <a:schemeClr val="accent1"/>
-          </a:effectRef>
-          <a:fontRef idx="minor">
-            <a:schemeClr val="lt1"/>
-          </a:fontRef>
-        </p:style>
-        <p:txBody>
-          <a:bodyPr rtlCol="0" anchor="ctr"/>
-          <a:lstStyle/>
-          <a:p>
-            <a:pPr algn="ctr"/>
-          </a:p>
-        </p:txBody>
-      </p:sp>
-      <p:sp>
-        <p:nvSpPr>
-          <p:cNvPr id="42" name="dsl:v6-icon|i=fas:chart-line"/>
-          <p:cNvSpPr/>
-          <p:nvPr/>
-        </p:nvSpPr>
-        <p:spPr>
-          <a:xfrm>
-            <a:off x="8258175" y="3981450"/>
-            <a:ext cx="304800" cy="304800"/>
-          </a:xfrm>
-          <a:custGeom>
-            <a:avLst/>
-            <a:gdLst/>
-            <a:ahLst/>
-            <a:cxnLst/>
-            <a:rect l="l" t="t" r="r" b="b"/>
-            <a:pathLst>
-              <a:path w="304800" h="304800">
-                <a:moveTo>
-                  <a:pt x="38100" y="38100"/>
-                </a:moveTo>
-                <a:cubicBezTo>
-                  <a:pt x="38100" y="27562"/>
-                  <a:pt x="29587" y="19050"/>
-                  <a:pt x="19050" y="19050"/>
-                </a:cubicBezTo>
-                <a:cubicBezTo>
-                  <a:pt x="8512" y="19050"/>
-                  <a:pt x="0" y="27562"/>
-                  <a:pt x="0" y="38100"/>
-                </a:cubicBezTo>
-                <a:lnTo>
-                  <a:pt x="0" y="238125"/>
-                </a:lnTo>
-                <a:cubicBezTo>
-                  <a:pt x="0" y="264437"/>
-                  <a:pt x="21312" y="285750"/>
-                  <a:pt x="47625" y="285750"/>
-                </a:cubicBezTo>
-                <a:lnTo>
-                  <a:pt x="285750" y="285750"/>
-                </a:lnTo>
-                <a:cubicBezTo>
-                  <a:pt x="296287" y="285750"/>
-                  <a:pt x="304800" y="277237"/>
-                  <a:pt x="304800" y="266700"/>
-                </a:cubicBezTo>
-                <a:cubicBezTo>
-                  <a:pt x="304800" y="256162"/>
-                  <a:pt x="296287" y="247650"/>
-                  <a:pt x="285750" y="247650"/>
-                </a:cubicBezTo>
-                <a:lnTo>
-                  <a:pt x="47625" y="247650"/>
-                </a:lnTo>
-                <a:cubicBezTo>
-                  <a:pt x="42386" y="247650"/>
-                  <a:pt x="38100" y="243363"/>
-                  <a:pt x="38100" y="238125"/>
-                </a:cubicBezTo>
-                <a:lnTo>
-                  <a:pt x="38100" y="38100"/>
-                </a:lnTo>
-                <a:close/>
-                <a:moveTo>
-                  <a:pt x="280154" y="89654"/>
-                </a:moveTo>
-                <a:cubicBezTo>
-                  <a:pt x="287595" y="82212"/>
-                  <a:pt x="287595" y="70127"/>
-                  <a:pt x="280154" y="62686"/>
-                </a:cubicBezTo>
-                <a:cubicBezTo>
-                  <a:pt x="272712" y="55245"/>
-                  <a:pt x="260627" y="55245"/>
-                  <a:pt x="253186" y="62686"/>
-                </a:cubicBezTo>
-                <a:lnTo>
-                  <a:pt x="190500" y="125432"/>
-                </a:lnTo>
-                <a:lnTo>
-                  <a:pt x="156329" y="91261"/>
-                </a:lnTo>
-                <a:cubicBezTo>
-                  <a:pt x="148887" y="83819"/>
-                  <a:pt x="136802" y="83819"/>
-                  <a:pt x="129361" y="91261"/>
-                </a:cubicBezTo>
-                <a:lnTo>
-                  <a:pt x="62686" y="157936"/>
-                </a:lnTo>
-                <a:cubicBezTo>
-                  <a:pt x="55245" y="165377"/>
-                  <a:pt x="55245" y="177462"/>
-                  <a:pt x="62686" y="184904"/>
-                </a:cubicBezTo>
-                <a:cubicBezTo>
-                  <a:pt x="70127" y="192345"/>
-                  <a:pt x="82212" y="192345"/>
-                  <a:pt x="89654" y="184904"/>
-                </a:cubicBezTo>
-                <a:lnTo>
-                  <a:pt x="142875" y="131742"/>
-                </a:lnTo>
-                <a:lnTo>
-                  <a:pt x="177045" y="165913"/>
-                </a:lnTo>
-                <a:cubicBezTo>
-                  <a:pt x="184487" y="173355"/>
-                  <a:pt x="196572" y="173355"/>
-                  <a:pt x="204013" y="165913"/>
-                </a:cubicBezTo>
-                <a:lnTo>
-                  <a:pt x="280213" y="89713"/>
-                </a:lnTo>
-                <a:close/>
-              </a:path>
-            </a:pathLst>
-          </a:custGeom>
-          <a:solidFill>
-            <a:srgbClr val="2D6A6A"/>
-          </a:solidFill>
-          <a:ln>
-            <a:noFill/>
-          </a:ln>
-          <a:effectLst/>
-        </p:spPr>
-        <p:txBody>
-          <a:bodyPr/>
-          <a:p/>
-        </p:txBody>
-      </p:sp>
-      <p:sp>
-        <p:nvSpPr>
-          <p:cNvPr id="43" name="dsl:v6-title"/>
-          <p:cNvSpPr txBox="1"/>
-          <p:nvPr/>
-        </p:nvSpPr>
-        <p:spPr>
-          <a:xfrm>
-            <a:off x="8258175" y="4381500"/>
-            <a:ext cx="3171825" cy="247650"/>
-          </a:xfrm>
-          <a:prstGeom prst="rect">
-            <a:avLst/>
-          </a:prstGeom>
-          <a:noFill/>
-        </p:spPr>
-        <p:txBody>
-          <a:bodyPr wrap="none" anchor="ctr">
-            <a:noAutofit/>
-          </a:bodyPr>
-          <a:lstStyle/>
-          <a:p>
-            <a:pPr algn="l"/>
-            <a:r>
-              <a:rPr b="1" sz="1500" noProof="1">
-                <a:solidFill>
-                  <a:srgbClr val="2D6A6A"/>
-                </a:solidFill>
-                <a:latin typeface="Liter"/>
-                <a:ea typeface="Liter"/>
-              </a:rPr>
-              <a:t>Improved Efficiency</a:t>
-            </a:r>
-          </a:p>
-        </p:txBody>
-      </p:sp>
-      <p:sp>
-        <p:nvSpPr>
-          <p:cNvPr id="44" name="dsl:v6-desc"/>
-          <p:cNvSpPr txBox="1"/>
-          <p:nvPr/>
-        </p:nvSpPr>
-        <p:spPr>
-          <a:xfrm>
-            <a:off x="8258175" y="4705350"/>
-            <a:ext cx="3171825" cy="1428750"/>
-          </a:xfrm>
-          <a:prstGeom prst="rect">
-            <a:avLst/>
-          </a:prstGeom>
-          <a:noFill/>
-        </p:spPr>
-        <p:txBody>
-          <a:bodyPr wrap="square" anchor="t">
-            <a:noAutofit/>
-          </a:bodyPr>
-          <a:lstStyle/>
-          <a:p>
-            <a:pPr algn="l"/>
-            <a:r>
-              <a:rPr sz="1200" noProof="1">
-                <a:solidFill>
-                  <a:srgbClr val="2B2D2F"/>
-                </a:solidFill>
-                <a:latin typeface="QuattrocentoSans"/>
-                <a:ea typeface="QuattrocentoSans"/>
-              </a:rPr>
-              <a:t>Analysts focus on decisions, not repetitive tasks. The platform handles correlation, enrichment, and documentation.</a:t>
-            </a:r>
-          </a:p>
-        </p:txBody>
-      </p:sp>
-      <p:sp>
-        <p:nvSpPr>
-          <p:cNvPr id="45" name="dsl:metrics-bg"/>
-          <p:cNvSpPr/>
-          <p:nvPr/>
-        </p:nvSpPr>
-        <p:spPr>
-          <a:xfrm>
-            <a:off x="571500" y="6400800"/>
-            <a:ext cx="11049000" cy="171450"/>
-          </a:xfrm>
-          <a:prstGeom prst="rect">
-            <a:avLst/>
-          </a:prstGeom>
-          <a:solidFill>
-            <a:srgbClr val="2D6A6A"/>
-          </a:solidFill>
-          <a:ln>
-            <a:noFill/>
-          </a:ln>
-          <a:effectLst/>
-        </p:spPr>
-        <p:style>
-          <a:lnRef idx="1">
-            <a:schemeClr val="accent1"/>
-          </a:lnRef>
-          <a:fillRef idx="3">
-            <a:schemeClr val="accent1"/>
-          </a:fillRef>
-          <a:effectRef idx="2">
-            <a:schemeClr val="accent1"/>
-          </a:effectRef>
-          <a:fontRef idx="minor">
-            <a:schemeClr val="lt1"/>
-          </a:fontRef>
-        </p:style>
-        <p:txBody>
-          <a:bodyPr rtlCol="0" anchor="ctr"/>
-          <a:lstStyle/>
-          <a:p>
-            <a:pPr algn="ctr"/>
-          </a:p>
-        </p:txBody>
-      </p:sp>
-      <p:sp>
-        <p:nvSpPr>
-          <p:cNvPr id="46" name="dsl:metrics-text"/>
-          <p:cNvSpPr txBox="1"/>
-          <p:nvPr/>
-        </p:nvSpPr>
-        <p:spPr>
-          <a:xfrm>
-            <a:off x="571500" y="6400800"/>
-            <a:ext cx="11049000" cy="171450"/>
-          </a:xfrm>
-          <a:prstGeom prst="rect">
-            <a:avLst/>
-          </a:prstGeom>
-          <a:noFill/>
-        </p:spPr>
-        <p:txBody>
-          <a:bodyPr wrap="none" anchor="ctr">
-            <a:noAutofit/>
-          </a:bodyPr>
-          <a:lstStyle/>
-          <a:p>
-            <a:pPr algn="ctr"/>
-            <a:r>
-              <a:rPr sz="825" noProof="1" spc="75">
-                <a:solidFill>
-                  <a:srgbClr val="FFFFFF"/>
-                </a:solidFill>
-                <a:latin typeface="Liter"/>
-                <a:ea typeface="Liter"/>
-              </a:rPr>
-              <a:t>910 TESTS (MAY ACCEPTANCE)  |  146 MODULES  |  12-STEP PIPELINE  |  MULTI-SERVER DEPLOYMENT</a:t>
-            </a:r>
-          </a:p>
-        </p:txBody>
-      </p:sp>
-      <p:sp>
-        <p:nvSpPr>
-          <p:cNvPr id="47" name="dsl:footer-author"/>
-          <p:cNvSpPr txBox="1"/>
-          <p:nvPr/>
-        </p:nvSpPr>
-        <p:spPr>
-          <a:xfrm>
-            <a:off x="571500" y="6629400"/>
-            <a:ext cx="1905000" cy="152400"/>
-          </a:xfrm>
-          <a:prstGeom prst="rect">
-            <a:avLst/>
-          </a:prstGeom>
-          <a:noFill/>
-        </p:spPr>
-        <p:txBody>
-          <a:bodyPr wrap="none" anchor="ctr">
-            <a:noAutofit/>
-          </a:bodyPr>
-          <a:lstStyle/>
-          <a:p>
-            <a:pPr algn="l"/>
-            <a:r>
-              <a:rPr sz="825" noProof="1" spc="75">
-                <a:solidFill>
-                  <a:srgbClr val="5C6B73"/>
-                </a:solidFill>
-                <a:latin typeface="Liter"/>
-                <a:ea typeface="Liter"/>
-              </a:rPr>
-              <a:t>GHAZI MABROUKI</a:t>
-            </a:r>
-          </a:p>
-        </p:txBody>
-      </p:sp>
-      <p:sp>
-        <p:nvSpPr>
-          <p:cNvPr id="48" name="dsl:footer-page"/>
-          <p:cNvSpPr txBox="1"/>
-          <p:nvPr/>
-        </p:nvSpPr>
-        <p:spPr>
-          <a:xfrm>
-            <a:off x="11334750" y="6629400"/>
-            <a:ext cx="381000" cy="152400"/>
-          </a:xfrm>
-          <a:prstGeom prst="rect">
-            <a:avLst/>
-          </a:prstGeom>
-          <a:noFill/>
-        </p:spPr>
-        <p:txBody>
-          <a:bodyPr wrap="none" anchor="ctr">
-            <a:noAutofit/>
-          </a:bodyPr>
-          <a:lstStyle/>
-          <a:p>
-            <a:pPr algn="r"/>
-            <a:r>
-              <a:rPr sz="900" noProof="1">
-                <a:solidFill>
-                  <a:srgbClr val="5C6B73"/>
-                </a:solidFill>
-                <a:latin typeface="Liter"/>
-                <a:ea typeface="Liter"/>
-              </a:rPr>
               <a:t>30</a:t>
             </a:r>
           </a:p>
@@ -38869,6 +36749,2718 @@
       <p:grpSpPr/>
       <p:sp>
         <p:nvSpPr>
+          <p:cNvPr id="2" name="dsl:ch8-number-decorative"/>
+          <p:cNvSpPr txBox="1"/>
+          <p:nvPr/>
+        </p:nvSpPr>
+        <p:spPr>
+          <a:xfrm>
+            <a:off x="381000" y="571500"/>
+            <a:ext cx="4381500" cy="2476500"/>
+          </a:xfrm>
+          <a:prstGeom prst="rect">
+            <a:avLst/>
+          </a:prstGeom>
+          <a:noFill/>
+        </p:spPr>
+        <p:txBody>
+          <a:bodyPr wrap="none" anchor="t">
+            <a:noAutofit/>
+          </a:bodyPr>
+          <a:lstStyle/>
+          <a:p>
+            <a:pPr algn="l"/>
+            <a:r>
+              <a:rPr sz="15000" noProof="1">
+                <a:solidFill>
+                  <a:srgbClr val="2D6A6A"/>
+                </a:solidFill>
+                <a:latin typeface="Liter"/>
+                <a:ea typeface="Liter"/>
+              </a:rPr>
+              <a:t>08</a:t>
+            </a:r>
+          </a:p>
+        </p:txBody>
+      </p:sp>
+      <p:sp>
+        <p:nvSpPr>
+          <p:cNvPr id="3" name="dsl:ch8-accent-bar"/>
+          <p:cNvSpPr/>
+          <p:nvPr/>
+        </p:nvSpPr>
+        <p:spPr>
+          <a:xfrm>
+            <a:off x="571500" y="3238500"/>
+            <a:ext cx="762000" cy="38100"/>
+          </a:xfrm>
+          <a:prstGeom prst="rect">
+            <a:avLst/>
+          </a:prstGeom>
+          <a:solidFill>
+            <a:srgbClr val="D4A373"/>
+          </a:solidFill>
+          <a:ln>
+            <a:noFill/>
+          </a:ln>
+          <a:effectLst/>
+        </p:spPr>
+        <p:style>
+          <a:lnRef idx="1">
+            <a:schemeClr val="accent1"/>
+          </a:lnRef>
+          <a:fillRef idx="3">
+            <a:schemeClr val="accent1"/>
+          </a:fillRef>
+          <a:effectRef idx="2">
+            <a:schemeClr val="accent1"/>
+          </a:effectRef>
+          <a:fontRef idx="minor">
+            <a:schemeClr val="lt1"/>
+          </a:fontRef>
+        </p:style>
+        <p:txBody>
+          <a:bodyPr rtlCol="0" anchor="ctr"/>
+          <a:lstStyle/>
+          <a:p>
+            <a:pPr algn="ctr"/>
+          </a:p>
+        </p:txBody>
+      </p:sp>
+      <p:sp>
+        <p:nvSpPr>
+          <p:cNvPr id="4" name="dsl:ch8-title"/>
+          <p:cNvSpPr txBox="1"/>
+          <p:nvPr/>
+        </p:nvSpPr>
+        <p:spPr>
+          <a:xfrm>
+            <a:off x="571500" y="3429000"/>
+            <a:ext cx="8572500" cy="523875"/>
+          </a:xfrm>
+          <a:prstGeom prst="rect">
+            <a:avLst/>
+          </a:prstGeom>
+          <a:noFill/>
+        </p:spPr>
+        <p:txBody>
+          <a:bodyPr wrap="none" anchor="ctr">
+            <a:noAutofit/>
+          </a:bodyPr>
+          <a:lstStyle/>
+          <a:p>
+            <a:pPr algn="l"/>
+            <a:r>
+              <a:rPr sz="2850" noProof="1">
+                <a:solidFill>
+                  <a:srgbClr val="2D6A6A"/>
+                </a:solidFill>
+                <a:latin typeface="Liter"/>
+                <a:ea typeface="Liter"/>
+              </a:rPr>
+              <a:t>08 — Value &amp; Roadmap</a:t>
+            </a:r>
+          </a:p>
+        </p:txBody>
+      </p:sp>
+      <p:sp>
+        <p:nvSpPr>
+          <p:cNvPr id="5" name="dsl:ch8-subtitle"/>
+          <p:cNvSpPr txBox="1"/>
+          <p:nvPr/>
+        </p:nvSpPr>
+        <p:spPr>
+          <a:xfrm>
+            <a:off x="571500" y="4095750"/>
+            <a:ext cx="8572500" cy="333375"/>
+          </a:xfrm>
+          <a:prstGeom prst="rect">
+            <a:avLst/>
+          </a:prstGeom>
+          <a:noFill/>
+        </p:spPr>
+        <p:txBody>
+          <a:bodyPr wrap="none" anchor="ctr">
+            <a:noAutofit/>
+          </a:bodyPr>
+          <a:lstStyle/>
+          <a:p>
+            <a:pPr algn="l"/>
+            <a:r>
+              <a:rPr sz="1500" noProof="1">
+                <a:solidFill>
+                  <a:srgbClr val="5C6B73"/>
+                </a:solidFill>
+                <a:latin typeface="QuattrocentoSans"/>
+                <a:ea typeface="QuattrocentoSans"/>
+              </a:rPr>
+              <a:t>From prototype to production-ready SOC platform</a:t>
+            </a:r>
+          </a:p>
+        </p:txBody>
+      </p:sp>
+    </p:spTree>
+  </p:cSld>
+  <p:clrMapOvr>
+    <a:masterClrMapping/>
+  </p:clrMapOvr>
+</p:sld>
+</file>
+
+<file path=ppt/slides/slide32.xml><?xml version="1.0" encoding="utf-8"?>
+<p:sld xmlns:a="http://schemas.openxmlformats.org/drawingml/2006/main" xmlns:p="http://schemas.openxmlformats.org/presentationml/2006/main" xmlns:r="http://schemas.openxmlformats.org/officeDocument/2006/relationships">
+  <p:cSld>
+    <p:bg>
+      <p:bgPr>
+        <a:solidFill>
+          <a:srgbClr val="FAFAF8"/>
+        </a:solidFill>
+        <a:effectLst/>
+      </p:bgPr>
+    </p:bg>
+    <p:spTree>
+      <p:nvGrpSpPr>
+        <p:cNvPr id="1" name=""/>
+        <p:cNvGrpSpPr/>
+        <p:nvPr/>
+      </p:nvGrpSpPr>
+      <p:grpSpPr/>
+      <p:sp>
+        <p:nvSpPr>
+          <p:cNvPr id="2" name="dsl:nav-bg"/>
+          <p:cNvSpPr/>
+          <p:nvPr/>
+        </p:nvSpPr>
+        <p:spPr>
+          <a:xfrm>
+            <a:off x="0" y="0"/>
+            <a:ext cx="12192000" cy="304800"/>
+          </a:xfrm>
+          <a:prstGeom prst="rect">
+            <a:avLst/>
+          </a:prstGeom>
+          <a:solidFill>
+            <a:srgbClr val="2D6A6A"/>
+          </a:solidFill>
+          <a:ln>
+            <a:noFill/>
+          </a:ln>
+          <a:effectLst/>
+        </p:spPr>
+        <p:style>
+          <a:lnRef idx="1">
+            <a:schemeClr val="accent1"/>
+          </a:lnRef>
+          <a:fillRef idx="3">
+            <a:schemeClr val="accent1"/>
+          </a:fillRef>
+          <a:effectRef idx="2">
+            <a:schemeClr val="accent1"/>
+          </a:effectRef>
+          <a:fontRef idx="minor">
+            <a:schemeClr val="lt1"/>
+          </a:fontRef>
+        </p:style>
+        <p:txBody>
+          <a:bodyPr rtlCol="0" anchor="ctr"/>
+          <a:lstStyle/>
+          <a:p>
+            <a:pPr algn="ctr"/>
+          </a:p>
+        </p:txBody>
+      </p:sp>
+      <p:sp>
+        <p:nvSpPr>
+          <p:cNvPr id="3" name="dsl:nav-active-underline"/>
+          <p:cNvSpPr/>
+          <p:nvPr/>
+        </p:nvSpPr>
+        <p:spPr>
+          <a:xfrm>
+            <a:off x="11049000" y="276225"/>
+            <a:ext cx="762000" cy="28575"/>
+          </a:xfrm>
+          <a:prstGeom prst="rect">
+            <a:avLst/>
+          </a:prstGeom>
+          <a:solidFill>
+            <a:srgbClr val="D4A373"/>
+          </a:solidFill>
+          <a:ln>
+            <a:noFill/>
+          </a:ln>
+          <a:effectLst/>
+        </p:spPr>
+        <p:style>
+          <a:lnRef idx="1">
+            <a:schemeClr val="accent1"/>
+          </a:lnRef>
+          <a:fillRef idx="3">
+            <a:schemeClr val="accent1"/>
+          </a:fillRef>
+          <a:effectRef idx="2">
+            <a:schemeClr val="accent1"/>
+          </a:effectRef>
+          <a:fontRef idx="minor">
+            <a:schemeClr val="lt1"/>
+          </a:fontRef>
+        </p:style>
+        <p:txBody>
+          <a:bodyPr rtlCol="0" anchor="ctr"/>
+          <a:lstStyle/>
+          <a:p>
+            <a:pPr algn="ctr"/>
+          </a:p>
+        </p:txBody>
+      </p:sp>
+      <p:sp>
+        <p:nvSpPr>
+          <p:cNvPr id="4" name="dsl:nav-1"/>
+          <p:cNvSpPr txBox="1"/>
+          <p:nvPr/>
+        </p:nvSpPr>
+        <p:spPr>
+          <a:xfrm>
+            <a:off x="0" y="0"/>
+            <a:ext cx="1524000" cy="304800"/>
+          </a:xfrm>
+          <a:prstGeom prst="rect">
+            <a:avLst/>
+          </a:prstGeom>
+          <a:noFill/>
+        </p:spPr>
+        <p:txBody>
+          <a:bodyPr wrap="none" anchor="ctr">
+            <a:noAutofit/>
+          </a:bodyPr>
+          <a:lstStyle/>
+          <a:p>
+            <a:pPr algn="ctr"/>
+            <a:r>
+              <a:rPr sz="825" noProof="1" spc="150">
+                <a:solidFill>
+                  <a:srgbClr val="8FB3B3"/>
+                </a:solidFill>
+                <a:latin typeface="Liter"/>
+                <a:ea typeface="Liter"/>
+              </a:rPr>
+              <a:t>SOC CHALLENGE</a:t>
+            </a:r>
+          </a:p>
+        </p:txBody>
+      </p:sp>
+      <p:sp>
+        <p:nvSpPr>
+          <p:cNvPr id="5" name="dsl:nav-2"/>
+          <p:cNvSpPr txBox="1"/>
+          <p:nvPr/>
+        </p:nvSpPr>
+        <p:spPr>
+          <a:xfrm>
+            <a:off x="1524000" y="0"/>
+            <a:ext cx="1524000" cy="304800"/>
+          </a:xfrm>
+          <a:prstGeom prst="rect">
+            <a:avLst/>
+          </a:prstGeom>
+          <a:noFill/>
+        </p:spPr>
+        <p:txBody>
+          <a:bodyPr wrap="none" anchor="ctr">
+            <a:noAutofit/>
+          </a:bodyPr>
+          <a:lstStyle/>
+          <a:p>
+            <a:pPr algn="ctr"/>
+            <a:r>
+              <a:rPr sz="825" noProof="1" spc="150">
+                <a:solidFill>
+                  <a:srgbClr val="8FB3B3"/>
+                </a:solidFill>
+                <a:latin typeface="Liter"/>
+                <a:ea typeface="Liter"/>
+              </a:rPr>
+              <a:t>OVERVIEW</a:t>
+            </a:r>
+          </a:p>
+        </p:txBody>
+      </p:sp>
+      <p:sp>
+        <p:nvSpPr>
+          <p:cNvPr id="6" name="dsl:nav-3"/>
+          <p:cNvSpPr txBox="1"/>
+          <p:nvPr/>
+        </p:nvSpPr>
+        <p:spPr>
+          <a:xfrm>
+            <a:off x="3048000" y="0"/>
+            <a:ext cx="1524000" cy="304800"/>
+          </a:xfrm>
+          <a:prstGeom prst="rect">
+            <a:avLst/>
+          </a:prstGeom>
+          <a:noFill/>
+        </p:spPr>
+        <p:txBody>
+          <a:bodyPr wrap="none" anchor="ctr">
+            <a:noAutofit/>
+          </a:bodyPr>
+          <a:lstStyle/>
+          <a:p>
+            <a:pPr algn="ctr"/>
+            <a:r>
+              <a:rPr sz="825" noProof="1" spc="150">
+                <a:solidFill>
+                  <a:srgbClr val="8FB3B3"/>
+                </a:solidFill>
+                <a:latin typeface="Liter"/>
+                <a:ea typeface="Liter"/>
+              </a:rPr>
+              <a:t>DATA</a:t>
+            </a:r>
+          </a:p>
+        </p:txBody>
+      </p:sp>
+      <p:sp>
+        <p:nvSpPr>
+          <p:cNvPr id="7" name="dsl:nav-4"/>
+          <p:cNvSpPr txBox="1"/>
+          <p:nvPr/>
+        </p:nvSpPr>
+        <p:spPr>
+          <a:xfrm>
+            <a:off x="4572000" y="0"/>
+            <a:ext cx="1524000" cy="304800"/>
+          </a:xfrm>
+          <a:prstGeom prst="rect">
+            <a:avLst/>
+          </a:prstGeom>
+          <a:noFill/>
+        </p:spPr>
+        <p:txBody>
+          <a:bodyPr wrap="none" anchor="ctr">
+            <a:noAutofit/>
+          </a:bodyPr>
+          <a:lstStyle/>
+          <a:p>
+            <a:pPr algn="ctr"/>
+            <a:r>
+              <a:rPr sz="825" noProof="1" spc="150">
+                <a:solidFill>
+                  <a:srgbClr val="8FB3B3"/>
+                </a:solidFill>
+                <a:latin typeface="Liter"/>
+                <a:ea typeface="Liter"/>
+              </a:rPr>
+              <a:t>PIPELINE</a:t>
+            </a:r>
+          </a:p>
+        </p:txBody>
+      </p:sp>
+      <p:sp>
+        <p:nvSpPr>
+          <p:cNvPr id="8" name="dsl:nav-5"/>
+          <p:cNvSpPr txBox="1"/>
+          <p:nvPr/>
+        </p:nvSpPr>
+        <p:spPr>
+          <a:xfrm>
+            <a:off x="6096000" y="0"/>
+            <a:ext cx="1524000" cy="304800"/>
+          </a:xfrm>
+          <a:prstGeom prst="rect">
+            <a:avLst/>
+          </a:prstGeom>
+          <a:noFill/>
+        </p:spPr>
+        <p:txBody>
+          <a:bodyPr wrap="none" anchor="ctr">
+            <a:noAutofit/>
+          </a:bodyPr>
+          <a:lstStyle/>
+          <a:p>
+            <a:pPr algn="ctr"/>
+            <a:r>
+              <a:rPr sz="825" noProof="1" spc="150">
+                <a:solidFill>
+                  <a:srgbClr val="8FB3B3"/>
+                </a:solidFill>
+                <a:latin typeface="Liter"/>
+                <a:ea typeface="Liter"/>
+              </a:rPr>
+              <a:t>AI OPERATIONS</a:t>
+            </a:r>
+          </a:p>
+        </p:txBody>
+      </p:sp>
+      <p:sp>
+        <p:nvSpPr>
+          <p:cNvPr id="9" name="dsl:nav-6"/>
+          <p:cNvSpPr txBox="1"/>
+          <p:nvPr/>
+        </p:nvSpPr>
+        <p:spPr>
+          <a:xfrm>
+            <a:off x="7620000" y="0"/>
+            <a:ext cx="1524000" cy="304800"/>
+          </a:xfrm>
+          <a:prstGeom prst="rect">
+            <a:avLst/>
+          </a:prstGeom>
+          <a:noFill/>
+        </p:spPr>
+        <p:txBody>
+          <a:bodyPr wrap="none" anchor="ctr">
+            <a:noAutofit/>
+          </a:bodyPr>
+          <a:lstStyle/>
+          <a:p>
+            <a:pPr algn="ctr"/>
+            <a:r>
+              <a:rPr sz="825" noProof="1" spc="150">
+                <a:solidFill>
+                  <a:srgbClr val="8FB3B3"/>
+                </a:solidFill>
+                <a:latin typeface="Liter"/>
+                <a:ea typeface="Liter"/>
+              </a:rPr>
+              <a:t>ARCHITECTURE</a:t>
+            </a:r>
+          </a:p>
+        </p:txBody>
+      </p:sp>
+      <p:sp>
+        <p:nvSpPr>
+          <p:cNvPr id="10" name="dsl:nav-7"/>
+          <p:cNvSpPr txBox="1"/>
+          <p:nvPr/>
+        </p:nvSpPr>
+        <p:spPr>
+          <a:xfrm>
+            <a:off x="9144000" y="0"/>
+            <a:ext cx="1524000" cy="304800"/>
+          </a:xfrm>
+          <a:prstGeom prst="rect">
+            <a:avLst/>
+          </a:prstGeom>
+          <a:noFill/>
+        </p:spPr>
+        <p:txBody>
+          <a:bodyPr wrap="none" anchor="ctr">
+            <a:noAutofit/>
+          </a:bodyPr>
+          <a:lstStyle/>
+          <a:p>
+            <a:pPr algn="ctr"/>
+            <a:r>
+              <a:rPr sz="825" noProof="1" spc="150">
+                <a:solidFill>
+                  <a:srgbClr val="8FB3B3"/>
+                </a:solidFill>
+                <a:latin typeface="Liter"/>
+                <a:ea typeface="Liter"/>
+              </a:rPr>
+              <a:t>SECURITY</a:t>
+            </a:r>
+          </a:p>
+        </p:txBody>
+      </p:sp>
+      <p:sp>
+        <p:nvSpPr>
+          <p:cNvPr id="11" name="dsl:nav-8"/>
+          <p:cNvSpPr txBox="1"/>
+          <p:nvPr/>
+        </p:nvSpPr>
+        <p:spPr>
+          <a:xfrm>
+            <a:off x="10668000" y="0"/>
+            <a:ext cx="1524000" cy="304800"/>
+          </a:xfrm>
+          <a:prstGeom prst="rect">
+            <a:avLst/>
+          </a:prstGeom>
+          <a:noFill/>
+        </p:spPr>
+        <p:txBody>
+          <a:bodyPr wrap="none" anchor="ctr">
+            <a:noAutofit/>
+          </a:bodyPr>
+          <a:lstStyle/>
+          <a:p>
+            <a:pPr algn="ctr"/>
+            <a:r>
+              <a:rPr sz="825" noProof="1" spc="150">
+                <a:solidFill>
+                  <a:srgbClr val="FFFFFF"/>
+                </a:solidFill>
+                <a:latin typeface="Liter"/>
+                <a:ea typeface="Liter"/>
+              </a:rPr>
+              <a:t>VALUE</a:t>
+            </a:r>
+          </a:p>
+        </p:txBody>
+      </p:sp>
+      <p:sp>
+        <p:nvSpPr>
+          <p:cNvPr id="12" name="dsl:title-accent"/>
+          <p:cNvSpPr/>
+          <p:nvPr/>
+        </p:nvSpPr>
+        <p:spPr>
+          <a:xfrm>
+            <a:off x="571500" y="438150"/>
+            <a:ext cx="571500" cy="38100"/>
+          </a:xfrm>
+          <a:prstGeom prst="rect">
+            <a:avLst/>
+          </a:prstGeom>
+          <a:solidFill>
+            <a:srgbClr val="D4A373"/>
+          </a:solidFill>
+          <a:ln>
+            <a:noFill/>
+          </a:ln>
+          <a:effectLst/>
+        </p:spPr>
+        <p:style>
+          <a:lnRef idx="1">
+            <a:schemeClr val="accent1"/>
+          </a:lnRef>
+          <a:fillRef idx="3">
+            <a:schemeClr val="accent1"/>
+          </a:fillRef>
+          <a:effectRef idx="2">
+            <a:schemeClr val="accent1"/>
+          </a:effectRef>
+          <a:fontRef idx="minor">
+            <a:schemeClr val="lt1"/>
+          </a:fontRef>
+        </p:style>
+        <p:txBody>
+          <a:bodyPr rtlCol="0" anchor="ctr"/>
+          <a:lstStyle/>
+          <a:p>
+            <a:pPr algn="ctr"/>
+          </a:p>
+        </p:txBody>
+      </p:sp>
+      <p:sp>
+        <p:nvSpPr>
+          <p:cNvPr id="13" name="dsl:title"/>
+          <p:cNvSpPr txBox="1"/>
+          <p:nvPr/>
+        </p:nvSpPr>
+        <p:spPr>
+          <a:xfrm>
+            <a:off x="571500" y="552450"/>
+            <a:ext cx="6667500" cy="400050"/>
+          </a:xfrm>
+          <a:prstGeom prst="rect">
+            <a:avLst/>
+          </a:prstGeom>
+          <a:noFill/>
+        </p:spPr>
+        <p:txBody>
+          <a:bodyPr wrap="none" anchor="ctr">
+            <a:noAutofit/>
+          </a:bodyPr>
+          <a:lstStyle/>
+          <a:p>
+            <a:pPr algn="l"/>
+            <a:r>
+              <a:rPr sz="2100" noProof="1">
+                <a:solidFill>
+                  <a:srgbClr val="2D6A6A"/>
+                </a:solidFill>
+                <a:latin typeface="Liter"/>
+                <a:ea typeface="Liter"/>
+              </a:rPr>
+              <a:t>Value of ARIA</a:t>
+            </a:r>
+          </a:p>
+        </p:txBody>
+      </p:sp>
+      <p:sp>
+        <p:nvSpPr>
+          <p:cNvPr id="14" name="dsl:ref-note"/>
+          <p:cNvSpPr txBox="1"/>
+          <p:nvPr/>
+        </p:nvSpPr>
+        <p:spPr>
+          <a:xfrm>
+            <a:off x="8096250" y="552450"/>
+            <a:ext cx="3524250" cy="400050"/>
+          </a:xfrm>
+          <a:prstGeom prst="rect">
+            <a:avLst/>
+          </a:prstGeom>
+          <a:noFill/>
+        </p:spPr>
+        <p:txBody>
+          <a:bodyPr wrap="none" anchor="ctr">
+            <a:noAutofit/>
+          </a:bodyPr>
+          <a:lstStyle/>
+          <a:p>
+            <a:pPr algn="r"/>
+            <a:r>
+              <a:rPr sz="975" noProof="1">
+                <a:solidFill>
+                  <a:srgbClr val="5C6B73"/>
+                </a:solidFill>
+                <a:latin typeface="QuattrocentoSans"/>
+                <a:ea typeface="QuattrocentoSans"/>
+              </a:rPr>
+              <a:t>Reference: main.pdf General Conclusion</a:t>
+            </a:r>
+          </a:p>
+        </p:txBody>
+      </p:sp>
+      <p:sp>
+        <p:nvSpPr>
+          <p:cNvPr id="15" name="dsl:v1-bg"/>
+          <p:cNvSpPr/>
+          <p:nvPr/>
+        </p:nvSpPr>
+        <p:spPr>
+          <a:xfrm>
+            <a:off x="571500" y="1123950"/>
+            <a:ext cx="3552825" cy="2476500"/>
+          </a:xfrm>
+          <a:prstGeom prst="rect">
+            <a:avLst/>
+          </a:prstGeom>
+          <a:solidFill>
+            <a:srgbClr val="F5F5F2"/>
+          </a:solidFill>
+          <a:ln>
+            <a:noFill/>
+          </a:ln>
+          <a:effectLst/>
+        </p:spPr>
+        <p:style>
+          <a:lnRef idx="1">
+            <a:schemeClr val="accent1"/>
+          </a:lnRef>
+          <a:fillRef idx="3">
+            <a:schemeClr val="accent1"/>
+          </a:fillRef>
+          <a:effectRef idx="2">
+            <a:schemeClr val="accent1"/>
+          </a:effectRef>
+          <a:fontRef idx="minor">
+            <a:schemeClr val="lt1"/>
+          </a:fontRef>
+        </p:style>
+        <p:txBody>
+          <a:bodyPr rtlCol="0" anchor="ctr"/>
+          <a:lstStyle/>
+          <a:p>
+            <a:pPr algn="ctr"/>
+          </a:p>
+        </p:txBody>
+      </p:sp>
+      <p:sp>
+        <p:nvSpPr>
+          <p:cNvPr id="16" name="dsl:v1-accent"/>
+          <p:cNvSpPr/>
+          <p:nvPr/>
+        </p:nvSpPr>
+        <p:spPr>
+          <a:xfrm>
+            <a:off x="571500" y="1123950"/>
+            <a:ext cx="3552825" cy="47625"/>
+          </a:xfrm>
+          <a:prstGeom prst="rect">
+            <a:avLst/>
+          </a:prstGeom>
+          <a:solidFill>
+            <a:srgbClr val="D4A373"/>
+          </a:solidFill>
+          <a:ln>
+            <a:noFill/>
+          </a:ln>
+          <a:effectLst/>
+        </p:spPr>
+        <p:style>
+          <a:lnRef idx="1">
+            <a:schemeClr val="accent1"/>
+          </a:lnRef>
+          <a:fillRef idx="3">
+            <a:schemeClr val="accent1"/>
+          </a:fillRef>
+          <a:effectRef idx="2">
+            <a:schemeClr val="accent1"/>
+          </a:effectRef>
+          <a:fontRef idx="minor">
+            <a:schemeClr val="lt1"/>
+          </a:fontRef>
+        </p:style>
+        <p:txBody>
+          <a:bodyPr rtlCol="0" anchor="ctr"/>
+          <a:lstStyle/>
+          <a:p>
+            <a:pPr algn="ctr"/>
+          </a:p>
+        </p:txBody>
+      </p:sp>
+      <p:sp>
+        <p:nvSpPr>
+          <p:cNvPr id="17" name="dsl:v1-icon|i=fas:bolt"/>
+          <p:cNvSpPr/>
+          <p:nvPr/>
+        </p:nvSpPr>
+        <p:spPr>
+          <a:xfrm>
+            <a:off x="781050" y="1314450"/>
+            <a:ext cx="266700" cy="304800"/>
+          </a:xfrm>
+          <a:custGeom>
+            <a:avLst/>
+            <a:gdLst/>
+            <a:ahLst/>
+            <a:cxnLst/>
+            <a:rect l="l" t="t" r="r" b="b"/>
+            <a:pathLst>
+              <a:path w="266700" h="304800">
+                <a:moveTo>
+                  <a:pt x="208002" y="26550"/>
+                </a:moveTo>
+                <a:cubicBezTo>
+                  <a:pt x="211514" y="18395"/>
+                  <a:pt x="208895" y="8870"/>
+                  <a:pt x="201691" y="3631"/>
+                </a:cubicBezTo>
+                <a:cubicBezTo>
+                  <a:pt x="194488" y="-1607"/>
+                  <a:pt x="184665" y="-1131"/>
+                  <a:pt x="177938" y="4702"/>
+                </a:cubicBezTo>
+                <a:lnTo>
+                  <a:pt x="25538" y="138052"/>
+                </a:lnTo>
+                <a:cubicBezTo>
+                  <a:pt x="19585" y="143291"/>
+                  <a:pt x="17442" y="151685"/>
+                  <a:pt x="20240" y="159067"/>
+                </a:cubicBezTo>
+                <a:cubicBezTo>
+                  <a:pt x="23038" y="166449"/>
+                  <a:pt x="30182" y="171450"/>
+                  <a:pt x="38100" y="171450"/>
+                </a:cubicBezTo>
+                <a:lnTo>
+                  <a:pt x="104477" y="171450"/>
+                </a:lnTo>
+                <a:lnTo>
+                  <a:pt x="58697" y="278249"/>
+                </a:lnTo>
+                <a:cubicBezTo>
+                  <a:pt x="55185" y="286404"/>
+                  <a:pt x="57804" y="295929"/>
+                  <a:pt x="65008" y="301168"/>
+                </a:cubicBezTo>
+                <a:cubicBezTo>
+                  <a:pt x="72211" y="306407"/>
+                  <a:pt x="82034" y="305931"/>
+                  <a:pt x="88761" y="300097"/>
+                </a:cubicBezTo>
+                <a:lnTo>
+                  <a:pt x="241161" y="166747"/>
+                </a:lnTo>
+                <a:cubicBezTo>
+                  <a:pt x="247114" y="161508"/>
+                  <a:pt x="249257" y="153114"/>
+                  <a:pt x="246459" y="145732"/>
+                </a:cubicBezTo>
+                <a:cubicBezTo>
+                  <a:pt x="243661" y="138350"/>
+                  <a:pt x="236577" y="133409"/>
+                  <a:pt x="228600" y="133409"/>
+                </a:cubicBezTo>
+                <a:lnTo>
+                  <a:pt x="162222" y="133409"/>
+                </a:lnTo>
+                <a:lnTo>
+                  <a:pt x="208002" y="26550"/>
+                </a:lnTo>
+                <a:close/>
+              </a:path>
+            </a:pathLst>
+          </a:custGeom>
+          <a:solidFill>
+            <a:srgbClr val="D4A373"/>
+          </a:solidFill>
+          <a:ln>
+            <a:noFill/>
+          </a:ln>
+          <a:effectLst/>
+        </p:spPr>
+        <p:txBody>
+          <a:bodyPr/>
+          <a:p/>
+        </p:txBody>
+      </p:sp>
+      <p:sp>
+        <p:nvSpPr>
+          <p:cNvPr id="18" name="dsl:v1-title"/>
+          <p:cNvSpPr txBox="1"/>
+          <p:nvPr/>
+        </p:nvSpPr>
+        <p:spPr>
+          <a:xfrm>
+            <a:off x="762000" y="1714500"/>
+            <a:ext cx="3171825" cy="247650"/>
+          </a:xfrm>
+          <a:prstGeom prst="rect">
+            <a:avLst/>
+          </a:prstGeom>
+          <a:noFill/>
+        </p:spPr>
+        <p:txBody>
+          <a:bodyPr wrap="none" anchor="ctr">
+            <a:noAutofit/>
+          </a:bodyPr>
+          <a:lstStyle/>
+          <a:p>
+            <a:pPr algn="l"/>
+            <a:r>
+              <a:rPr b="1" sz="1500" noProof="1">
+                <a:solidFill>
+                  <a:srgbClr val="2D6A6A"/>
+                </a:solidFill>
+                <a:latin typeface="Liter"/>
+                <a:ea typeface="Liter"/>
+              </a:rPr>
+              <a:t>Faster Investigation</a:t>
+            </a:r>
+          </a:p>
+        </p:txBody>
+      </p:sp>
+      <p:sp>
+        <p:nvSpPr>
+          <p:cNvPr id="19" name="dsl:v1-desc"/>
+          <p:cNvSpPr txBox="1"/>
+          <p:nvPr/>
+        </p:nvSpPr>
+        <p:spPr>
+          <a:xfrm>
+            <a:off x="762000" y="2038350"/>
+            <a:ext cx="3171825" cy="1428750"/>
+          </a:xfrm>
+          <a:prstGeom prst="rect">
+            <a:avLst/>
+          </a:prstGeom>
+          <a:noFill/>
+        </p:spPr>
+        <p:txBody>
+          <a:bodyPr wrap="square" anchor="t">
+            <a:noAutofit/>
+          </a:bodyPr>
+          <a:lstStyle/>
+          <a:p>
+            <a:pPr algn="l"/>
+            <a:r>
+              <a:rPr sz="1200" noProof="1">
+                <a:solidFill>
+                  <a:srgbClr val="2B2D2F"/>
+                </a:solidFill>
+                <a:latin typeface="QuattrocentoSans"/>
+                <a:ea typeface="QuattrocentoSans"/>
+              </a:rPr>
+              <a:t>AI-generated summaries and narratives reduce manual analysis time. Analysts get context-rich investigations instantly.</a:t>
+            </a:r>
+          </a:p>
+        </p:txBody>
+      </p:sp>
+      <p:sp>
+        <p:nvSpPr>
+          <p:cNvPr id="20" name="dsl:v2-bg"/>
+          <p:cNvSpPr/>
+          <p:nvPr/>
+        </p:nvSpPr>
+        <p:spPr>
+          <a:xfrm>
+            <a:off x="4314825" y="1123950"/>
+            <a:ext cx="3562350" cy="2476500"/>
+          </a:xfrm>
+          <a:prstGeom prst="rect">
+            <a:avLst/>
+          </a:prstGeom>
+          <a:solidFill>
+            <a:srgbClr val="F5F5F2"/>
+          </a:solidFill>
+          <a:ln>
+            <a:noFill/>
+          </a:ln>
+          <a:effectLst/>
+        </p:spPr>
+        <p:style>
+          <a:lnRef idx="1">
+            <a:schemeClr val="accent1"/>
+          </a:lnRef>
+          <a:fillRef idx="3">
+            <a:schemeClr val="accent1"/>
+          </a:fillRef>
+          <a:effectRef idx="2">
+            <a:schemeClr val="accent1"/>
+          </a:effectRef>
+          <a:fontRef idx="minor">
+            <a:schemeClr val="lt1"/>
+          </a:fontRef>
+        </p:style>
+        <p:txBody>
+          <a:bodyPr rtlCol="0" anchor="ctr"/>
+          <a:lstStyle/>
+          <a:p>
+            <a:pPr algn="ctr"/>
+          </a:p>
+        </p:txBody>
+      </p:sp>
+      <p:sp>
+        <p:nvSpPr>
+          <p:cNvPr id="21" name="dsl:v2-accent"/>
+          <p:cNvSpPr/>
+          <p:nvPr/>
+        </p:nvSpPr>
+        <p:spPr>
+          <a:xfrm>
+            <a:off x="4314825" y="1123950"/>
+            <a:ext cx="3562350" cy="47625"/>
+          </a:xfrm>
+          <a:prstGeom prst="rect">
+            <a:avLst/>
+          </a:prstGeom>
+          <a:solidFill>
+            <a:srgbClr val="D4A373"/>
+          </a:solidFill>
+          <a:ln>
+            <a:noFill/>
+          </a:ln>
+          <a:effectLst/>
+        </p:spPr>
+        <p:style>
+          <a:lnRef idx="1">
+            <a:schemeClr val="accent1"/>
+          </a:lnRef>
+          <a:fillRef idx="3">
+            <a:schemeClr val="accent1"/>
+          </a:fillRef>
+          <a:effectRef idx="2">
+            <a:schemeClr val="accent1"/>
+          </a:effectRef>
+          <a:fontRef idx="minor">
+            <a:schemeClr val="lt1"/>
+          </a:fontRef>
+        </p:style>
+        <p:txBody>
+          <a:bodyPr rtlCol="0" anchor="ctr"/>
+          <a:lstStyle/>
+          <a:p>
+            <a:pPr algn="ctr"/>
+          </a:p>
+        </p:txBody>
+      </p:sp>
+      <p:sp>
+        <p:nvSpPr>
+          <p:cNvPr id="22" name="dsl:v2-icon|i=fas:link"/>
+          <p:cNvSpPr/>
+          <p:nvPr/>
+        </p:nvSpPr>
+        <p:spPr>
+          <a:xfrm>
+            <a:off x="4505325" y="1344930"/>
+            <a:ext cx="304800" cy="243840"/>
+          </a:xfrm>
+          <a:custGeom>
+            <a:avLst/>
+            <a:gdLst/>
+            <a:ahLst/>
+            <a:cxnLst/>
+            <a:rect l="l" t="t" r="r" b="b"/>
+            <a:pathLst>
+              <a:path w="304800" h="243840">
+                <a:moveTo>
+                  <a:pt x="276129" y="127492"/>
+                </a:moveTo>
+                <a:cubicBezTo>
+                  <a:pt x="303037" y="100584"/>
+                  <a:pt x="303037" y="57007"/>
+                  <a:pt x="276129" y="30098"/>
+                </a:cubicBezTo>
+                <a:cubicBezTo>
+                  <a:pt x="252317" y="6286"/>
+                  <a:pt x="214788" y="3190"/>
+                  <a:pt x="187404" y="22764"/>
+                </a:cubicBezTo>
+                <a:lnTo>
+                  <a:pt x="186642" y="23288"/>
+                </a:lnTo>
+                <a:cubicBezTo>
+                  <a:pt x="179784" y="28193"/>
+                  <a:pt x="178212" y="37718"/>
+                  <a:pt x="183118" y="44529"/>
+                </a:cubicBezTo>
+                <a:cubicBezTo>
+                  <a:pt x="188023" y="51339"/>
+                  <a:pt x="197548" y="52959"/>
+                  <a:pt x="204358" y="48053"/>
+                </a:cubicBezTo>
+                <a:lnTo>
+                  <a:pt x="205120" y="47529"/>
+                </a:lnTo>
+                <a:cubicBezTo>
+                  <a:pt x="220408" y="36623"/>
+                  <a:pt x="241315" y="38338"/>
+                  <a:pt x="254555" y="51625"/>
+                </a:cubicBezTo>
+                <a:cubicBezTo>
+                  <a:pt x="269557" y="66627"/>
+                  <a:pt x="269557" y="90916"/>
+                  <a:pt x="254555" y="105918"/>
+                </a:cubicBezTo>
+                <a:lnTo>
+                  <a:pt x="201120" y="159448"/>
+                </a:lnTo>
+                <a:cubicBezTo>
+                  <a:pt x="186118" y="174450"/>
+                  <a:pt x="161829" y="174450"/>
+                  <a:pt x="146827" y="159448"/>
+                </a:cubicBezTo>
+                <a:cubicBezTo>
+                  <a:pt x="133540" y="146161"/>
+                  <a:pt x="131826" y="125253"/>
+                  <a:pt x="142732" y="110013"/>
+                </a:cubicBezTo>
+                <a:lnTo>
+                  <a:pt x="143256" y="109251"/>
+                </a:lnTo>
+                <a:cubicBezTo>
+                  <a:pt x="148161" y="102393"/>
+                  <a:pt x="146542" y="92868"/>
+                  <a:pt x="139731" y="88011"/>
+                </a:cubicBezTo>
+                <a:cubicBezTo>
+                  <a:pt x="132921" y="83153"/>
+                  <a:pt x="123348" y="84724"/>
+                  <a:pt x="118491" y="91535"/>
+                </a:cubicBezTo>
+                <a:lnTo>
+                  <a:pt x="117967" y="92297"/>
+                </a:lnTo>
+                <a:cubicBezTo>
+                  <a:pt x="98345" y="119634"/>
+                  <a:pt x="101441" y="157162"/>
+                  <a:pt x="125253" y="180975"/>
+                </a:cubicBezTo>
+                <a:cubicBezTo>
+                  <a:pt x="152161" y="207883"/>
+                  <a:pt x="195738" y="207883"/>
+                  <a:pt x="222646" y="180975"/>
+                </a:cubicBezTo>
+                <a:lnTo>
+                  <a:pt x="276129" y="127492"/>
+                </a:lnTo>
+                <a:close/>
+                <a:moveTo>
+                  <a:pt x="28670" y="116347"/>
+                </a:moveTo>
+                <a:cubicBezTo>
+                  <a:pt x="1762" y="143256"/>
+                  <a:pt x="1762" y="186832"/>
+                  <a:pt x="28670" y="213741"/>
+                </a:cubicBezTo>
+                <a:cubicBezTo>
+                  <a:pt x="52482" y="237553"/>
+                  <a:pt x="90011" y="240649"/>
+                  <a:pt x="117395" y="221075"/>
+                </a:cubicBezTo>
+                <a:lnTo>
+                  <a:pt x="118157" y="220551"/>
+                </a:lnTo>
+                <a:cubicBezTo>
+                  <a:pt x="125015" y="215645"/>
+                  <a:pt x="126587" y="206120"/>
+                  <a:pt x="121681" y="199310"/>
+                </a:cubicBezTo>
+                <a:cubicBezTo>
+                  <a:pt x="116776" y="192500"/>
+                  <a:pt x="107251" y="190880"/>
+                  <a:pt x="100441" y="195786"/>
+                </a:cubicBezTo>
+                <a:lnTo>
+                  <a:pt x="99679" y="196310"/>
+                </a:lnTo>
+                <a:cubicBezTo>
+                  <a:pt x="84391" y="207216"/>
+                  <a:pt x="63484" y="205501"/>
+                  <a:pt x="50244" y="192214"/>
+                </a:cubicBezTo>
+                <a:cubicBezTo>
+                  <a:pt x="35242" y="177165"/>
+                  <a:pt x="35242" y="152876"/>
+                  <a:pt x="50244" y="137874"/>
+                </a:cubicBezTo>
+                <a:lnTo>
+                  <a:pt x="103679" y="84391"/>
+                </a:lnTo>
+                <a:cubicBezTo>
+                  <a:pt x="118681" y="69389"/>
+                  <a:pt x="142970" y="69389"/>
+                  <a:pt x="157972" y="84391"/>
+                </a:cubicBezTo>
+                <a:cubicBezTo>
+                  <a:pt x="171259" y="97678"/>
+                  <a:pt x="172974" y="118586"/>
+                  <a:pt x="162067" y="133873"/>
+                </a:cubicBezTo>
+                <a:lnTo>
+                  <a:pt x="161544" y="134635"/>
+                </a:lnTo>
+                <a:cubicBezTo>
+                  <a:pt x="156638" y="141493"/>
+                  <a:pt x="158257" y="151018"/>
+                  <a:pt x="165068" y="155876"/>
+                </a:cubicBezTo>
+                <a:cubicBezTo>
+                  <a:pt x="171878" y="160734"/>
+                  <a:pt x="181451" y="159162"/>
+                  <a:pt x="186309" y="152352"/>
+                </a:cubicBezTo>
+                <a:lnTo>
+                  <a:pt x="186832" y="151590"/>
+                </a:lnTo>
+                <a:cubicBezTo>
+                  <a:pt x="206454" y="124206"/>
+                  <a:pt x="203358" y="86677"/>
+                  <a:pt x="179546" y="62865"/>
+                </a:cubicBezTo>
+                <a:cubicBezTo>
+                  <a:pt x="152638" y="35956"/>
+                  <a:pt x="109061" y="35956"/>
+                  <a:pt x="82153" y="62865"/>
+                </a:cubicBezTo>
+                <a:lnTo>
+                  <a:pt x="28670" y="116347"/>
+                </a:lnTo>
+                <a:close/>
+              </a:path>
+            </a:pathLst>
+          </a:custGeom>
+          <a:solidFill>
+            <a:srgbClr val="D4A373"/>
+          </a:solidFill>
+          <a:ln>
+            <a:noFill/>
+          </a:ln>
+          <a:effectLst/>
+        </p:spPr>
+        <p:txBody>
+          <a:bodyPr/>
+          <a:p/>
+        </p:txBody>
+      </p:sp>
+      <p:sp>
+        <p:nvSpPr>
+          <p:cNvPr id="23" name="dsl:v2-title"/>
+          <p:cNvSpPr txBox="1"/>
+          <p:nvPr/>
+        </p:nvSpPr>
+        <p:spPr>
+          <a:xfrm>
+            <a:off x="4505325" y="1714500"/>
+            <a:ext cx="3181350" cy="247650"/>
+          </a:xfrm>
+          <a:prstGeom prst="rect">
+            <a:avLst/>
+          </a:prstGeom>
+          <a:noFill/>
+        </p:spPr>
+        <p:txBody>
+          <a:bodyPr wrap="none" anchor="ctr">
+            <a:noAutofit/>
+          </a:bodyPr>
+          <a:lstStyle/>
+          <a:p>
+            <a:pPr algn="l"/>
+            <a:r>
+              <a:rPr b="1" sz="1500" noProof="1">
+                <a:solidFill>
+                  <a:srgbClr val="2D6A6A"/>
+                </a:solidFill>
+                <a:latin typeface="Liter"/>
+                <a:ea typeface="Liter"/>
+              </a:rPr>
+              <a:t>Better Correlation</a:t>
+            </a:r>
+          </a:p>
+        </p:txBody>
+      </p:sp>
+      <p:sp>
+        <p:nvSpPr>
+          <p:cNvPr id="24" name="dsl:v2-desc"/>
+          <p:cNvSpPr txBox="1"/>
+          <p:nvPr/>
+        </p:nvSpPr>
+        <p:spPr>
+          <a:xfrm>
+            <a:off x="4505325" y="2038350"/>
+            <a:ext cx="3181350" cy="1428750"/>
+          </a:xfrm>
+          <a:prstGeom prst="rect">
+            <a:avLst/>
+          </a:prstGeom>
+          <a:noFill/>
+        </p:spPr>
+        <p:txBody>
+          <a:bodyPr wrap="square" anchor="t">
+            <a:noAutofit/>
+          </a:bodyPr>
+          <a:lstStyle/>
+          <a:p>
+            <a:pPr algn="l"/>
+            <a:r>
+              <a:rPr sz="1200" noProof="1">
+                <a:solidFill>
+                  <a:srgbClr val="2B2D2F"/>
+                </a:solidFill>
+                <a:latin typeface="QuattrocentoSans"/>
+                <a:ea typeface="QuattrocentoSans"/>
+              </a:rPr>
+              <a:t>Time-windowed and indicator-based grouping reconstructs complete attack chains from isolated alerts.</a:t>
+            </a:r>
+          </a:p>
+        </p:txBody>
+      </p:sp>
+      <p:sp>
+        <p:nvSpPr>
+          <p:cNvPr id="25" name="dsl:v3-bg"/>
+          <p:cNvSpPr/>
+          <p:nvPr/>
+        </p:nvSpPr>
+        <p:spPr>
+          <a:xfrm>
+            <a:off x="8067675" y="1123950"/>
+            <a:ext cx="3552825" cy="2476500"/>
+          </a:xfrm>
+          <a:prstGeom prst="rect">
+            <a:avLst/>
+          </a:prstGeom>
+          <a:solidFill>
+            <a:srgbClr val="F5F5F2"/>
+          </a:solidFill>
+          <a:ln>
+            <a:noFill/>
+          </a:ln>
+          <a:effectLst/>
+        </p:spPr>
+        <p:style>
+          <a:lnRef idx="1">
+            <a:schemeClr val="accent1"/>
+          </a:lnRef>
+          <a:fillRef idx="3">
+            <a:schemeClr val="accent1"/>
+          </a:fillRef>
+          <a:effectRef idx="2">
+            <a:schemeClr val="accent1"/>
+          </a:effectRef>
+          <a:fontRef idx="minor">
+            <a:schemeClr val="lt1"/>
+          </a:fontRef>
+        </p:style>
+        <p:txBody>
+          <a:bodyPr rtlCol="0" anchor="ctr"/>
+          <a:lstStyle/>
+          <a:p>
+            <a:pPr algn="ctr"/>
+          </a:p>
+        </p:txBody>
+      </p:sp>
+      <p:sp>
+        <p:nvSpPr>
+          <p:cNvPr id="26" name="dsl:v3-accent"/>
+          <p:cNvSpPr/>
+          <p:nvPr/>
+        </p:nvSpPr>
+        <p:spPr>
+          <a:xfrm>
+            <a:off x="8067675" y="1123950"/>
+            <a:ext cx="3552825" cy="47625"/>
+          </a:xfrm>
+          <a:prstGeom prst="rect">
+            <a:avLst/>
+          </a:prstGeom>
+          <a:solidFill>
+            <a:srgbClr val="D4A373"/>
+          </a:solidFill>
+          <a:ln>
+            <a:noFill/>
+          </a:ln>
+          <a:effectLst/>
+        </p:spPr>
+        <p:style>
+          <a:lnRef idx="1">
+            <a:schemeClr val="accent1"/>
+          </a:lnRef>
+          <a:fillRef idx="3">
+            <a:schemeClr val="accent1"/>
+          </a:fillRef>
+          <a:effectRef idx="2">
+            <a:schemeClr val="accent1"/>
+          </a:effectRef>
+          <a:fontRef idx="minor">
+            <a:schemeClr val="lt1"/>
+          </a:fontRef>
+        </p:style>
+        <p:txBody>
+          <a:bodyPr rtlCol="0" anchor="ctr"/>
+          <a:lstStyle/>
+          <a:p>
+            <a:pPr algn="ctr"/>
+          </a:p>
+        </p:txBody>
+      </p:sp>
+      <p:sp>
+        <p:nvSpPr>
+          <p:cNvPr id="27" name="dsl:v3-icon|i=fas:bell-slash"/>
+          <p:cNvSpPr/>
+          <p:nvPr/>
+        </p:nvSpPr>
+        <p:spPr>
+          <a:xfrm>
+            <a:off x="8258175" y="1344930"/>
+            <a:ext cx="304800" cy="243840"/>
+          </a:xfrm>
+          <a:custGeom>
+            <a:avLst/>
+            <a:gdLst/>
+            <a:ahLst/>
+            <a:cxnLst/>
+            <a:rect l="l" t="t" r="r" b="b"/>
+            <a:pathLst>
+              <a:path w="304800" h="243840">
+                <a:moveTo>
+                  <a:pt x="18478" y="2428"/>
+                </a:moveTo>
+                <a:cubicBezTo>
+                  <a:pt x="13525" y="-1476"/>
+                  <a:pt x="6334" y="-571"/>
+                  <a:pt x="2428" y="4381"/>
+                </a:cubicBezTo>
+                <a:cubicBezTo>
+                  <a:pt x="-1476" y="9334"/>
+                  <a:pt x="-571" y="16525"/>
+                  <a:pt x="4381" y="20431"/>
+                </a:cubicBezTo>
+                <a:lnTo>
+                  <a:pt x="286321" y="241411"/>
+                </a:lnTo>
+                <a:cubicBezTo>
+                  <a:pt x="291274" y="245316"/>
+                  <a:pt x="298465" y="244411"/>
+                  <a:pt x="302371" y="239458"/>
+                </a:cubicBezTo>
+                <a:cubicBezTo>
+                  <a:pt x="306276" y="234505"/>
+                  <a:pt x="305371" y="227314"/>
+                  <a:pt x="300418" y="223408"/>
+                </a:cubicBezTo>
+                <a:lnTo>
+                  <a:pt x="257460" y="189738"/>
+                </a:lnTo>
+                <a:cubicBezTo>
+                  <a:pt x="258413" y="191643"/>
+                  <a:pt x="259365" y="194024"/>
+                  <a:pt x="260318" y="189118"/>
+                </a:cubicBezTo>
+                <a:cubicBezTo>
+                  <a:pt x="262794" y="183641"/>
+                  <a:pt x="261794" y="177212"/>
+                  <a:pt x="257794" y="172735"/>
+                </a:cubicBezTo>
+                <a:lnTo>
+                  <a:pt x="254269" y="168783"/>
+                </a:lnTo>
+                <a:cubicBezTo>
+                  <a:pt x="236839" y="152019"/>
+                  <a:pt x="228600" y="130444"/>
+                  <a:pt x="228600" y="108013"/>
+                </a:cubicBezTo>
+                <a:lnTo>
+                  <a:pt x="228600" y="99060"/>
+                </a:lnTo>
+                <a:cubicBezTo>
+                  <a:pt x="228600" y="62198"/>
+                  <a:pt x="202406" y="31432"/>
+                  <a:pt x="167640" y="24383"/>
+                </a:cubicBezTo>
+                <a:lnTo>
+                  <a:pt x="167640" y="15240"/>
+                </a:lnTo>
+                <a:cubicBezTo>
+                  <a:pt x="167640" y="6810"/>
+                  <a:pt x="160829" y="0"/>
+                  <a:pt x="152400" y="0"/>
+                </a:cubicBezTo>
+                <a:cubicBezTo>
+                  <a:pt x="143970" y="0"/>
+                  <a:pt x="137160" y="6810"/>
+                  <a:pt x="137160" y="15240"/>
+                </a:cubicBezTo>
+                <a:lnTo>
+                  <a:pt x="137160" y="24384"/>
+                </a:lnTo>
+                <a:cubicBezTo>
+                  <a:pt x="116871" y="28479"/>
+                  <a:pt x="99536" y="40671"/>
+                  <a:pt x="88582" y="57388"/>
+                </a:cubicBezTo>
+                <a:lnTo>
+                  <a:pt x="18478" y="2428"/>
+                </a:lnTo>
+                <a:close/>
+                <a:moveTo>
+                  <a:pt x="193452" y="198120"/>
+                </a:moveTo>
+                <a:lnTo>
+                  <a:pt x="76200" y="105775"/>
+                </a:lnTo>
+                <a:lnTo>
+                  <a:pt x="76200" y="108061"/>
+                </a:lnTo>
+                <a:cubicBezTo>
+                  <a:pt x="76200" y="130444"/>
+                  <a:pt x="67960" y="152066"/>
+                  <a:pt x="53101" y="168830"/>
+                </a:cubicBezTo>
+                <a:lnTo>
+                  <a:pt x="49577" y="172783"/>
+                </a:lnTo>
+                <a:cubicBezTo>
+                  <a:pt x="45577" y="177260"/>
+                  <a:pt x="44624" y="183689"/>
+                  <a:pt x="47053" y="189166"/>
+                </a:cubicBezTo>
+                <a:cubicBezTo>
+                  <a:pt x="49482" y="194643"/>
+                  <a:pt x="54959" y="198120"/>
+                  <a:pt x="60960" y="198120"/>
+                </a:cubicBezTo>
+                <a:lnTo>
+                  <a:pt x="193452" y="198120"/>
+                </a:lnTo>
+                <a:close/>
+                <a:moveTo>
+                  <a:pt x="173974" y="234934"/>
+                </a:moveTo>
+                <a:cubicBezTo>
+                  <a:pt x="179689" y="229219"/>
+                  <a:pt x="182880" y="221456"/>
+                  <a:pt x="182880" y="213360"/>
+                </a:cubicBezTo>
+                <a:lnTo>
+                  <a:pt x="152400" y="213360"/>
+                </a:lnTo>
+                <a:lnTo>
+                  <a:pt x="121920" y="213360"/>
+                </a:lnTo>
+                <a:cubicBezTo>
+                  <a:pt x="121920" y="221456"/>
+                  <a:pt x="125110" y="229219"/>
+                  <a:pt x="130825" y="234934"/>
+                </a:cubicBezTo>
+                <a:cubicBezTo>
+                  <a:pt x="136540" y="240649"/>
+                  <a:pt x="144303" y="243840"/>
+                  <a:pt x="152400" y="243840"/>
+                </a:cubicBezTo>
+                <a:cubicBezTo>
+                  <a:pt x="160496" y="243840"/>
+                  <a:pt x="168259" y="240649"/>
+                  <a:pt x="173974" y="234934"/>
+                </a:cubicBezTo>
+                <a:close/>
+              </a:path>
+            </a:pathLst>
+          </a:custGeom>
+          <a:solidFill>
+            <a:srgbClr val="D4A373"/>
+          </a:solidFill>
+          <a:ln>
+            <a:noFill/>
+          </a:ln>
+          <a:effectLst/>
+        </p:spPr>
+        <p:txBody>
+          <a:bodyPr/>
+          <a:p/>
+        </p:txBody>
+      </p:sp>
+      <p:sp>
+        <p:nvSpPr>
+          <p:cNvPr id="28" name="dsl:v3-title"/>
+          <p:cNvSpPr txBox="1"/>
+          <p:nvPr/>
+        </p:nvSpPr>
+        <p:spPr>
+          <a:xfrm>
+            <a:off x="8258175" y="1714500"/>
+            <a:ext cx="3171825" cy="247650"/>
+          </a:xfrm>
+          <a:prstGeom prst="rect">
+            <a:avLst/>
+          </a:prstGeom>
+          <a:noFill/>
+        </p:spPr>
+        <p:txBody>
+          <a:bodyPr wrap="none" anchor="ctr">
+            <a:noAutofit/>
+          </a:bodyPr>
+          <a:lstStyle/>
+          <a:p>
+            <a:pPr algn="l"/>
+            <a:r>
+              <a:rPr b="1" sz="1500" noProof="1">
+                <a:solidFill>
+                  <a:srgbClr val="2D6A6A"/>
+                </a:solidFill>
+                <a:latin typeface="Liter"/>
+                <a:ea typeface="Liter"/>
+              </a:rPr>
+              <a:t>Reduced Alert Fatigue</a:t>
+            </a:r>
+          </a:p>
+        </p:txBody>
+      </p:sp>
+      <p:sp>
+        <p:nvSpPr>
+          <p:cNvPr id="29" name="dsl:v3-desc"/>
+          <p:cNvSpPr txBox="1"/>
+          <p:nvPr/>
+        </p:nvSpPr>
+        <p:spPr>
+          <a:xfrm>
+            <a:off x="8258175" y="2038350"/>
+            <a:ext cx="3171825" cy="1428750"/>
+          </a:xfrm>
+          <a:prstGeom prst="rect">
+            <a:avLst/>
+          </a:prstGeom>
+          <a:noFill/>
+        </p:spPr>
+        <p:txBody>
+          <a:bodyPr wrap="square" anchor="t">
+            <a:noAutofit/>
+          </a:bodyPr>
+          <a:lstStyle/>
+          <a:p>
+            <a:pPr algn="l"/>
+            <a:r>
+              <a:rPr sz="1200" noProof="1">
+                <a:solidFill>
+                  <a:srgbClr val="2B2D2F"/>
+                </a:solidFill>
+                <a:latin typeface="QuattrocentoSans"/>
+                <a:ea typeface="QuattrocentoSans"/>
+              </a:rPr>
+              <a:t>Deduplication and Sigma noise filtering suppress repetitive and low-value alerts before they reach analysts.</a:t>
+            </a:r>
+          </a:p>
+        </p:txBody>
+      </p:sp>
+      <p:sp>
+        <p:nvSpPr>
+          <p:cNvPr id="30" name="dsl:v4-bg"/>
+          <p:cNvSpPr/>
+          <p:nvPr/>
+        </p:nvSpPr>
+        <p:spPr>
+          <a:xfrm>
+            <a:off x="571500" y="3790950"/>
+            <a:ext cx="3552825" cy="2476500"/>
+          </a:xfrm>
+          <a:prstGeom prst="rect">
+            <a:avLst/>
+          </a:prstGeom>
+          <a:solidFill>
+            <a:srgbClr val="F5F5F2"/>
+          </a:solidFill>
+          <a:ln>
+            <a:noFill/>
+          </a:ln>
+          <a:effectLst/>
+        </p:spPr>
+        <p:style>
+          <a:lnRef idx="1">
+            <a:schemeClr val="accent1"/>
+          </a:lnRef>
+          <a:fillRef idx="3">
+            <a:schemeClr val="accent1"/>
+          </a:fillRef>
+          <a:effectRef idx="2">
+            <a:schemeClr val="accent1"/>
+          </a:effectRef>
+          <a:fontRef idx="minor">
+            <a:schemeClr val="lt1"/>
+          </a:fontRef>
+        </p:style>
+        <p:txBody>
+          <a:bodyPr rtlCol="0" anchor="ctr"/>
+          <a:lstStyle/>
+          <a:p>
+            <a:pPr algn="ctr"/>
+          </a:p>
+        </p:txBody>
+      </p:sp>
+      <p:sp>
+        <p:nvSpPr>
+          <p:cNvPr id="31" name="dsl:v4-accent"/>
+          <p:cNvSpPr/>
+          <p:nvPr/>
+        </p:nvSpPr>
+        <p:spPr>
+          <a:xfrm>
+            <a:off x="571500" y="3790950"/>
+            <a:ext cx="3552825" cy="47625"/>
+          </a:xfrm>
+          <a:prstGeom prst="rect">
+            <a:avLst/>
+          </a:prstGeom>
+          <a:solidFill>
+            <a:srgbClr val="2D6A6A"/>
+          </a:solidFill>
+          <a:ln>
+            <a:noFill/>
+          </a:ln>
+          <a:effectLst/>
+        </p:spPr>
+        <p:style>
+          <a:lnRef idx="1">
+            <a:schemeClr val="accent1"/>
+          </a:lnRef>
+          <a:fillRef idx="3">
+            <a:schemeClr val="accent1"/>
+          </a:fillRef>
+          <a:effectRef idx="2">
+            <a:schemeClr val="accent1"/>
+          </a:effectRef>
+          <a:fontRef idx="minor">
+            <a:schemeClr val="lt1"/>
+          </a:fontRef>
+        </p:style>
+        <p:txBody>
+          <a:bodyPr rtlCol="0" anchor="ctr"/>
+          <a:lstStyle/>
+          <a:p>
+            <a:pPr algn="ctr"/>
+          </a:p>
+        </p:txBody>
+      </p:sp>
+      <p:sp>
+        <p:nvSpPr>
+          <p:cNvPr id="32" name="dsl:v4-icon|i=fas:eye"/>
+          <p:cNvSpPr/>
+          <p:nvPr/>
+        </p:nvSpPr>
+        <p:spPr>
+          <a:xfrm>
+            <a:off x="762000" y="3998383"/>
+            <a:ext cx="304800" cy="270933"/>
+          </a:xfrm>
+          <a:custGeom>
+            <a:avLst/>
+            <a:gdLst/>
+            <a:ahLst/>
+            <a:cxnLst/>
+            <a:rect l="l" t="t" r="r" b="b"/>
+            <a:pathLst>
+              <a:path w="304800" h="270933">
+                <a:moveTo>
+                  <a:pt x="152400" y="42333"/>
+                </a:moveTo>
+                <a:cubicBezTo>
+                  <a:pt x="117898" y="42333"/>
+                  <a:pt x="89534" y="57996"/>
+                  <a:pt x="67786" y="78157"/>
+                </a:cubicBezTo>
+                <a:cubicBezTo>
+                  <a:pt x="47413" y="97102"/>
+                  <a:pt x="33337" y="119591"/>
+                  <a:pt x="26140" y="135466"/>
+                </a:cubicBezTo>
+                <a:cubicBezTo>
+                  <a:pt x="33337" y="151341"/>
+                  <a:pt x="47413" y="173831"/>
+                  <a:pt x="67733" y="192775"/>
+                </a:cubicBezTo>
+                <a:cubicBezTo>
+                  <a:pt x="89534" y="212936"/>
+                  <a:pt x="117898" y="228599"/>
+                  <a:pt x="152400" y="228599"/>
+                </a:cubicBezTo>
+                <a:cubicBezTo>
+                  <a:pt x="186901" y="228599"/>
+                  <a:pt x="215265" y="212936"/>
+                  <a:pt x="237013" y="192775"/>
+                </a:cubicBezTo>
+                <a:cubicBezTo>
+                  <a:pt x="257386" y="173831"/>
+                  <a:pt x="271462" y="151341"/>
+                  <a:pt x="278659" y="135466"/>
+                </a:cubicBezTo>
+                <a:cubicBezTo>
+                  <a:pt x="271462" y="119591"/>
+                  <a:pt x="257386" y="97102"/>
+                  <a:pt x="237066" y="78157"/>
+                </a:cubicBezTo>
+                <a:cubicBezTo>
+                  <a:pt x="215265" y="57996"/>
+                  <a:pt x="186901" y="42333"/>
+                  <a:pt x="152400" y="42333"/>
+                </a:cubicBezTo>
+                <a:close/>
+                <a:moveTo>
+                  <a:pt x="50482" y="59584"/>
+                </a:moveTo>
+                <a:cubicBezTo>
+                  <a:pt x="75406" y="36406"/>
+                  <a:pt x="109643" y="16933"/>
+                  <a:pt x="152400" y="16933"/>
+                </a:cubicBezTo>
+                <a:cubicBezTo>
+                  <a:pt x="195156" y="16933"/>
+                  <a:pt x="229393" y="36406"/>
+                  <a:pt x="254317" y="59584"/>
+                </a:cubicBezTo>
+                <a:cubicBezTo>
+                  <a:pt x="279082" y="82602"/>
+                  <a:pt x="295645" y="110066"/>
+                  <a:pt x="303530" y="128957"/>
+                </a:cubicBezTo>
+                <a:cubicBezTo>
+                  <a:pt x="305276" y="133138"/>
+                  <a:pt x="305276" y="137794"/>
+                  <a:pt x="303530" y="141975"/>
+                </a:cubicBezTo>
+                <a:cubicBezTo>
+                  <a:pt x="295645" y="160866"/>
+                  <a:pt x="279082" y="188383"/>
+                  <a:pt x="254317" y="211349"/>
+                </a:cubicBezTo>
+                <a:cubicBezTo>
+                  <a:pt x="229393" y="234526"/>
+                  <a:pt x="195156" y="253999"/>
+                  <a:pt x="152400" y="253999"/>
+                </a:cubicBezTo>
+                <a:cubicBezTo>
+                  <a:pt x="109643" y="253999"/>
+                  <a:pt x="75406" y="234526"/>
+                  <a:pt x="50482" y="211349"/>
+                </a:cubicBezTo>
+                <a:cubicBezTo>
+                  <a:pt x="25717" y="188383"/>
+                  <a:pt x="9154" y="160866"/>
+                  <a:pt x="1322" y="141975"/>
+                </a:cubicBezTo>
+                <a:cubicBezTo>
+                  <a:pt x="-423" y="137795"/>
+                  <a:pt x="-423" y="133138"/>
+                  <a:pt x="1322" y="128957"/>
+                </a:cubicBezTo>
+                <a:cubicBezTo>
+                  <a:pt x="9154" y="110066"/>
+                  <a:pt x="25717" y="82550"/>
+                  <a:pt x="50482" y="59584"/>
+                </a:cubicBezTo>
+                <a:close/>
+                <a:moveTo>
+                  <a:pt x="152400" y="177800"/>
+                </a:moveTo>
+                <a:cubicBezTo>
+                  <a:pt x="175789" y="177800"/>
+                  <a:pt x="194733" y="158855"/>
+                  <a:pt x="194733" y="135466"/>
+                </a:cubicBezTo>
+                <a:cubicBezTo>
+                  <a:pt x="194733" y="112077"/>
+                  <a:pt x="175789" y="93133"/>
+                  <a:pt x="152400" y="93133"/>
+                </a:cubicBezTo>
+                <a:cubicBezTo>
+                  <a:pt x="156104" y="93133"/>
+                  <a:pt x="151712" y="93133"/>
+                  <a:pt x="151341" y="93133"/>
+                </a:cubicBezTo>
+                <a:cubicBezTo>
+                  <a:pt x="152029" y="95832"/>
+                  <a:pt x="152400" y="98689"/>
+                  <a:pt x="152400" y="101600"/>
+                </a:cubicBezTo>
+                <a:cubicBezTo>
+                  <a:pt x="152400" y="120279"/>
+                  <a:pt x="137212" y="135466"/>
+                  <a:pt x="118533" y="135466"/>
+                </a:cubicBezTo>
+                <a:cubicBezTo>
+                  <a:pt x="115622" y="135466"/>
+                  <a:pt x="112765" y="139170"/>
+                  <a:pt x="110066" y="134408"/>
+                </a:cubicBezTo>
+                <a:cubicBezTo>
+                  <a:pt x="110066" y="138112"/>
+                  <a:pt x="110066" y="135096"/>
+                  <a:pt x="110066" y="135466"/>
+                </a:cubicBezTo>
+                <a:cubicBezTo>
+                  <a:pt x="110066" y="158855"/>
+                  <a:pt x="129010" y="177800"/>
+                  <a:pt x="152400" y="177800"/>
+                </a:cubicBezTo>
+                <a:close/>
+                <a:moveTo>
+                  <a:pt x="152400" y="67733"/>
+                </a:moveTo>
+                <a:cubicBezTo>
+                  <a:pt x="189557" y="67733"/>
+                  <a:pt x="220133" y="98309"/>
+                  <a:pt x="220133" y="135466"/>
+                </a:cubicBezTo>
+                <a:cubicBezTo>
+                  <a:pt x="220133" y="172624"/>
+                  <a:pt x="189557" y="203200"/>
+                  <a:pt x="152400" y="203200"/>
+                </a:cubicBezTo>
+                <a:cubicBezTo>
+                  <a:pt x="115242" y="203200"/>
+                  <a:pt x="84666" y="172624"/>
+                  <a:pt x="84666" y="135466"/>
+                </a:cubicBezTo>
+                <a:cubicBezTo>
+                  <a:pt x="84666" y="98309"/>
+                  <a:pt x="115242" y="67733"/>
+                  <a:pt x="152400" y="67733"/>
+                </a:cubicBezTo>
+                <a:close/>
+              </a:path>
+            </a:pathLst>
+          </a:custGeom>
+          <a:solidFill>
+            <a:srgbClr val="2D6A6A"/>
+          </a:solidFill>
+          <a:ln>
+            <a:noFill/>
+          </a:ln>
+          <a:effectLst/>
+        </p:spPr>
+        <p:txBody>
+          <a:bodyPr/>
+          <a:p/>
+        </p:txBody>
+      </p:sp>
+      <p:sp>
+        <p:nvSpPr>
+          <p:cNvPr id="33" name="dsl:v4-title"/>
+          <p:cNvSpPr txBox="1"/>
+          <p:nvPr/>
+        </p:nvSpPr>
+        <p:spPr>
+          <a:xfrm>
+            <a:off x="762000" y="4381500"/>
+            <a:ext cx="3171825" cy="247650"/>
+          </a:xfrm>
+          <a:prstGeom prst="rect">
+            <a:avLst/>
+          </a:prstGeom>
+          <a:noFill/>
+        </p:spPr>
+        <p:txBody>
+          <a:bodyPr wrap="none" anchor="ctr">
+            <a:noAutofit/>
+          </a:bodyPr>
+          <a:lstStyle/>
+          <a:p>
+            <a:pPr algn="l"/>
+            <a:r>
+              <a:rPr b="1" sz="1500" noProof="1">
+                <a:solidFill>
+                  <a:srgbClr val="2D6A6A"/>
+                </a:solidFill>
+                <a:latin typeface="Liter"/>
+                <a:ea typeface="Liter"/>
+              </a:rPr>
+              <a:t>Stronger Visibility</a:t>
+            </a:r>
+          </a:p>
+        </p:txBody>
+      </p:sp>
+      <p:sp>
+        <p:nvSpPr>
+          <p:cNvPr id="34" name="dsl:v4-desc"/>
+          <p:cNvSpPr txBox="1"/>
+          <p:nvPr/>
+        </p:nvSpPr>
+        <p:spPr>
+          <a:xfrm>
+            <a:off x="762000" y="4705350"/>
+            <a:ext cx="3171825" cy="1428750"/>
+          </a:xfrm>
+          <a:prstGeom prst="rect">
+            <a:avLst/>
+          </a:prstGeom>
+          <a:noFill/>
+        </p:spPr>
+        <p:txBody>
+          <a:bodyPr wrap="square" anchor="t">
+            <a:noAutofit/>
+          </a:bodyPr>
+          <a:lstStyle/>
+          <a:p>
+            <a:pPr algn="l"/>
+            <a:r>
+              <a:rPr sz="1200" noProof="1">
+                <a:solidFill>
+                  <a:srgbClr val="2B2D2F"/>
+                </a:solidFill>
+                <a:latin typeface="QuattrocentoSans"/>
+                <a:ea typeface="QuattrocentoSans"/>
+              </a:rPr>
+              <a:t>Network + host + runtime + metrics in a unified monitoring stack. No blind spots across the attack surface.</a:t>
+            </a:r>
+          </a:p>
+        </p:txBody>
+      </p:sp>
+      <p:sp>
+        <p:nvSpPr>
+          <p:cNvPr id="35" name="dsl:v5-bg"/>
+          <p:cNvSpPr/>
+          <p:nvPr/>
+        </p:nvSpPr>
+        <p:spPr>
+          <a:xfrm>
+            <a:off x="4314825" y="3790950"/>
+            <a:ext cx="3562350" cy="2476500"/>
+          </a:xfrm>
+          <a:prstGeom prst="rect">
+            <a:avLst/>
+          </a:prstGeom>
+          <a:solidFill>
+            <a:srgbClr val="F5F5F2"/>
+          </a:solidFill>
+          <a:ln>
+            <a:noFill/>
+          </a:ln>
+          <a:effectLst/>
+        </p:spPr>
+        <p:style>
+          <a:lnRef idx="1">
+            <a:schemeClr val="accent1"/>
+          </a:lnRef>
+          <a:fillRef idx="3">
+            <a:schemeClr val="accent1"/>
+          </a:fillRef>
+          <a:effectRef idx="2">
+            <a:schemeClr val="accent1"/>
+          </a:effectRef>
+          <a:fontRef idx="minor">
+            <a:schemeClr val="lt1"/>
+          </a:fontRef>
+        </p:style>
+        <p:txBody>
+          <a:bodyPr rtlCol="0" anchor="ctr"/>
+          <a:lstStyle/>
+          <a:p>
+            <a:pPr algn="ctr"/>
+          </a:p>
+        </p:txBody>
+      </p:sp>
+      <p:sp>
+        <p:nvSpPr>
+          <p:cNvPr id="36" name="dsl:v5-accent"/>
+          <p:cNvSpPr/>
+          <p:nvPr/>
+        </p:nvSpPr>
+        <p:spPr>
+          <a:xfrm>
+            <a:off x="4314825" y="3790950"/>
+            <a:ext cx="3562350" cy="47625"/>
+          </a:xfrm>
+          <a:prstGeom prst="rect">
+            <a:avLst/>
+          </a:prstGeom>
+          <a:solidFill>
+            <a:srgbClr val="2D6A6A"/>
+          </a:solidFill>
+          <a:ln>
+            <a:noFill/>
+          </a:ln>
+          <a:effectLst/>
+        </p:spPr>
+        <p:style>
+          <a:lnRef idx="1">
+            <a:schemeClr val="accent1"/>
+          </a:lnRef>
+          <a:fillRef idx="3">
+            <a:schemeClr val="accent1"/>
+          </a:fillRef>
+          <a:effectRef idx="2">
+            <a:schemeClr val="accent1"/>
+          </a:effectRef>
+          <a:fontRef idx="minor">
+            <a:schemeClr val="lt1"/>
+          </a:fontRef>
+        </p:style>
+        <p:txBody>
+          <a:bodyPr rtlCol="0" anchor="ctr"/>
+          <a:lstStyle/>
+          <a:p>
+            <a:pPr algn="ctr"/>
+          </a:p>
+        </p:txBody>
+      </p:sp>
+      <p:sp>
+        <p:nvSpPr>
+          <p:cNvPr id="37" name="dsl:v5-icon|i=fas:shield-halved"/>
+          <p:cNvSpPr/>
+          <p:nvPr/>
+        </p:nvSpPr>
+        <p:spPr>
+          <a:xfrm>
+            <a:off x="4505325" y="3981450"/>
+            <a:ext cx="304800" cy="304800"/>
+          </a:xfrm>
+          <a:custGeom>
+            <a:avLst/>
+            <a:gdLst/>
+            <a:ahLst/>
+            <a:cxnLst/>
+            <a:rect l="l" t="t" r="r" b="b"/>
+            <a:pathLst>
+              <a:path w="304800" h="304800">
+                <a:moveTo>
+                  <a:pt x="152400" y="0"/>
+                </a:moveTo>
+                <a:cubicBezTo>
+                  <a:pt x="155138" y="0"/>
+                  <a:pt x="157876" y="595"/>
+                  <a:pt x="160377" y="1726"/>
+                </a:cubicBezTo>
+                <a:lnTo>
+                  <a:pt x="272474" y="49291"/>
+                </a:lnTo>
+                <a:cubicBezTo>
+                  <a:pt x="285571" y="54828"/>
+                  <a:pt x="295334" y="67746"/>
+                  <a:pt x="295275" y="83343"/>
+                </a:cubicBezTo>
+                <a:cubicBezTo>
+                  <a:pt x="298251" y="142398"/>
+                  <a:pt x="270688" y="250447"/>
+                  <a:pt x="168116" y="299561"/>
+                </a:cubicBezTo>
+                <a:cubicBezTo>
+                  <a:pt x="158174" y="304323"/>
+                  <a:pt x="146625" y="304323"/>
+                  <a:pt x="136683" y="299561"/>
+                </a:cubicBezTo>
+                <a:cubicBezTo>
+                  <a:pt x="34111" y="250447"/>
+                  <a:pt x="9822" y="142398"/>
+                  <a:pt x="9525" y="83343"/>
+                </a:cubicBezTo>
+                <a:cubicBezTo>
+                  <a:pt x="10120" y="67746"/>
+                  <a:pt x="19228" y="54828"/>
+                  <a:pt x="32325" y="49291"/>
+                </a:cubicBezTo>
+                <a:lnTo>
+                  <a:pt x="144482" y="1726"/>
+                </a:lnTo>
+                <a:cubicBezTo>
+                  <a:pt x="146923" y="595"/>
+                  <a:pt x="149661" y="0"/>
+                  <a:pt x="152400" y="0"/>
+                </a:cubicBezTo>
+                <a:close/>
+                <a:moveTo>
+                  <a:pt x="152400" y="39766"/>
+                </a:moveTo>
+                <a:lnTo>
+                  <a:pt x="152400" y="264795"/>
+                </a:lnTo>
+                <a:cubicBezTo>
+                  <a:pt x="234553" y="225028"/>
+                  <a:pt x="256639" y="136981"/>
+                  <a:pt x="257175" y="84177"/>
+                </a:cubicBezTo>
+                <a:lnTo>
+                  <a:pt x="152400" y="39766"/>
+                </a:lnTo>
+                <a:lnTo>
+                  <a:pt x="152400" y="39766"/>
+                </a:lnTo>
+                <a:close/>
+              </a:path>
+            </a:pathLst>
+          </a:custGeom>
+          <a:solidFill>
+            <a:srgbClr val="2D6A6A"/>
+          </a:solidFill>
+          <a:ln>
+            <a:noFill/>
+          </a:ln>
+          <a:effectLst/>
+        </p:spPr>
+        <p:txBody>
+          <a:bodyPr/>
+          <a:p/>
+        </p:txBody>
+      </p:sp>
+      <p:sp>
+        <p:nvSpPr>
+          <p:cNvPr id="38" name="dsl:v5-title"/>
+          <p:cNvSpPr txBox="1"/>
+          <p:nvPr/>
+        </p:nvSpPr>
+        <p:spPr>
+          <a:xfrm>
+            <a:off x="4505325" y="4381500"/>
+            <a:ext cx="3181350" cy="247650"/>
+          </a:xfrm>
+          <a:prstGeom prst="rect">
+            <a:avLst/>
+          </a:prstGeom>
+          <a:noFill/>
+        </p:spPr>
+        <p:txBody>
+          <a:bodyPr wrap="none" anchor="ctr">
+            <a:noAutofit/>
+          </a:bodyPr>
+          <a:lstStyle/>
+          <a:p>
+            <a:pPr algn="l"/>
+            <a:r>
+              <a:rPr b="1" sz="1500" noProof="1">
+                <a:solidFill>
+                  <a:srgbClr val="2D6A6A"/>
+                </a:solidFill>
+                <a:latin typeface="Liter"/>
+                <a:ea typeface="Liter"/>
+              </a:rPr>
+              <a:t>Consistent Response</a:t>
+            </a:r>
+          </a:p>
+        </p:txBody>
+      </p:sp>
+      <p:sp>
+        <p:nvSpPr>
+          <p:cNvPr id="39" name="dsl:v5-desc"/>
+          <p:cNvSpPr txBox="1"/>
+          <p:nvPr/>
+        </p:nvSpPr>
+        <p:spPr>
+          <a:xfrm>
+            <a:off x="4505325" y="4705350"/>
+            <a:ext cx="3181350" cy="1428750"/>
+          </a:xfrm>
+          <a:prstGeom prst="rect">
+            <a:avLst/>
+          </a:prstGeom>
+          <a:noFill/>
+        </p:spPr>
+        <p:txBody>
+          <a:bodyPr wrap="square" anchor="t">
+            <a:noAutofit/>
+          </a:bodyPr>
+          <a:lstStyle/>
+          <a:p>
+            <a:pPr algn="l"/>
+            <a:r>
+              <a:rPr sz="1200" noProof="1">
+                <a:solidFill>
+                  <a:srgbClr val="2B2D2F"/>
+                </a:solidFill>
+                <a:latin typeface="QuattrocentoSans"/>
+                <a:ea typeface="QuattrocentoSans"/>
+              </a:rPr>
+              <a:t>Approval-gated Ansible playbooks with verification ensure every response follows the same controlled process.</a:t>
+            </a:r>
+          </a:p>
+        </p:txBody>
+      </p:sp>
+      <p:sp>
+        <p:nvSpPr>
+          <p:cNvPr id="40" name="dsl:v6-bg"/>
+          <p:cNvSpPr/>
+          <p:nvPr/>
+        </p:nvSpPr>
+        <p:spPr>
+          <a:xfrm>
+            <a:off x="8067675" y="3790950"/>
+            <a:ext cx="3552825" cy="2476500"/>
+          </a:xfrm>
+          <a:prstGeom prst="rect">
+            <a:avLst/>
+          </a:prstGeom>
+          <a:solidFill>
+            <a:srgbClr val="F5F5F2"/>
+          </a:solidFill>
+          <a:ln>
+            <a:noFill/>
+          </a:ln>
+          <a:effectLst/>
+        </p:spPr>
+        <p:style>
+          <a:lnRef idx="1">
+            <a:schemeClr val="accent1"/>
+          </a:lnRef>
+          <a:fillRef idx="3">
+            <a:schemeClr val="accent1"/>
+          </a:fillRef>
+          <a:effectRef idx="2">
+            <a:schemeClr val="accent1"/>
+          </a:effectRef>
+          <a:fontRef idx="minor">
+            <a:schemeClr val="lt1"/>
+          </a:fontRef>
+        </p:style>
+        <p:txBody>
+          <a:bodyPr rtlCol="0" anchor="ctr"/>
+          <a:lstStyle/>
+          <a:p>
+            <a:pPr algn="ctr"/>
+          </a:p>
+        </p:txBody>
+      </p:sp>
+      <p:sp>
+        <p:nvSpPr>
+          <p:cNvPr id="41" name="dsl:v6-accent"/>
+          <p:cNvSpPr/>
+          <p:nvPr/>
+        </p:nvSpPr>
+        <p:spPr>
+          <a:xfrm>
+            <a:off x="8067675" y="3790950"/>
+            <a:ext cx="3552825" cy="47625"/>
+          </a:xfrm>
+          <a:prstGeom prst="rect">
+            <a:avLst/>
+          </a:prstGeom>
+          <a:solidFill>
+            <a:srgbClr val="2D6A6A"/>
+          </a:solidFill>
+          <a:ln>
+            <a:noFill/>
+          </a:ln>
+          <a:effectLst/>
+        </p:spPr>
+        <p:style>
+          <a:lnRef idx="1">
+            <a:schemeClr val="accent1"/>
+          </a:lnRef>
+          <a:fillRef idx="3">
+            <a:schemeClr val="accent1"/>
+          </a:fillRef>
+          <a:effectRef idx="2">
+            <a:schemeClr val="accent1"/>
+          </a:effectRef>
+          <a:fontRef idx="minor">
+            <a:schemeClr val="lt1"/>
+          </a:fontRef>
+        </p:style>
+        <p:txBody>
+          <a:bodyPr rtlCol="0" anchor="ctr"/>
+          <a:lstStyle/>
+          <a:p>
+            <a:pPr algn="ctr"/>
+          </a:p>
+        </p:txBody>
+      </p:sp>
+      <p:sp>
+        <p:nvSpPr>
+          <p:cNvPr id="42" name="dsl:v6-icon|i=fas:chart-line"/>
+          <p:cNvSpPr/>
+          <p:nvPr/>
+        </p:nvSpPr>
+        <p:spPr>
+          <a:xfrm>
+            <a:off x="8258175" y="3981450"/>
+            <a:ext cx="304800" cy="304800"/>
+          </a:xfrm>
+          <a:custGeom>
+            <a:avLst/>
+            <a:gdLst/>
+            <a:ahLst/>
+            <a:cxnLst/>
+            <a:rect l="l" t="t" r="r" b="b"/>
+            <a:pathLst>
+              <a:path w="304800" h="304800">
+                <a:moveTo>
+                  <a:pt x="38100" y="38100"/>
+                </a:moveTo>
+                <a:cubicBezTo>
+                  <a:pt x="38100" y="27562"/>
+                  <a:pt x="29587" y="19050"/>
+                  <a:pt x="19050" y="19050"/>
+                </a:cubicBezTo>
+                <a:cubicBezTo>
+                  <a:pt x="8512" y="19050"/>
+                  <a:pt x="0" y="27562"/>
+                  <a:pt x="0" y="38100"/>
+                </a:cubicBezTo>
+                <a:lnTo>
+                  <a:pt x="0" y="238125"/>
+                </a:lnTo>
+                <a:cubicBezTo>
+                  <a:pt x="0" y="264437"/>
+                  <a:pt x="21312" y="285750"/>
+                  <a:pt x="47625" y="285750"/>
+                </a:cubicBezTo>
+                <a:lnTo>
+                  <a:pt x="285750" y="285750"/>
+                </a:lnTo>
+                <a:cubicBezTo>
+                  <a:pt x="296287" y="285750"/>
+                  <a:pt x="304800" y="277237"/>
+                  <a:pt x="304800" y="266700"/>
+                </a:cubicBezTo>
+                <a:cubicBezTo>
+                  <a:pt x="304800" y="256162"/>
+                  <a:pt x="296287" y="247650"/>
+                  <a:pt x="285750" y="247650"/>
+                </a:cubicBezTo>
+                <a:lnTo>
+                  <a:pt x="47625" y="247650"/>
+                </a:lnTo>
+                <a:cubicBezTo>
+                  <a:pt x="42386" y="247650"/>
+                  <a:pt x="38100" y="243363"/>
+                  <a:pt x="38100" y="238125"/>
+                </a:cubicBezTo>
+                <a:lnTo>
+                  <a:pt x="38100" y="38100"/>
+                </a:lnTo>
+                <a:close/>
+                <a:moveTo>
+                  <a:pt x="280154" y="89654"/>
+                </a:moveTo>
+                <a:cubicBezTo>
+                  <a:pt x="287595" y="82212"/>
+                  <a:pt x="287595" y="70127"/>
+                  <a:pt x="280154" y="62686"/>
+                </a:cubicBezTo>
+                <a:cubicBezTo>
+                  <a:pt x="272712" y="55245"/>
+                  <a:pt x="260627" y="55245"/>
+                  <a:pt x="253186" y="62686"/>
+                </a:cubicBezTo>
+                <a:lnTo>
+                  <a:pt x="190500" y="125432"/>
+                </a:lnTo>
+                <a:lnTo>
+                  <a:pt x="156329" y="91261"/>
+                </a:lnTo>
+                <a:cubicBezTo>
+                  <a:pt x="148887" y="83819"/>
+                  <a:pt x="136802" y="83819"/>
+                  <a:pt x="129361" y="91261"/>
+                </a:cubicBezTo>
+                <a:lnTo>
+                  <a:pt x="62686" y="157936"/>
+                </a:lnTo>
+                <a:cubicBezTo>
+                  <a:pt x="55245" y="165377"/>
+                  <a:pt x="55245" y="177462"/>
+                  <a:pt x="62686" y="184904"/>
+                </a:cubicBezTo>
+                <a:cubicBezTo>
+                  <a:pt x="70127" y="192345"/>
+                  <a:pt x="82212" y="192345"/>
+                  <a:pt x="89654" y="184904"/>
+                </a:cubicBezTo>
+                <a:lnTo>
+                  <a:pt x="142875" y="131742"/>
+                </a:lnTo>
+                <a:lnTo>
+                  <a:pt x="177045" y="165913"/>
+                </a:lnTo>
+                <a:cubicBezTo>
+                  <a:pt x="184487" y="173355"/>
+                  <a:pt x="196572" y="173355"/>
+                  <a:pt x="204013" y="165913"/>
+                </a:cubicBezTo>
+                <a:lnTo>
+                  <a:pt x="280213" y="89713"/>
+                </a:lnTo>
+                <a:close/>
+              </a:path>
+            </a:pathLst>
+          </a:custGeom>
+          <a:solidFill>
+            <a:srgbClr val="2D6A6A"/>
+          </a:solidFill>
+          <a:ln>
+            <a:noFill/>
+          </a:ln>
+          <a:effectLst/>
+        </p:spPr>
+        <p:txBody>
+          <a:bodyPr/>
+          <a:p/>
+        </p:txBody>
+      </p:sp>
+      <p:sp>
+        <p:nvSpPr>
+          <p:cNvPr id="43" name="dsl:v6-title"/>
+          <p:cNvSpPr txBox="1"/>
+          <p:nvPr/>
+        </p:nvSpPr>
+        <p:spPr>
+          <a:xfrm>
+            <a:off x="8258175" y="4381500"/>
+            <a:ext cx="3171825" cy="247650"/>
+          </a:xfrm>
+          <a:prstGeom prst="rect">
+            <a:avLst/>
+          </a:prstGeom>
+          <a:noFill/>
+        </p:spPr>
+        <p:txBody>
+          <a:bodyPr wrap="none" anchor="ctr">
+            <a:noAutofit/>
+          </a:bodyPr>
+          <a:lstStyle/>
+          <a:p>
+            <a:pPr algn="l"/>
+            <a:r>
+              <a:rPr b="1" sz="1500" noProof="1">
+                <a:solidFill>
+                  <a:srgbClr val="2D6A6A"/>
+                </a:solidFill>
+                <a:latin typeface="Liter"/>
+                <a:ea typeface="Liter"/>
+              </a:rPr>
+              <a:t>Improved Efficiency</a:t>
+            </a:r>
+          </a:p>
+        </p:txBody>
+      </p:sp>
+      <p:sp>
+        <p:nvSpPr>
+          <p:cNvPr id="44" name="dsl:v6-desc"/>
+          <p:cNvSpPr txBox="1"/>
+          <p:nvPr/>
+        </p:nvSpPr>
+        <p:spPr>
+          <a:xfrm>
+            <a:off x="8258175" y="4705350"/>
+            <a:ext cx="3171825" cy="1428750"/>
+          </a:xfrm>
+          <a:prstGeom prst="rect">
+            <a:avLst/>
+          </a:prstGeom>
+          <a:noFill/>
+        </p:spPr>
+        <p:txBody>
+          <a:bodyPr wrap="square" anchor="t">
+            <a:noAutofit/>
+          </a:bodyPr>
+          <a:lstStyle/>
+          <a:p>
+            <a:pPr algn="l"/>
+            <a:r>
+              <a:rPr sz="1200" noProof="1">
+                <a:solidFill>
+                  <a:srgbClr val="2B2D2F"/>
+                </a:solidFill>
+                <a:latin typeface="QuattrocentoSans"/>
+                <a:ea typeface="QuattrocentoSans"/>
+              </a:rPr>
+              <a:t>Analysts focus on decisions, not repetitive tasks. The platform handles correlation, enrichment, and documentation.</a:t>
+            </a:r>
+          </a:p>
+        </p:txBody>
+      </p:sp>
+      <p:sp>
+        <p:nvSpPr>
+          <p:cNvPr id="45" name="dsl:metrics-bg"/>
+          <p:cNvSpPr/>
+          <p:nvPr/>
+        </p:nvSpPr>
+        <p:spPr>
+          <a:xfrm>
+            <a:off x="571500" y="6400800"/>
+            <a:ext cx="11049000" cy="171450"/>
+          </a:xfrm>
+          <a:prstGeom prst="rect">
+            <a:avLst/>
+          </a:prstGeom>
+          <a:solidFill>
+            <a:srgbClr val="2D6A6A"/>
+          </a:solidFill>
+          <a:ln>
+            <a:noFill/>
+          </a:ln>
+          <a:effectLst/>
+        </p:spPr>
+        <p:style>
+          <a:lnRef idx="1">
+            <a:schemeClr val="accent1"/>
+          </a:lnRef>
+          <a:fillRef idx="3">
+            <a:schemeClr val="accent1"/>
+          </a:fillRef>
+          <a:effectRef idx="2">
+            <a:schemeClr val="accent1"/>
+          </a:effectRef>
+          <a:fontRef idx="minor">
+            <a:schemeClr val="lt1"/>
+          </a:fontRef>
+        </p:style>
+        <p:txBody>
+          <a:bodyPr rtlCol="0" anchor="ctr"/>
+          <a:lstStyle/>
+          <a:p>
+            <a:pPr algn="ctr"/>
+          </a:p>
+        </p:txBody>
+      </p:sp>
+      <p:sp>
+        <p:nvSpPr>
+          <p:cNvPr id="46" name="dsl:metrics-text"/>
+          <p:cNvSpPr txBox="1"/>
+          <p:nvPr/>
+        </p:nvSpPr>
+        <p:spPr>
+          <a:xfrm>
+            <a:off x="571500" y="6400800"/>
+            <a:ext cx="11049000" cy="171450"/>
+          </a:xfrm>
+          <a:prstGeom prst="rect">
+            <a:avLst/>
+          </a:prstGeom>
+          <a:noFill/>
+        </p:spPr>
+        <p:txBody>
+          <a:bodyPr wrap="none" anchor="ctr">
+            <a:noAutofit/>
+          </a:bodyPr>
+          <a:lstStyle/>
+          <a:p>
+            <a:pPr algn="ctr"/>
+            <a:r>
+              <a:rPr sz="825" noProof="1" spc="75">
+                <a:solidFill>
+                  <a:srgbClr val="FFFFFF"/>
+                </a:solidFill>
+                <a:latin typeface="Liter"/>
+                <a:ea typeface="Liter"/>
+              </a:rPr>
+              <a:t>910 TESTS (MAY ACCEPTANCE)  |  146 MODULES  |  12-STEP PIPELINE  |  MULTI-SERVER DEPLOYMENT</a:t>
+            </a:r>
+          </a:p>
+        </p:txBody>
+      </p:sp>
+      <p:sp>
+        <p:nvSpPr>
+          <p:cNvPr id="47" name="dsl:footer-author"/>
+          <p:cNvSpPr txBox="1"/>
+          <p:nvPr/>
+        </p:nvSpPr>
+        <p:spPr>
+          <a:xfrm>
+            <a:off x="571500" y="6629400"/>
+            <a:ext cx="1905000" cy="152400"/>
+          </a:xfrm>
+          <a:prstGeom prst="rect">
+            <a:avLst/>
+          </a:prstGeom>
+          <a:noFill/>
+        </p:spPr>
+        <p:txBody>
+          <a:bodyPr wrap="none" anchor="ctr">
+            <a:noAutofit/>
+          </a:bodyPr>
+          <a:lstStyle/>
+          <a:p>
+            <a:pPr algn="l"/>
+            <a:r>
+              <a:rPr sz="825" noProof="1" spc="75">
+                <a:solidFill>
+                  <a:srgbClr val="5C6B73"/>
+                </a:solidFill>
+                <a:latin typeface="Liter"/>
+                <a:ea typeface="Liter"/>
+              </a:rPr>
+              <a:t>GHAZI MABROUKI</a:t>
+            </a:r>
+          </a:p>
+        </p:txBody>
+      </p:sp>
+      <p:sp>
+        <p:nvSpPr>
+          <p:cNvPr id="48" name="dsl:footer-page"/>
+          <p:cNvSpPr txBox="1"/>
+          <p:nvPr/>
+        </p:nvSpPr>
+        <p:spPr>
+          <a:xfrm>
+            <a:off x="11334750" y="6629400"/>
+            <a:ext cx="381000" cy="152400"/>
+          </a:xfrm>
+          <a:prstGeom prst="rect">
+            <a:avLst/>
+          </a:prstGeom>
+          <a:noFill/>
+        </p:spPr>
+        <p:txBody>
+          <a:bodyPr wrap="none" anchor="ctr">
+            <a:noAutofit/>
+          </a:bodyPr>
+          <a:lstStyle/>
+          <a:p>
+            <a:pPr algn="r"/>
+            <a:r>
+              <a:rPr sz="900" noProof="1">
+                <a:solidFill>
+                  <a:srgbClr val="5C6B73"/>
+                </a:solidFill>
+                <a:latin typeface="Liter"/>
+                <a:ea typeface="Liter"/>
+              </a:rPr>
+              <a:t>32</a:t>
+            </a:r>
+          </a:p>
+        </p:txBody>
+      </p:sp>
+    </p:spTree>
+  </p:cSld>
+  <p:clrMapOvr>
+    <a:masterClrMapping/>
+  </p:clrMapOvr>
+</p:sld>
+</file>
+
+<file path=ppt/slides/slide33.xml><?xml version="1.0" encoding="utf-8"?>
+<p:sld xmlns:a="http://schemas.openxmlformats.org/drawingml/2006/main" xmlns:p="http://schemas.openxmlformats.org/presentationml/2006/main" xmlns:r="http://schemas.openxmlformats.org/officeDocument/2006/relationships">
+  <p:cSld>
+    <p:bg>
+      <p:bgPr>
+        <a:solidFill>
+          <a:srgbClr val="FAFAF8"/>
+        </a:solidFill>
+        <a:effectLst/>
+      </p:bgPr>
+    </p:bg>
+    <p:spTree>
+      <p:nvGrpSpPr>
+        <p:cNvPr id="1" name=""/>
+        <p:cNvGrpSpPr/>
+        <p:nvPr/>
+      </p:nvGrpSpPr>
+      <p:grpSpPr/>
+      <p:sp>
+        <p:nvSpPr>
           <p:cNvPr id="2" name="dsl:nav-bg"/>
           <p:cNvSpPr/>
           <p:nvPr/>
@@ -40130,7 +40722,7 @@
                 <a:latin typeface="Liter"/>
                 <a:ea typeface="Liter"/>
               </a:rPr>
-              <a:t>31</a:t>
+              <a:t>33</a:t>
             </a:r>
           </a:p>
         </p:txBody>
@@ -40143,7 +40735,7 @@
 </p:sld>
 </file>
 
-<file path=ppt/slides/slide32.xml><?xml version="1.0" encoding="utf-8"?>
+<file path=ppt/slides/slide34.xml><?xml version="1.0" encoding="utf-8"?>
 <p:sld xmlns:a="http://schemas.openxmlformats.org/drawingml/2006/main" xmlns:p="http://schemas.openxmlformats.org/presentationml/2006/main" xmlns:r="http://schemas.openxmlformats.org/officeDocument/2006/relationships">
   <p:cSld>
     <p:bg>

--- a/Presntations/ARIA_Technical_Presentation_Ghazi_Mabrouki_FINAL.pptx
+++ b/Presntations/ARIA_Technical_Presentation_Ghazi_Mabrouki_FINAL.pptx
@@ -25683,16 +25683,86 @@
           </a:p>
         </p:txBody>
       </p:sp>
+      <p:sp>
+        <p:nvSpPr>
+          <p:cNvPr id="6" name="TextBox 5"/>
+          <p:cNvSpPr txBox="1"/>
+          <p:nvPr/>
+        </p:nvSpPr>
+        <p:spPr>
+          <a:xfrm>
+            <a:off x="571500" y="6629400"/>
+            <a:ext cx="1904695" cy="152704"/>
+          </a:xfrm>
+          <a:prstGeom prst="rect">
+            <a:avLst/>
+          </a:prstGeom>
+          <a:noFill/>
+        </p:spPr>
+        <p:txBody>
+          <a:bodyPr wrap="square" lIns="0" rIns="0" tIns="0" bIns="0">
+            <a:spAutoFit/>
+          </a:bodyPr>
+          <a:lstStyle/>
+          <a:p>
+            <a:pPr algn="l"/>
+            <a:r>
+              <a:rPr sz="825" b="0">
+                <a:solidFill>
+                  <a:srgbClr val="5C6B73"/>
+                </a:solidFill>
+                <a:latin typeface="Liter"/>
+              </a:rPr>
+              <a:t>GHAZI MABROUKI</a:t>
+            </a:r>
+          </a:p>
+        </p:txBody>
+      </p:sp>
+      <p:sp>
+        <p:nvSpPr>
+          <p:cNvPr id="7" name="dsl:footer-page"/>
+          <p:cNvSpPr txBox="1"/>
+          <p:nvPr/>
+        </p:nvSpPr>
+        <p:spPr>
+          <a:xfrm>
+            <a:off x="11334902" y="6629400"/>
+            <a:ext cx="381304" cy="152704"/>
+          </a:xfrm>
+          <a:prstGeom prst="rect">
+            <a:avLst/>
+          </a:prstGeom>
+          <a:noFill/>
+        </p:spPr>
+        <p:txBody>
+          <a:bodyPr wrap="square" lIns="0" rIns="0" tIns="0" bIns="0">
+            <a:spAutoFit/>
+          </a:bodyPr>
+          <a:lstStyle/>
+          <a:p>
+            <a:pPr algn="r"/>
+            <a:r>
+              <a:rPr sz="900" b="0">
+                <a:solidFill>
+                  <a:srgbClr val="5C6B73"/>
+                </a:solidFill>
+                <a:latin typeface="Liter"/>
+              </a:rPr>
+              <a:t>22</a:t>
+            </a:r>
+          </a:p>
+        </p:txBody>
+      </p:sp>
       <p:pic>
         <p:nvPicPr>
-          <p:cNvPr id="5" name="Picture 4" descr="board_tech_a.png"/>
+          <p:cNvPr id="8" name="Picture 7" descr="board_tech_a.png"/>
           <p:cNvPicPr>
             <a:picLocks noChangeAspect="1"/>
           </p:cNvPicPr>
           <p:nvPr/>
         </p:nvPicPr>
         <p:blipFill>
-          <a:blip r:embed="rId2"/>
+          <a:blip r:embed="rId4"/>
           <a:stretch>
             <a:fillRect/>
           </a:stretch>
@@ -25707,76 +25777,6 @@
           </a:prstGeom>
         </p:spPr>
       </p:pic>
-      <p:sp>
-        <p:nvSpPr>
-          <p:cNvPr id="6" name="TextBox 5"/>
-          <p:cNvSpPr txBox="1"/>
-          <p:nvPr/>
-        </p:nvSpPr>
-        <p:spPr>
-          <a:xfrm>
-            <a:off x="571500" y="6629400"/>
-            <a:ext cx="1904695" cy="152704"/>
-          </a:xfrm>
-          <a:prstGeom prst="rect">
-            <a:avLst/>
-          </a:prstGeom>
-          <a:noFill/>
-        </p:spPr>
-        <p:txBody>
-          <a:bodyPr wrap="square" lIns="0" rIns="0" tIns="0" bIns="0">
-            <a:spAutoFit/>
-          </a:bodyPr>
-          <a:lstStyle/>
-          <a:p>
-            <a:pPr algn="l"/>
-            <a:r>
-              <a:rPr sz="825" b="0">
-                <a:solidFill>
-                  <a:srgbClr val="5C6B73"/>
-                </a:solidFill>
-                <a:latin typeface="Liter"/>
-              </a:rPr>
-              <a:t>GHAZI MABROUKI</a:t>
-            </a:r>
-          </a:p>
-        </p:txBody>
-      </p:sp>
-      <p:sp>
-        <p:nvSpPr>
-          <p:cNvPr id="7" name="dsl:footer-page"/>
-          <p:cNvSpPr txBox="1"/>
-          <p:nvPr/>
-        </p:nvSpPr>
-        <p:spPr>
-          <a:xfrm>
-            <a:off x="11334902" y="6629400"/>
-            <a:ext cx="381304" cy="152704"/>
-          </a:xfrm>
-          <a:prstGeom prst="rect">
-            <a:avLst/>
-          </a:prstGeom>
-          <a:noFill/>
-        </p:spPr>
-        <p:txBody>
-          <a:bodyPr wrap="square" lIns="0" rIns="0" tIns="0" bIns="0">
-            <a:spAutoFit/>
-          </a:bodyPr>
-          <a:lstStyle/>
-          <a:p>
-            <a:pPr algn="r"/>
-            <a:r>
-              <a:rPr sz="900" b="0">
-                <a:solidFill>
-                  <a:srgbClr val="5C6B73"/>
-                </a:solidFill>
-                <a:latin typeface="Liter"/>
-              </a:rPr>
-              <a:t>22</a:t>
-            </a:r>
-          </a:p>
-        </p:txBody>
-      </p:sp>
     </p:spTree>
   </p:cSld>
   <p:clrMapOvr>
